--- a/lessons/lesson-04/slides.pptx
+++ b/lessons/lesson-04/slides.pptx
@@ -2,29 +2,30 @@
 <file path=ppt/presentation.xml><?xml version="1.0" encoding="utf-8"?>
 <p:presentation xmlns:p="http://schemas.openxmlformats.org/presentationml/2006/main">
   <p:sldMasterIdLst>
-    <p:sldMasterId xmlns:r="http://schemas.openxmlformats.org/officeDocument/2006/relationships" id="2147483648" r:id="Rc3be68e1c71d40b6"/>
+    <p:sldMasterId xmlns:r="http://schemas.openxmlformats.org/officeDocument/2006/relationships" id="2147483648" r:id="R817fdffd97f64cb4"/>
   </p:sldMasterIdLst>
   <p:notesMasterIdLst>
-    <p:notesMasterId xmlns:r="http://schemas.openxmlformats.org/officeDocument/2006/relationships" r:id="R45f1f1c3f2a844f6"/>
+    <p:notesMasterId xmlns:r="http://schemas.openxmlformats.org/officeDocument/2006/relationships" r:id="R4ba6313f2bb3488c"/>
   </p:notesMasterIdLst>
   <p:sldIdLst>
-    <p:sldId xmlns:r="http://schemas.openxmlformats.org/officeDocument/2006/relationships" id="256" r:id="Ra158b5032ce44562"/>
-    <p:sldId xmlns:r="http://schemas.openxmlformats.org/officeDocument/2006/relationships" id="257" r:id="R309c6616c999469c"/>
-    <p:sldId xmlns:r="http://schemas.openxmlformats.org/officeDocument/2006/relationships" id="258" r:id="R72779cfe153f449d"/>
-    <p:sldId xmlns:r="http://schemas.openxmlformats.org/officeDocument/2006/relationships" id="259" r:id="R4a4f50501bff4635"/>
-    <p:sldId xmlns:r="http://schemas.openxmlformats.org/officeDocument/2006/relationships" id="260" r:id="Rdc0fb38de47346f8"/>
-    <p:sldId xmlns:r="http://schemas.openxmlformats.org/officeDocument/2006/relationships" id="261" r:id="R1f19288332eb4616"/>
-    <p:sldId xmlns:r="http://schemas.openxmlformats.org/officeDocument/2006/relationships" id="262" r:id="Reb1af25ac30f4355"/>
-    <p:sldId xmlns:r="http://schemas.openxmlformats.org/officeDocument/2006/relationships" id="263" r:id="R966acc0315474c07"/>
-    <p:sldId xmlns:r="http://schemas.openxmlformats.org/officeDocument/2006/relationships" id="264" r:id="R1f0dcf8dcf4747a2"/>
-    <p:sldId xmlns:r="http://schemas.openxmlformats.org/officeDocument/2006/relationships" id="265" r:id="Radb7ef45e56c4cde"/>
-    <p:sldId xmlns:r="http://schemas.openxmlformats.org/officeDocument/2006/relationships" id="266" r:id="Ra76d1138b1f24476"/>
-    <p:sldId xmlns:r="http://schemas.openxmlformats.org/officeDocument/2006/relationships" id="267" r:id="Rb23e74ae74da4feb"/>
-    <p:sldId xmlns:r="http://schemas.openxmlformats.org/officeDocument/2006/relationships" id="268" r:id="R11f1493284ea4929"/>
-    <p:sldId xmlns:r="http://schemas.openxmlformats.org/officeDocument/2006/relationships" id="269" r:id="Rc8cea9f2311e4759"/>
-    <p:sldId xmlns:r="http://schemas.openxmlformats.org/officeDocument/2006/relationships" id="270" r:id="Rd4b9787552344ea1"/>
-    <p:sldId xmlns:r="http://schemas.openxmlformats.org/officeDocument/2006/relationships" id="271" r:id="Rbcc8b1a23ba24361"/>
-    <p:sldId xmlns:r="http://schemas.openxmlformats.org/officeDocument/2006/relationships" id="272" r:id="R63e9eb57a8ad4007"/>
+    <p:sldId xmlns:r="http://schemas.openxmlformats.org/officeDocument/2006/relationships" id="256" r:id="R26ff3fdb9c644185"/>
+    <p:sldId xmlns:r="http://schemas.openxmlformats.org/officeDocument/2006/relationships" id="257" r:id="Raa107620abf34103"/>
+    <p:sldId xmlns:r="http://schemas.openxmlformats.org/officeDocument/2006/relationships" id="258" r:id="R78180b5e03884695"/>
+    <p:sldId xmlns:r="http://schemas.openxmlformats.org/officeDocument/2006/relationships" id="259" r:id="R0e8f538d542b417c"/>
+    <p:sldId xmlns:r="http://schemas.openxmlformats.org/officeDocument/2006/relationships" id="260" r:id="R61bf3500a54c4551"/>
+    <p:sldId xmlns:r="http://schemas.openxmlformats.org/officeDocument/2006/relationships" id="261" r:id="R4e30268e86294d04"/>
+    <p:sldId xmlns:r="http://schemas.openxmlformats.org/officeDocument/2006/relationships" id="262" r:id="Re8917790891a491d"/>
+    <p:sldId xmlns:r="http://schemas.openxmlformats.org/officeDocument/2006/relationships" id="263" r:id="Rdb3d509f79d44ec7"/>
+    <p:sldId xmlns:r="http://schemas.openxmlformats.org/officeDocument/2006/relationships" id="264" r:id="R5a0e552036404292"/>
+    <p:sldId xmlns:r="http://schemas.openxmlformats.org/officeDocument/2006/relationships" id="265" r:id="R80d901f783294df4"/>
+    <p:sldId xmlns:r="http://schemas.openxmlformats.org/officeDocument/2006/relationships" id="266" r:id="R1467f533974c4a1d"/>
+    <p:sldId xmlns:r="http://schemas.openxmlformats.org/officeDocument/2006/relationships" id="267" r:id="R354d584f129d49a3"/>
+    <p:sldId xmlns:r="http://schemas.openxmlformats.org/officeDocument/2006/relationships" id="268" r:id="Rb958dc3ff98a499d"/>
+    <p:sldId xmlns:r="http://schemas.openxmlformats.org/officeDocument/2006/relationships" id="269" r:id="R3ff00bfc497e4e0a"/>
+    <p:sldId xmlns:r="http://schemas.openxmlformats.org/officeDocument/2006/relationships" id="270" r:id="Rd1dce4ebdd53480b"/>
+    <p:sldId xmlns:r="http://schemas.openxmlformats.org/officeDocument/2006/relationships" id="271" r:id="R4e16d5abb9d948c9"/>
+    <p:sldId xmlns:r="http://schemas.openxmlformats.org/officeDocument/2006/relationships" id="272" r:id="R30c379610f944182"/>
+    <p:sldId xmlns:r="http://schemas.openxmlformats.org/officeDocument/2006/relationships" id="273" r:id="R1900676708074ed9"/>
   </p:sldIdLst>
   <p:sldSz cx="12192000" cy="6858000"/>
   <p:notesSz cx="6858000" cy="9144000"/>
@@ -704,7 +705,7 @@
           <a:lstStyle xmlns:a="http://schemas.openxmlformats.org/drawingml/2006/main"/>
           <a:p xmlns:a="http://schemas.openxmlformats.org/drawingml/2006/main">
             <a:r>
-              <a:t>待核验 AI 输出为课程构造，但原文实际内容与位置来自 Keshav 2007。逐条让学生完成输出、偏差、原文、位置、处理决定。</a:t>
+              <a:t>用同一研究问题串起三篇真实论文：C02 提供 SAE 对 PCA 的正向 patching 结果；C16 提醒可解释不等于可控制；C31 提醒 patching 成功仍可能来自 dormant pathway。</a:t>
             </a:r>
           </a:p>
           <a:p xmlns:a="http://schemas.openxmlformats.org/drawingml/2006/main">
@@ -719,12 +720,17 @@
           </a:p>
           <a:p xmlns:a="http://schemas.openxmlformats.org/drawingml/2006/main">
             <a:r>
-              <a:t>- lessons/lesson-04/reading-card-demo.md</a:t>
-            </a:r>
-          </a:p>
-          <a:p xmlns:a="http://schemas.openxmlformats.org/drawingml/2006/main">
-            <a:r>
-              <a:t>- https://www.eecs.harvard.edu/~michaelm/postscripts/ReadPaper.pdf</a:t>
+              <a:t>- lessons/lesson-04/mi-reading-card-demo.md</a:t>
+            </a:r>
+          </a:p>
+          <a:p xmlns:a="http://schemas.openxmlformats.org/drawingml/2006/main">
+            <a:r>
+              <a:t>- lessons/lesson-03/mi-search-trace-demo.md</a:t>
+            </a:r>
+          </a:p>
+          <a:p xmlns:a="http://schemas.openxmlformats.org/drawingml/2006/main">
+            <a:r>
+              <a:t>- references/notes/mi-case-registry.md</a:t>
             </a:r>
           </a:p>
           <a:p xmlns:a="http://schemas.openxmlformats.org/drawingml/2006/main">
@@ -799,7 +805,7 @@
           <a:lstStyle xmlns:a="http://schemas.openxmlformats.org/drawingml/2006/main"/>
           <a:p xmlns:a="http://schemas.openxmlformats.org/drawingml/2006/main">
             <a:r>
-              <a:t>本页是 Keshav 2007 的压缩真实阅读卡；完整版本在 lesson-04/reading-card-demo.md。四问要求学生解释证据边界。</a:t>
+              <a:t>让学生分别说出三篇论文能支持什么、不能支持什么、还缺什么。结论保持 review：正向结果、控制性限制与效度威胁共同决定后续 baseline。</a:t>
             </a:r>
           </a:p>
           <a:p xmlns:a="http://schemas.openxmlformats.org/drawingml/2006/main">
@@ -814,17 +820,12 @@
           </a:p>
           <a:p xmlns:a="http://schemas.openxmlformats.org/drawingml/2006/main">
             <a:r>
-              <a:t>- lessons/lesson-04/reading-card-demo.md</a:t>
-            </a:r>
-          </a:p>
-          <a:p xmlns:a="http://schemas.openxmlformats.org/drawingml/2006/main">
-            <a:r>
-              <a:t>- references/material-contracts.md</a:t>
-            </a:r>
-          </a:p>
-          <a:p xmlns:a="http://schemas.openxmlformats.org/drawingml/2006/main">
-            <a:r>
-              <a:t>- https://doi.org/10.1145/1273445.1273458</a:t>
+              <a:t>- lessons/lesson-04/mi-reading-card-demo.md</a:t>
+            </a:r>
+          </a:p>
+          <a:p xmlns:a="http://schemas.openxmlformats.org/drawingml/2006/main">
+            <a:r>
+              <a:t>- references/notes/mi-case-registry.md</a:t>
             </a:r>
           </a:p>
           <a:p xmlns:a="http://schemas.openxmlformats.org/drawingml/2006/main">
@@ -1150,6 +1151,106 @@
 </file>
 
 <file path=ppt/notesSlides/notesSlide17.xml><?xml version="1.0" encoding="utf-8"?>
+<p:notes xmlns:p="http://schemas.openxmlformats.org/presentationml/2006/main">
+  <p:cSld>
+    <p:spTree>
+      <p:nvGrpSpPr>
+        <p:cNvPr id="1" name=""/>
+        <p:cNvGrpSpPr/>
+        <p:nvPr/>
+      </p:nvGrpSpPr>
+      <p:grpSpPr>
+        <a:xfrm xmlns:a="http://schemas.openxmlformats.org/drawingml/2006/main"/>
+      </p:grpSpPr>
+      <p:sp>
+        <p:nvSpPr>
+          <p:cNvPr id="2" name="Slide Image Placeholder 1"/>
+          <p:cNvSpPr>
+            <a:spLocks xmlns:a="http://schemas.openxmlformats.org/drawingml/2006/main" noGrp="1"/>
+          </p:cNvSpPr>
+          <p:nvPr>
+            <p:ph type="sldImg" idx="0"/>
+          </p:nvPr>
+        </p:nvSpPr>
+        <p:spPr/>
+      </p:sp>
+      <p:sp>
+        <p:nvSpPr>
+          <p:cNvPr id="3" name="Notes Placeholder 2"/>
+          <p:cNvSpPr>
+            <a:spLocks xmlns:a="http://schemas.openxmlformats.org/drawingml/2006/main" noGrp="1"/>
+          </p:cNvSpPr>
+          <p:nvPr>
+            <p:ph type="body" idx="1"/>
+          </p:nvPr>
+        </p:nvSpPr>
+        <p:spPr/>
+        <p:txBody>
+          <a:bodyPr xmlns:a="http://schemas.openxmlformats.org/drawingml/2006/main"/>
+          <a:lstStyle xmlns:a="http://schemas.openxmlformats.org/drawingml/2006/main"/>
+          <a:p xmlns:a="http://schemas.openxmlformats.org/drawingml/2006/main">
+            <a:r>
+              <a:t>用四步主链回收本讲：AI 先导航，研究者回到原文核验，再审计 AI 偏差，最后保留可追溯位置并人工定稿。本页不引入新任务。</a:t>
+            </a:r>
+          </a:p>
+          <a:p xmlns:a="http://schemas.openxmlformats.org/drawingml/2006/main">
+            <a:r>
+              <a:t/>
+            </a:r>
+          </a:p>
+          <a:p xmlns:a="http://schemas.openxmlformats.org/drawingml/2006/main">
+            <a:r>
+              <a:t>[Sources]</a:t>
+            </a:r>
+          </a:p>
+          <a:p xmlns:a="http://schemas.openxmlformats.org/drawingml/2006/main">
+            <a:r>
+              <a:t>- lessons/lesson-04/handout.md</a:t>
+            </a:r>
+          </a:p>
+          <a:p xmlns:a="http://schemas.openxmlformats.org/drawingml/2006/main">
+            <a:r>
+              <a:t>- lessons/lesson-04/slides.md</a:t>
+            </a:r>
+          </a:p>
+          <a:p xmlns:a="http://schemas.openxmlformats.org/drawingml/2006/main">
+            <a:r>
+              <a:t>- AGENTS.md</a:t>
+            </a:r>
+          </a:p>
+          <a:p xmlns:a="http://schemas.openxmlformats.org/drawingml/2006/main">
+            <a:r>
+              <a:t>[/Sources]</a:t>
+            </a:r>
+          </a:p>
+        </p:txBody>
+      </p:sp>
+      <p:sp>
+        <p:nvSpPr>
+          <p:cNvPr id="4" name="Slide Number Placeholder 3"/>
+          <p:cNvSpPr>
+            <a:spLocks xmlns:a="http://schemas.openxmlformats.org/drawingml/2006/main" noGrp="1"/>
+          </p:cNvSpPr>
+          <p:nvPr>
+            <p:ph type="sldNum" idx="5"/>
+          </p:nvPr>
+        </p:nvSpPr>
+        <p:spPr/>
+        <p:txBody>
+          <a:bodyPr xmlns:a="http://schemas.openxmlformats.org/drawingml/2006/main"/>
+          <a:lstStyle xmlns:a="http://schemas.openxmlformats.org/drawingml/2006/main"/>
+          <a:p xmlns:a="http://schemas.openxmlformats.org/drawingml/2006/main"/>
+        </p:txBody>
+      </p:sp>
+    </p:spTree>
+  </p:cSld>
+  <p:clrMapOvr>
+    <a:masterClrMapping xmlns:a="http://schemas.openxmlformats.org/drawingml/2006/main"/>
+  </p:clrMapOvr>
+</p:notes>
+</file>
+
+<file path=ppt/notesSlides/notesSlide18.xml><?xml version="1.0" encoding="utf-8"?>
 <p:notes xmlns:p="http://schemas.openxmlformats.org/presentationml/2006/main">
   <p:cSld>
     <p:spTree>
@@ -2035,7 +2136,7 @@
           <p:nvPr/>
         </p:nvPicPr>
         <p:blipFill>
-          <a:blip xmlns:r="http://schemas.openxmlformats.org/officeDocument/2006/relationships" xmlns:a="http://schemas.openxmlformats.org/drawingml/2006/main" r:embed="R38beda9d10954e2b">
+          <a:blip xmlns:r="http://schemas.openxmlformats.org/officeDocument/2006/relationships" xmlns:a="http://schemas.openxmlformats.org/drawingml/2006/main" r:embed="R7093efb09fcb48b6">
             <a:duotone>
               <a:prstClr val="black"/>
               <a:schemeClr val="accent1">
@@ -2213,7 +2314,7 @@
           <p:nvPr/>
         </p:nvPicPr>
         <p:blipFill rotWithShape="1">
-          <a:blip xmlns:r="http://schemas.openxmlformats.org/officeDocument/2006/relationships" xmlns:a="http://schemas.openxmlformats.org/drawingml/2006/main" r:embed="Rd8b035229999477b"/>
+          <a:blip xmlns:r="http://schemas.openxmlformats.org/officeDocument/2006/relationships" xmlns:a="http://schemas.openxmlformats.org/drawingml/2006/main" r:embed="R1ad96b964f0b4007"/>
           <a:srcRect xmlns:a="http://schemas.openxmlformats.org/drawingml/2006/main" l="74359" t="0" r="1346" b="0"/>
           <a:stretch xmlns:a="http://schemas.openxmlformats.org/drawingml/2006/main"/>
         </p:blipFill>
@@ -2236,7 +2337,7 @@
           <p:nvPr/>
         </p:nvPicPr>
         <p:blipFill rotWithShape="1">
-          <a:blip xmlns:r="http://schemas.openxmlformats.org/officeDocument/2006/relationships" xmlns:a="http://schemas.openxmlformats.org/drawingml/2006/main" r:embed="R1f6a15db415e4d22">
+          <a:blip xmlns:r="http://schemas.openxmlformats.org/officeDocument/2006/relationships" xmlns:a="http://schemas.openxmlformats.org/drawingml/2006/main" r:embed="Re2ab211312444df7">
             <a:alphaModFix amt="35000"/>
           </a:blip>
           <a:srcRect xmlns:a="http://schemas.openxmlformats.org/drawingml/2006/main" l="0" t="9831" r="0" b="36385"/>
@@ -2498,7 +2599,7 @@
           <p:nvPr/>
         </p:nvPicPr>
         <p:blipFill>
-          <a:blip xmlns:r="http://schemas.openxmlformats.org/officeDocument/2006/relationships" xmlns:a="http://schemas.openxmlformats.org/drawingml/2006/main" r:embed="R3c826c1fe22246e0"/>
+          <a:blip xmlns:r="http://schemas.openxmlformats.org/officeDocument/2006/relationships" xmlns:a="http://schemas.openxmlformats.org/drawingml/2006/main" r:embed="R7b7a6dce75b64b6b"/>
           <a:srcRect xmlns:a="http://schemas.openxmlformats.org/drawingml/2006/main" l="0" t="0" r="54251" b="0"/>
           <a:stretch xmlns:a="http://schemas.openxmlformats.org/drawingml/2006/main"/>
         </p:blipFill>
@@ -2755,7 +2856,7 @@
           <p:nvPr/>
         </p:nvPicPr>
         <p:blipFill rotWithShape="1">
-          <a:blip xmlns:r="http://schemas.openxmlformats.org/officeDocument/2006/relationships" xmlns:a="http://schemas.openxmlformats.org/drawingml/2006/main" r:embed="Rc8bd58d63cc74404"/>
+          <a:blip xmlns:r="http://schemas.openxmlformats.org/officeDocument/2006/relationships" xmlns:a="http://schemas.openxmlformats.org/drawingml/2006/main" r:embed="R05fd2fc091de4f01"/>
           <a:srcRect xmlns:a="http://schemas.openxmlformats.org/drawingml/2006/main" l="0" t="0" r="1346" b="0"/>
           <a:stretch xmlns:a="http://schemas.openxmlformats.org/drawingml/2006/main"/>
         </p:blipFill>
@@ -2938,7 +3039,7 @@
           <p:nvPr/>
         </p:nvPicPr>
         <p:blipFill>
-          <a:blip xmlns:r="http://schemas.openxmlformats.org/officeDocument/2006/relationships" xmlns:a="http://schemas.openxmlformats.org/drawingml/2006/main" r:embed="R5529f6e490714cf6"/>
+          <a:blip xmlns:r="http://schemas.openxmlformats.org/officeDocument/2006/relationships" xmlns:a="http://schemas.openxmlformats.org/drawingml/2006/main" r:embed="R2b8dc3f7f69a48ff"/>
           <a:stretch xmlns:a="http://schemas.openxmlformats.org/drawingml/2006/main">
             <a:fillRect l="0" t="0" r="0" b="0"/>
           </a:stretch>
@@ -3034,7 +3135,7 @@
           <p:nvPr/>
         </p:nvPicPr>
         <p:blipFill>
-          <a:blip xmlns:r="http://schemas.openxmlformats.org/officeDocument/2006/relationships" xmlns:a="http://schemas.openxmlformats.org/drawingml/2006/main" r:embed="R8c580b4b6d4d42b8">
+          <a:blip xmlns:r="http://schemas.openxmlformats.org/officeDocument/2006/relationships" xmlns:a="http://schemas.openxmlformats.org/drawingml/2006/main" r:embed="R6a85ee3687fe4402">
             <a:duotone>
               <a:prstClr val="black"/>
               <a:schemeClr val="accent1">
@@ -3201,7 +3302,7 @@
           <p:nvPr/>
         </p:nvPicPr>
         <p:blipFill rotWithShape="1">
-          <a:blip xmlns:r="http://schemas.openxmlformats.org/officeDocument/2006/relationships" xmlns:a="http://schemas.openxmlformats.org/drawingml/2006/main" r:embed="R1d952ff2de1a4927">
+          <a:blip xmlns:r="http://schemas.openxmlformats.org/officeDocument/2006/relationships" xmlns:a="http://schemas.openxmlformats.org/drawingml/2006/main" r:embed="R39b3b367f99b458e">
             <a:alphaModFix amt="20000"/>
             <a:duotone>
               <a:schemeClr val="accent4">
@@ -3299,10 +3400,10 @@
   </p:cSld>
   <p:clrMap bg1="lt1" tx1="dk1" bg2="lt2" tx2="dk2" accent1="accent1" accent2="accent2" accent3="accent3" accent4="accent4" accent5="accent5" accent6="accent6" hlink="hlink" folHlink="folHlink"/>
   <p:sldLayoutIdLst>
-    <p:sldLayoutId xmlns:r="http://schemas.openxmlformats.org/officeDocument/2006/relationships" id="2147483649" r:id="R31a3edeeb8a6491e"/>
-    <p:sldLayoutId xmlns:r="http://schemas.openxmlformats.org/officeDocument/2006/relationships" id="2147483650" r:id="R70ffa92a9b1e4326"/>
-    <p:sldLayoutId xmlns:r="http://schemas.openxmlformats.org/officeDocument/2006/relationships" id="2147483651" r:id="R8809711a31ad4061"/>
-    <p:sldLayoutId xmlns:r="http://schemas.openxmlformats.org/officeDocument/2006/relationships" id="2147483652" r:id="R405ffb07b9c94e3f"/>
+    <p:sldLayoutId xmlns:r="http://schemas.openxmlformats.org/officeDocument/2006/relationships" id="2147483649" r:id="R5a380aad3ec646a6"/>
+    <p:sldLayoutId xmlns:r="http://schemas.openxmlformats.org/officeDocument/2006/relationships" id="2147483650" r:id="R33fc326efd084b46"/>
+    <p:sldLayoutId xmlns:r="http://schemas.openxmlformats.org/officeDocument/2006/relationships" id="2147483651" r:id="R78a987f635f840d7"/>
+    <p:sldLayoutId xmlns:r="http://schemas.openxmlformats.org/officeDocument/2006/relationships" id="2147483652" r:id="Re107d86bdea4432f"/>
   </p:sldLayoutIdLst>
   <p:hf hdr="0" ftr="0" dt="0"/>
   <p:txStyles>
@@ -3835,120 +3936,6 @@
       </p:grpSpPr>
       <p:sp>
         <p:nvSpPr>
-          <p:cNvPr id="3" name="内容占位符 2">
-            <a:extLst xmlns:a="http://schemas.openxmlformats.org/drawingml/2006/main">
-              <a:ext uri="{FF2B5EF4-FFF2-40B4-BE49-F238E27FC236}">
-                <a16:creationId xmlns:a16="http://schemas.microsoft.com/office/drawing/2014/main" id="{D1D30E0E-D2D5-4C08-A919-2A1C2D5A8D02}"/>
-              </a:ext>
-            </a:extLst>
-          </p:cNvPr>
-          <p:cNvSpPr>
-            <a:spLocks xmlns:a="http://schemas.openxmlformats.org/drawingml/2006/main" noGrp="1"/>
-          </p:cNvSpPr>
-          <p:nvPr>
-            <p:ph idx="10"/>
-          </p:nvPr>
-        </p:nvSpPr>
-        <p:spPr>
-          <a:xfrm xmlns:a="http://schemas.openxmlformats.org/drawingml/2006/main">
-            <a:off x="1143000" y="2971800"/>
-            <a:ext cx="9906000" cy="2381250"/>
-          </a:xfrm>
-        </p:spPr>
-        <p:txBody>
-          <a:bodyPr xmlns:a="http://schemas.openxmlformats.org/drawingml/2006/main" lIns="0" tIns="0" rIns="0" bIns="0" anchor="ctr"/>
-          <a:lstStyle xmlns:a="http://schemas.openxmlformats.org/drawingml/2006/main"/>
-          <a:p xmlns:a="http://schemas.openxmlformats.org/drawingml/2006/main">
-            <a:pPr algn="ctr">
-              <a:lnSpc>
-                <a:spcPct val="125000"/>
-              </a:lnSpc>
-              <a:buNone/>
-            </a:pPr>
-            <a:r>
-              <a:rPr sz="1725" b="1">
-                <a:solidFill>
-                  <a:srgbClr val="18354E"/>
-                </a:solidFill>
-                <a:latin typeface="Microsoft YaHei"/>
-                <a:ea typeface="Microsoft YaHei"/>
-                <a:cs typeface="Microsoft YaHei"/>
-              </a:rPr>
-              <a:t>AI 导航 → 原文核验 → AI 质疑 → 偏差审计 → 人工定稿</a:t>
-            </a:r>
-            <a:endParaRPr>
-              <a:latin typeface="+mn-ea"/>
-              <a:ea typeface="+mn-ea"/>
-              <a:cs typeface="+mn-ea"/>
-            </a:endParaRPr>
-          </a:p>
-          <a:p xmlns:a="http://schemas.openxmlformats.org/drawingml/2006/main">
-            <a:r>
-              <a:rPr>
-                <a:latin typeface="+mn-ea"/>
-                <a:ea typeface="+mn-ea"/>
-                <a:cs typeface="+mn-ea"/>
-              </a:rPr>
-              <a:t/>
-            </a:r>
-            <a:endParaRPr>
-              <a:latin typeface="+mn-ea"/>
-              <a:ea typeface="+mn-ea"/>
-              <a:cs typeface="+mn-ea"/>
-            </a:endParaRPr>
-          </a:p>
-          <a:p xmlns:a="http://schemas.openxmlformats.org/drawingml/2006/main">
-            <a:pPr algn="ctr">
-              <a:lnSpc>
-                <a:spcPct val="125000"/>
-              </a:lnSpc>
-              <a:buNone/>
-            </a:pPr>
-            <a:r>
-              <a:rPr sz="1725" b="1">
-                <a:solidFill>
-                  <a:srgbClr val="18354E"/>
-                </a:solidFill>
-                <a:latin typeface="Microsoft YaHei"/>
-                <a:ea typeface="Microsoft YaHei"/>
-                <a:cs typeface="Microsoft YaHei"/>
-              </a:rPr>
-              <a:t>每条关键主张，必须能回到原文位置</a:t>
-            </a:r>
-            <a:endParaRPr>
-              <a:latin typeface="+mn-ea"/>
-              <a:ea typeface="+mn-ea"/>
-              <a:cs typeface="+mn-ea"/>
-            </a:endParaRPr>
-          </a:p>
-          <a:p xmlns:a="http://schemas.openxmlformats.org/drawingml/2006/main">
-            <a:pPr algn="ctr">
-              <a:lnSpc>
-                <a:spcPct val="125000"/>
-              </a:lnSpc>
-              <a:buNone/>
-            </a:pPr>
-            <a:r>
-              <a:rPr sz="1725" b="1">
-                <a:solidFill>
-                  <a:srgbClr val="18354E"/>
-                </a:solidFill>
-                <a:latin typeface="Microsoft YaHei"/>
-                <a:ea typeface="Microsoft YaHei"/>
-                <a:cs typeface="Microsoft YaHei"/>
-              </a:rPr>
-              <a:t>第四讲｜阶段四：外部输入摄取 → 阶段五：证据整理</a:t>
-            </a:r>
-            <a:endParaRPr>
-              <a:latin typeface="+mn-ea"/>
-              <a:ea typeface="+mn-ea"/>
-              <a:cs typeface="+mn-ea"/>
-            </a:endParaRPr>
-          </a:p>
-        </p:txBody>
-      </p:sp>
-      <p:sp>
-        <p:nvSpPr>
           <p:cNvPr id="2" name="矩形 11">
             <a:extLst xmlns:a="http://schemas.openxmlformats.org/drawingml/2006/main">
               <a:ext uri="{FF2B5EF4-FFF2-40B4-BE49-F238E27FC236}">
@@ -3963,8 +3950,8 @@
         </p:nvSpPr>
         <p:spPr>
           <a:xfrm xmlns:a="http://schemas.openxmlformats.org/drawingml/2006/main">
-            <a:off x="1238250" y="1257300"/>
-            <a:ext cx="9715500" cy="1645920"/>
+            <a:off x="1143000" y="1790700"/>
+            <a:ext cx="9906000" cy="1645920"/>
           </a:xfrm>
           <a:prstGeom xmlns:a="http://schemas.openxmlformats.org/drawingml/2006/main" prst="rect">
             <a:avLst/>
@@ -3983,7 +3970,7 @@
               <a:buNone/>
             </a:pPr>
             <a:r>
-              <a:rPr sz="3075" b="1">
+              <a:rPr sz="3300" b="1">
                 <a:solidFill>
                   <a:srgbClr val="C8161E"/>
                 </a:solidFill>
@@ -3991,7 +3978,7 @@
                 <a:ea typeface="Microsoft YaHei"/>
                 <a:cs typeface="Microsoft YaHei"/>
               </a:rPr>
-              <a:t>AI 辅助精读与主张核验</a:t>
+              <a:t>第4讲 AI 辅助论文精读与深度分析</a:t>
             </a:r>
             <a:endParaRPr sz="4000" b="1" kern="0" spc="20">
               <a:solidFill>
@@ -4101,7 +4088,7 @@
           <p:cNvPr id="6" name="p10-card-h-0">
             <a:extLst xmlns:a="http://schemas.openxmlformats.org/drawingml/2006/main">
               <a:ext uri="{FF2B5EF4-FFF2-40B4-BE49-F238E27FC236}">
-                <a16:creationId xmlns:a16="http://schemas.microsoft.com/office/drawing/2014/main" id="{9FF0BC11-C55B-434A-A50D-22DE632E3848}"/>
+                <a16:creationId xmlns:a16="http://schemas.microsoft.com/office/drawing/2014/main" id="{673FEC52-D2F2-401C-AD72-4A606320DC80}"/>
               </a:ext>
             </a:extLst>
           </p:cNvPr>
@@ -4156,7 +4143,7 @@
           <p:cNvPr id="7" name="p10-card-h-1">
             <a:extLst xmlns:a="http://schemas.openxmlformats.org/drawingml/2006/main">
               <a:ext uri="{FF2B5EF4-FFF2-40B4-BE49-F238E27FC236}">
-                <a16:creationId xmlns:a16="http://schemas.microsoft.com/office/drawing/2014/main" id="{2D1DFD39-9D9B-4438-9959-86C28EB2144E}"/>
+                <a16:creationId xmlns:a16="http://schemas.microsoft.com/office/drawing/2014/main" id="{2A88FD16-EBDB-4B08-9C7A-8225D0A5B0DB}"/>
               </a:ext>
             </a:extLst>
           </p:cNvPr>
@@ -4211,7 +4198,7 @@
           <p:cNvPr id="8" name="p10-card-r0-0">
             <a:extLst xmlns:a="http://schemas.openxmlformats.org/drawingml/2006/main">
               <a:ext uri="{FF2B5EF4-FFF2-40B4-BE49-F238E27FC236}">
-                <a16:creationId xmlns:a16="http://schemas.microsoft.com/office/drawing/2014/main" id="{28C7A0C8-8027-4C7E-BEB9-60761A11B8B9}"/>
+                <a16:creationId xmlns:a16="http://schemas.microsoft.com/office/drawing/2014/main" id="{C41FC59D-0709-4287-BCA6-813441A6D8ED}"/>
               </a:ext>
             </a:extLst>
           </p:cNvPr>
@@ -4272,7 +4259,7 @@
           <p:cNvPr id="9" name="p10-card-r0-1">
             <a:extLst xmlns:a="http://schemas.openxmlformats.org/drawingml/2006/main">
               <a:ext uri="{FF2B5EF4-FFF2-40B4-BE49-F238E27FC236}">
-                <a16:creationId xmlns:a16="http://schemas.microsoft.com/office/drawing/2014/main" id="{AEAD1F8A-DA87-4DE2-B950-B5632E1F21BD}"/>
+                <a16:creationId xmlns:a16="http://schemas.microsoft.com/office/drawing/2014/main" id="{635FD2A9-0AA5-4D50-80D1-416AE745B9AF}"/>
               </a:ext>
             </a:extLst>
           </p:cNvPr>
@@ -4333,7 +4320,7 @@
           <p:cNvPr id="10" name="p10-card-r1-0">
             <a:extLst xmlns:a="http://schemas.openxmlformats.org/drawingml/2006/main">
               <a:ext uri="{FF2B5EF4-FFF2-40B4-BE49-F238E27FC236}">
-                <a16:creationId xmlns:a16="http://schemas.microsoft.com/office/drawing/2014/main" id="{9EB66EFD-D21C-49D7-A4ED-28FB659C51A4}"/>
+                <a16:creationId xmlns:a16="http://schemas.microsoft.com/office/drawing/2014/main" id="{1E973BF8-3559-435C-AF73-335180E306AD}"/>
               </a:ext>
             </a:extLst>
           </p:cNvPr>
@@ -4394,7 +4381,7 @@
           <p:cNvPr id="11" name="p10-card-r1-1">
             <a:extLst xmlns:a="http://schemas.openxmlformats.org/drawingml/2006/main">
               <a:ext uri="{FF2B5EF4-FFF2-40B4-BE49-F238E27FC236}">
-                <a16:creationId xmlns:a16="http://schemas.microsoft.com/office/drawing/2014/main" id="{C817F8F3-ECB8-4249-9944-2C21C14F68DD}"/>
+                <a16:creationId xmlns:a16="http://schemas.microsoft.com/office/drawing/2014/main" id="{9BB12DB8-1F72-43E8-BFCA-76FBB3177313}"/>
               </a:ext>
             </a:extLst>
           </p:cNvPr>
@@ -4455,7 +4442,7 @@
           <p:cNvPr id="12" name="p10-card-r2-0">
             <a:extLst xmlns:a="http://schemas.openxmlformats.org/drawingml/2006/main">
               <a:ext uri="{FF2B5EF4-FFF2-40B4-BE49-F238E27FC236}">
-                <a16:creationId xmlns:a16="http://schemas.microsoft.com/office/drawing/2014/main" id="{DDAF301D-4359-4FB7-94D3-408879B692EB}"/>
+                <a16:creationId xmlns:a16="http://schemas.microsoft.com/office/drawing/2014/main" id="{07274B66-C552-4F10-8745-03286705BBD1}"/>
               </a:ext>
             </a:extLst>
           </p:cNvPr>
@@ -4516,7 +4503,7 @@
           <p:cNvPr id="13" name="p10-card-r2-1">
             <a:extLst xmlns:a="http://schemas.openxmlformats.org/drawingml/2006/main">
               <a:ext uri="{FF2B5EF4-FFF2-40B4-BE49-F238E27FC236}">
-                <a16:creationId xmlns:a16="http://schemas.microsoft.com/office/drawing/2014/main" id="{D97704F2-69B8-4562-B80E-B1A1212B8F20}"/>
+                <a16:creationId xmlns:a16="http://schemas.microsoft.com/office/drawing/2014/main" id="{783C8EC7-652F-4E9E-BCC3-03EF4265D2DA}"/>
               </a:ext>
             </a:extLst>
           </p:cNvPr>
@@ -4577,7 +4564,7 @@
           <p:cNvPr id="14" name="p10-card-r3-0">
             <a:extLst xmlns:a="http://schemas.openxmlformats.org/drawingml/2006/main">
               <a:ext uri="{FF2B5EF4-FFF2-40B4-BE49-F238E27FC236}">
-                <a16:creationId xmlns:a16="http://schemas.microsoft.com/office/drawing/2014/main" id="{3C21DEA1-B950-4403-872B-F9C3539D44F7}"/>
+                <a16:creationId xmlns:a16="http://schemas.microsoft.com/office/drawing/2014/main" id="{D39D3B06-162D-464F-8F80-1F84F65B924C}"/>
               </a:ext>
             </a:extLst>
           </p:cNvPr>
@@ -4638,7 +4625,7 @@
           <p:cNvPr id="15" name="p10-card-r3-1">
             <a:extLst xmlns:a="http://schemas.openxmlformats.org/drawingml/2006/main">
               <a:ext uri="{FF2B5EF4-FFF2-40B4-BE49-F238E27FC236}">
-                <a16:creationId xmlns:a16="http://schemas.microsoft.com/office/drawing/2014/main" id="{D4C2D975-0F16-4A4B-817E-EA5CEBAF4B09}"/>
+                <a16:creationId xmlns:a16="http://schemas.microsoft.com/office/drawing/2014/main" id="{ABC7E609-64B1-4A6B-BC28-D96DE304C182}"/>
               </a:ext>
             </a:extLst>
           </p:cNvPr>
@@ -4699,7 +4686,7 @@
           <p:cNvPr id="16" name="p10-card-r4-0">
             <a:extLst xmlns:a="http://schemas.openxmlformats.org/drawingml/2006/main">
               <a:ext uri="{FF2B5EF4-FFF2-40B4-BE49-F238E27FC236}">
-                <a16:creationId xmlns:a16="http://schemas.microsoft.com/office/drawing/2014/main" id="{142693D8-05D8-4572-9F7C-E294A23B7BD9}"/>
+                <a16:creationId xmlns:a16="http://schemas.microsoft.com/office/drawing/2014/main" id="{930B7197-2E9E-41C9-99C7-DB1DC8562093}"/>
               </a:ext>
             </a:extLst>
           </p:cNvPr>
@@ -4760,7 +4747,7 @@
           <p:cNvPr id="17" name="p10-card-r4-1">
             <a:extLst xmlns:a="http://schemas.openxmlformats.org/drawingml/2006/main">
               <a:ext uri="{FF2B5EF4-FFF2-40B4-BE49-F238E27FC236}">
-                <a16:creationId xmlns:a16="http://schemas.microsoft.com/office/drawing/2014/main" id="{240AE06B-3D1C-4231-A05F-E68B795DF9EF}"/>
+                <a16:creationId xmlns:a16="http://schemas.microsoft.com/office/drawing/2014/main" id="{ECA77C8D-90CD-4259-AF9B-05EAC8773D29}"/>
               </a:ext>
             </a:extLst>
           </p:cNvPr>
@@ -4821,7 +4808,7 @@
           <p:cNvPr id="18" name="p10-card-r5-0">
             <a:extLst xmlns:a="http://schemas.openxmlformats.org/drawingml/2006/main">
               <a:ext uri="{FF2B5EF4-FFF2-40B4-BE49-F238E27FC236}">
-                <a16:creationId xmlns:a16="http://schemas.microsoft.com/office/drawing/2014/main" id="{C9DAFBC3-7C12-414E-B2EF-D210C548C8A2}"/>
+                <a16:creationId xmlns:a16="http://schemas.microsoft.com/office/drawing/2014/main" id="{8B1176C4-5908-4029-8B83-67EA0CED2077}"/>
               </a:ext>
             </a:extLst>
           </p:cNvPr>
@@ -4882,7 +4869,7 @@
           <p:cNvPr id="19" name="p10-card-r5-1">
             <a:extLst xmlns:a="http://schemas.openxmlformats.org/drawingml/2006/main">
               <a:ext uri="{FF2B5EF4-FFF2-40B4-BE49-F238E27FC236}">
-                <a16:creationId xmlns:a16="http://schemas.microsoft.com/office/drawing/2014/main" id="{688BB33A-EC5E-457A-A6AA-F6735EE99C68}"/>
+                <a16:creationId xmlns:a16="http://schemas.microsoft.com/office/drawing/2014/main" id="{224AFD24-D333-4EAE-89DE-DD585D73A688}"/>
               </a:ext>
             </a:extLst>
           </p:cNvPr>
@@ -4943,7 +4930,7 @@
           <p:cNvPr id="20" name="p10-card-r6-0">
             <a:extLst xmlns:a="http://schemas.openxmlformats.org/drawingml/2006/main">
               <a:ext uri="{FF2B5EF4-FFF2-40B4-BE49-F238E27FC236}">
-                <a16:creationId xmlns:a16="http://schemas.microsoft.com/office/drawing/2014/main" id="{C53BBC7C-42E0-46B2-85DC-6D82459CDB4E}"/>
+                <a16:creationId xmlns:a16="http://schemas.microsoft.com/office/drawing/2014/main" id="{E13A6FDD-D327-4E8C-BC7A-733891D4CD41}"/>
               </a:ext>
             </a:extLst>
           </p:cNvPr>
@@ -5004,7 +4991,7 @@
           <p:cNvPr id="21" name="p10-card-r6-1">
             <a:extLst xmlns:a="http://schemas.openxmlformats.org/drawingml/2006/main">
               <a:ext uri="{FF2B5EF4-FFF2-40B4-BE49-F238E27FC236}">
-                <a16:creationId xmlns:a16="http://schemas.microsoft.com/office/drawing/2014/main" id="{4EFA7C90-8919-4095-947E-00DA0F7FFBD2}"/>
+                <a16:creationId xmlns:a16="http://schemas.microsoft.com/office/drawing/2014/main" id="{4804B90D-55A3-4A2A-AA70-2BB6CFBF002E}"/>
               </a:ext>
             </a:extLst>
           </p:cNvPr>
@@ -5065,7 +5052,7 @@
           <p:cNvPr id="22" name="p10-card-r7-0">
             <a:extLst xmlns:a="http://schemas.openxmlformats.org/drawingml/2006/main">
               <a:ext uri="{FF2B5EF4-FFF2-40B4-BE49-F238E27FC236}">
-                <a16:creationId xmlns:a16="http://schemas.microsoft.com/office/drawing/2014/main" id="{08CCA6BF-9AFF-4FEE-AD0E-BE845D1F88CC}"/>
+                <a16:creationId xmlns:a16="http://schemas.microsoft.com/office/drawing/2014/main" id="{0ECC1378-EFC9-4CDA-BDAE-606E6AC3DCEA}"/>
               </a:ext>
             </a:extLst>
           </p:cNvPr>
@@ -5126,7 +5113,7 @@
           <p:cNvPr id="23" name="p10-card-r7-1">
             <a:extLst xmlns:a="http://schemas.openxmlformats.org/drawingml/2006/main">
               <a:ext uri="{FF2B5EF4-FFF2-40B4-BE49-F238E27FC236}">
-                <a16:creationId xmlns:a16="http://schemas.microsoft.com/office/drawing/2014/main" id="{AEAF61E5-01F6-4009-96CD-2CC9E2B4BBB9}"/>
+                <a16:creationId xmlns:a16="http://schemas.microsoft.com/office/drawing/2014/main" id="{185BD11C-EDC3-4282-8789-E80A9306ABC4}"/>
               </a:ext>
             </a:extLst>
           </p:cNvPr>
@@ -5187,7 +5174,7 @@
           <p:cNvPr id="24" name="p10-card-r8-0">
             <a:extLst xmlns:a="http://schemas.openxmlformats.org/drawingml/2006/main">
               <a:ext uri="{FF2B5EF4-FFF2-40B4-BE49-F238E27FC236}">
-                <a16:creationId xmlns:a16="http://schemas.microsoft.com/office/drawing/2014/main" id="{2CE8BF67-0CA2-400E-AEF3-B56E84424C64}"/>
+                <a16:creationId xmlns:a16="http://schemas.microsoft.com/office/drawing/2014/main" id="{48C51321-94E9-4D9B-85F9-2DA6E820C7C6}"/>
               </a:ext>
             </a:extLst>
           </p:cNvPr>
@@ -5248,7 +5235,7 @@
           <p:cNvPr id="25" name="p10-card-r8-1">
             <a:extLst xmlns:a="http://schemas.openxmlformats.org/drawingml/2006/main">
               <a:ext uri="{FF2B5EF4-FFF2-40B4-BE49-F238E27FC236}">
-                <a16:creationId xmlns:a16="http://schemas.microsoft.com/office/drawing/2014/main" id="{B49FCAD7-AD6C-4BB6-B0BD-AE44D33864EF}"/>
+                <a16:creationId xmlns:a16="http://schemas.microsoft.com/office/drawing/2014/main" id="{70D3DFCD-3DF8-4DA6-B0FE-7119FC99A527}"/>
               </a:ext>
             </a:extLst>
           </p:cNvPr>
@@ -5309,7 +5296,7 @@
           <p:cNvPr id="26" name="p10-card-r9-0">
             <a:extLst xmlns:a="http://schemas.openxmlformats.org/drawingml/2006/main">
               <a:ext uri="{FF2B5EF4-FFF2-40B4-BE49-F238E27FC236}">
-                <a16:creationId xmlns:a16="http://schemas.microsoft.com/office/drawing/2014/main" id="{F705188E-818C-40DD-B013-AA3CA332F9DB}"/>
+                <a16:creationId xmlns:a16="http://schemas.microsoft.com/office/drawing/2014/main" id="{C94F1A7E-CCEF-46A3-B3BF-C02FEDC9AFE9}"/>
               </a:ext>
             </a:extLst>
           </p:cNvPr>
@@ -5370,7 +5357,7 @@
           <p:cNvPr id="27" name="p10-card-r9-1">
             <a:extLst xmlns:a="http://schemas.openxmlformats.org/drawingml/2006/main">
               <a:ext uri="{FF2B5EF4-FFF2-40B4-BE49-F238E27FC236}">
-                <a16:creationId xmlns:a16="http://schemas.microsoft.com/office/drawing/2014/main" id="{EB4B22E3-194D-4E92-B96E-E6F5E770D70E}"/>
+                <a16:creationId xmlns:a16="http://schemas.microsoft.com/office/drawing/2014/main" id="{576A54A9-CDD5-4047-8CA7-9B5A9B9C08C1}"/>
               </a:ext>
             </a:extLst>
           </p:cNvPr>
@@ -5431,7 +5418,7 @@
           <p:cNvPr id="28" name="p10-save">
             <a:extLst xmlns:a="http://schemas.openxmlformats.org/drawingml/2006/main">
               <a:ext uri="{FF2B5EF4-FFF2-40B4-BE49-F238E27FC236}">
-                <a16:creationId xmlns:a16="http://schemas.microsoft.com/office/drawing/2014/main" id="{E307B2D0-7E0D-472F-AA22-3D764350A753}"/>
+                <a16:creationId xmlns:a16="http://schemas.microsoft.com/office/drawing/2014/main" id="{E5B09135-2C4D-41B4-A840-3F6E5B6D5664}"/>
               </a:ext>
             </a:extLst>
           </p:cNvPr>
@@ -5578,7 +5565,7 @@
           <p:cNvPr id="6" name="p11-real">
             <a:extLst xmlns:a="http://schemas.openxmlformats.org/drawingml/2006/main">
               <a:ext uri="{FF2B5EF4-FFF2-40B4-BE49-F238E27FC236}">
-                <a16:creationId xmlns:a16="http://schemas.microsoft.com/office/drawing/2014/main" id="{D31864A4-91D3-4F8C-BCC1-2C6CDBD354B2}"/>
+                <a16:creationId xmlns:a16="http://schemas.microsoft.com/office/drawing/2014/main" id="{A9348C80-1045-455A-804C-EDFFC5C15A15}"/>
               </a:ext>
             </a:extLst>
           </p:cNvPr>
@@ -5639,7 +5626,7 @@
           <p:nvPr/>
         </p:nvPicPr>
         <p:blipFill>
-          <a:blip xmlns:r="http://schemas.openxmlformats.org/officeDocument/2006/relationships" xmlns:a="http://schemas.openxmlformats.org/drawingml/2006/main" r:embed="Rc41293ef44444c63"/>
+          <a:blip xmlns:r="http://schemas.openxmlformats.org/officeDocument/2006/relationships" xmlns:a="http://schemas.openxmlformats.org/drawingml/2006/main" r:embed="R29f18ec26525433c"/>
           <a:stretch xmlns:a="http://schemas.openxmlformats.org/drawingml/2006/main"/>
         </p:blipFill>
         <p:spPr>
@@ -5657,7 +5644,7 @@
           <p:cNvPr id="8" name="p11-right-title">
             <a:extLst xmlns:a="http://schemas.openxmlformats.org/drawingml/2006/main">
               <a:ext uri="{FF2B5EF4-FFF2-40B4-BE49-F238E27FC236}">
-                <a16:creationId xmlns:a16="http://schemas.microsoft.com/office/drawing/2014/main" id="{8D30163B-CA6E-45A4-BDAC-2EF59FEECF82}"/>
+                <a16:creationId xmlns:a16="http://schemas.microsoft.com/office/drawing/2014/main" id="{067F6FAC-F52D-4B98-84D3-A2FE78C7581F}"/>
               </a:ext>
             </a:extLst>
           </p:cNvPr>
@@ -5712,7 +5699,7 @@
           <p:cNvPr id="9" name="p11-right">
             <a:extLst xmlns:a="http://schemas.openxmlformats.org/drawingml/2006/main">
               <a:ext uri="{FF2B5EF4-FFF2-40B4-BE49-F238E27FC236}">
-                <a16:creationId xmlns:a16="http://schemas.microsoft.com/office/drawing/2014/main" id="{49D7AB34-987C-4128-959E-DA4FDF5BF6FA}"/>
+                <a16:creationId xmlns:a16="http://schemas.microsoft.com/office/drawing/2014/main" id="{57126970-910C-415D-A37D-318DBF89CEF4}"/>
               </a:ext>
             </a:extLst>
           </p:cNvPr>
@@ -5802,7 +5789,7 @@
           <p:cNvPr id="10" name="p11-loc">
             <a:extLst xmlns:a="http://schemas.openxmlformats.org/drawingml/2006/main">
               <a:ext uri="{FF2B5EF4-FFF2-40B4-BE49-F238E27FC236}">
-                <a16:creationId xmlns:a16="http://schemas.microsoft.com/office/drawing/2014/main" id="{B0AEA908-24D6-4641-AED5-EE2B3E0DE8CE}"/>
+                <a16:creationId xmlns:a16="http://schemas.microsoft.com/office/drawing/2014/main" id="{FA6465EC-5D03-4339-8B0C-31C2930D8421}"/>
               </a:ext>
             </a:extLst>
           </p:cNvPr>
@@ -5910,7 +5897,7 @@
                 <a:ea typeface="Microsoft YaHei"/>
                 <a:cs typeface="Microsoft YaHei"/>
               </a:rPr>
-              <a:t>演示：偏差审计表</a:t>
+              <a:t>MI 演示：三篇论文如何分工</a:t>
             </a:r>
             <a:endParaRPr/>
           </a:p>
@@ -5949,23 +5936,23 @@
           <p:cNvPr id="6" name="p12-boundary">
             <a:extLst xmlns:a="http://schemas.openxmlformats.org/drawingml/2006/main">
               <a:ext uri="{FF2B5EF4-FFF2-40B4-BE49-F238E27FC236}">
-                <a16:creationId xmlns:a16="http://schemas.microsoft.com/office/drawing/2014/main" id="{5B11667D-3314-410E-BE6C-4384D22EF5AD}"/>
-              </a:ext>
-            </a:extLst>
-          </p:cNvPr>
-          <p:cNvSpPr>
-            <a:spLocks xmlns:a="http://schemas.openxmlformats.org/drawingml/2006/main" noGrp="1"/>
-          </p:cNvSpPr>
-          <p:nvPr/>
-        </p:nvSpPr>
-        <p:spPr>
-          <a:xfrm xmlns:a="http://schemas.openxmlformats.org/drawingml/2006/main">
-            <a:off x="628650" y="876300"/>
-            <a:ext cx="4095750" cy="342900"/>
+                <a16:creationId xmlns:a16="http://schemas.microsoft.com/office/drawing/2014/main" id="{7B54AA08-921F-4725-9A6C-FA4BEBE64829}"/>
+              </a:ext>
+            </a:extLst>
+          </p:cNvPr>
+          <p:cNvSpPr>
+            <a:spLocks xmlns:a="http://schemas.openxmlformats.org/drawingml/2006/main" noGrp="1"/>
+          </p:cNvSpPr>
+          <p:nvPr/>
+        </p:nvSpPr>
+        <p:spPr>
+          <a:xfrm xmlns:a="http://schemas.openxmlformats.org/drawingml/2006/main">
+            <a:off x="628650" y="838200"/>
+            <a:ext cx="4381500" cy="323850"/>
           </a:xfrm>
           <a:prstGeom xmlns:a="http://schemas.openxmlformats.org/drawingml/2006/main" prst="roundRect">
             <a:avLst>
-              <a:gd name="adj" fmla="val 22222"/>
+              <a:gd name="adj" fmla="val 23529"/>
             </a:avLst>
           </a:prstGeom>
           <a:solidFill xmlns:a="http://schemas.openxmlformats.org/drawingml/2006/main">
@@ -5996,1219 +5983,51 @@
                 <a:ea typeface="Microsoft YaHei"/>
                 <a:cs typeface="Microsoft YaHei"/>
               </a:rPr>
-              <a:t>真实原文核验｜AI 输出为课程构造</a:t>
-            </a:r>
-          </a:p>
-        </p:txBody>
-      </p:sp>
-      <p:sp>
-        <p:nvSpPr>
-          <p:cNvPr id="7" name="p12-audit-h-0">
-            <a:extLst xmlns:a="http://schemas.openxmlformats.org/drawingml/2006/main">
-              <a:ext uri="{FF2B5EF4-FFF2-40B4-BE49-F238E27FC236}">
-                <a16:creationId xmlns:a16="http://schemas.microsoft.com/office/drawing/2014/main" id="{DC22C723-8A04-486F-9D34-674127EBDC7E}"/>
-              </a:ext>
-            </a:extLst>
-          </p:cNvPr>
-          <p:cNvSpPr>
-            <a:spLocks xmlns:a="http://schemas.openxmlformats.org/drawingml/2006/main" noGrp="1"/>
-          </p:cNvSpPr>
-          <p:nvPr/>
-        </p:nvSpPr>
-        <p:spPr>
-          <a:xfrm xmlns:a="http://schemas.openxmlformats.org/drawingml/2006/main">
-            <a:off x="476250" y="1428750"/>
-            <a:ext cx="2476500" cy="419100"/>
+              <a:t>公开论文主张级核验｜不是实证结果图</a:t>
+            </a:r>
+          </a:p>
+        </p:txBody>
+      </p:sp>
+      <p:pic>
+        <p:nvPicPr>
+          <p:cNvPr id="12" name="p12-mi-ladder"/>
+          <p:cNvPicPr>
+            <a:picLocks xmlns:a="http://schemas.openxmlformats.org/drawingml/2006/main" noChangeAspect="1"/>
+          </p:cNvPicPr>
+          <p:nvPr/>
+        </p:nvPicPr>
+        <p:blipFill>
+          <a:blip xmlns:r="http://schemas.openxmlformats.org/officeDocument/2006/relationships" xmlns:a="http://schemas.openxmlformats.org/drawingml/2006/main" r:embed="Ra13e890cea2e410c"/>
+          <a:stretch xmlns:a="http://schemas.openxmlformats.org/drawingml/2006/main"/>
+        </p:blipFill>
+        <p:spPr>
+          <a:xfrm xmlns:a="http://schemas.openxmlformats.org/drawingml/2006/main">
+            <a:off x="1987228" y="1200150"/>
+            <a:ext cx="8179443" cy="4038600"/>
           </a:xfrm>
           <a:prstGeom xmlns:a="http://schemas.openxmlformats.org/drawingml/2006/main" prst="rect">
             <a:avLst/>
           </a:prstGeom>
-          <a:solidFill xmlns:a="http://schemas.openxmlformats.org/drawingml/2006/main">
-            <a:srgbClr val="18354E"/>
-          </a:solidFill>
-          <a:ln xmlns:a="http://schemas.openxmlformats.org/drawingml/2006/main" w="0">
-            <a:noFill/>
-            <a:prstDash val="solid"/>
-          </a:ln>
-        </p:spPr>
-        <p:txBody>
-          <a:bodyPr xmlns:a="http://schemas.openxmlformats.org/drawingml/2006/main" lIns="76200" tIns="38100" rIns="76200" bIns="38100" anchor="ctr"/>
-          <a:lstStyle xmlns:a="http://schemas.openxmlformats.org/drawingml/2006/main"/>
-          <a:p xmlns:a="http://schemas.openxmlformats.org/drawingml/2006/main">
-            <a:pPr algn="ctr">
-              <a:defRPr sz="1350" b="1">
-                <a:solidFill>
-                  <a:srgbClr val="FFFFFF"/>
-                </a:solidFill>
-              </a:defRPr>
-            </a:pPr>
-            <a:r>
-              <a:rPr sz="1350" b="1">
-                <a:solidFill>
-                  <a:srgbClr val="FFFFFF"/>
-                </a:solidFill>
-                <a:latin typeface="Microsoft YaHei"/>
-                <a:ea typeface="Microsoft YaHei"/>
-                <a:cs typeface="Microsoft YaHei"/>
-              </a:rPr>
-              <a:t>待核验 AI 输出</a:t>
-            </a:r>
-          </a:p>
-        </p:txBody>
-      </p:sp>
-      <p:sp>
-        <p:nvSpPr>
-          <p:cNvPr id="8" name="p12-audit-h-1">
-            <a:extLst xmlns:a="http://schemas.openxmlformats.org/drawingml/2006/main">
-              <a:ext uri="{FF2B5EF4-FFF2-40B4-BE49-F238E27FC236}">
-                <a16:creationId xmlns:a16="http://schemas.microsoft.com/office/drawing/2014/main" id="{9D1B68B3-7647-4353-BC56-06289B6B6D6E}"/>
-              </a:ext>
-            </a:extLst>
-          </p:cNvPr>
-          <p:cNvSpPr>
-            <a:spLocks xmlns:a="http://schemas.openxmlformats.org/drawingml/2006/main" noGrp="1"/>
-          </p:cNvSpPr>
-          <p:nvPr/>
-        </p:nvSpPr>
-        <p:spPr>
-          <a:xfrm xmlns:a="http://schemas.openxmlformats.org/drawingml/2006/main">
-            <a:off x="2952750" y="1428750"/>
-            <a:ext cx="1714500" cy="419100"/>
-          </a:xfrm>
-          <a:prstGeom xmlns:a="http://schemas.openxmlformats.org/drawingml/2006/main" prst="rect">
-            <a:avLst/>
-          </a:prstGeom>
-          <a:solidFill xmlns:a="http://schemas.openxmlformats.org/drawingml/2006/main">
-            <a:srgbClr val="C8161E"/>
-          </a:solidFill>
-          <a:ln xmlns:a="http://schemas.openxmlformats.org/drawingml/2006/main" w="0">
-            <a:noFill/>
-            <a:prstDash val="solid"/>
-          </a:ln>
-        </p:spPr>
-        <p:txBody>
-          <a:bodyPr xmlns:a="http://schemas.openxmlformats.org/drawingml/2006/main" lIns="76200" tIns="38100" rIns="76200" bIns="38100" anchor="ctr"/>
-          <a:lstStyle xmlns:a="http://schemas.openxmlformats.org/drawingml/2006/main"/>
-          <a:p xmlns:a="http://schemas.openxmlformats.org/drawingml/2006/main">
-            <a:pPr algn="ctr">
-              <a:defRPr sz="1350" b="1">
-                <a:solidFill>
-                  <a:srgbClr val="FFFFFF"/>
-                </a:solidFill>
-              </a:defRPr>
-            </a:pPr>
-            <a:r>
-              <a:rPr sz="1350" b="1">
-                <a:solidFill>
-                  <a:srgbClr val="FFFFFF"/>
-                </a:solidFill>
-                <a:latin typeface="Microsoft YaHei"/>
-                <a:ea typeface="Microsoft YaHei"/>
-                <a:cs typeface="Microsoft YaHei"/>
-              </a:rPr>
-              <a:t>偏差类型</a:t>
-            </a:r>
-          </a:p>
-        </p:txBody>
-      </p:sp>
-      <p:sp>
-        <p:nvSpPr>
-          <p:cNvPr id="9" name="p12-audit-h-2">
-            <a:extLst xmlns:a="http://schemas.openxmlformats.org/drawingml/2006/main">
-              <a:ext uri="{FF2B5EF4-FFF2-40B4-BE49-F238E27FC236}">
-                <a16:creationId xmlns:a16="http://schemas.microsoft.com/office/drawing/2014/main" id="{401A5C37-0FE5-4774-8DFB-9DEF070B64AE}"/>
-              </a:ext>
-            </a:extLst>
-          </p:cNvPr>
-          <p:cNvSpPr>
-            <a:spLocks xmlns:a="http://schemas.openxmlformats.org/drawingml/2006/main" noGrp="1"/>
-          </p:cNvSpPr>
-          <p:nvPr/>
-        </p:nvSpPr>
-        <p:spPr>
-          <a:xfrm xmlns:a="http://schemas.openxmlformats.org/drawingml/2006/main">
-            <a:off x="4667250" y="1428750"/>
-            <a:ext cx="2857500" cy="419100"/>
-          </a:xfrm>
-          <a:prstGeom xmlns:a="http://schemas.openxmlformats.org/drawingml/2006/main" prst="rect">
-            <a:avLst/>
-          </a:prstGeom>
-          <a:solidFill xmlns:a="http://schemas.openxmlformats.org/drawingml/2006/main">
-            <a:srgbClr val="18354E"/>
-          </a:solidFill>
-          <a:ln xmlns:a="http://schemas.openxmlformats.org/drawingml/2006/main" w="0">
-            <a:noFill/>
-            <a:prstDash val="solid"/>
-          </a:ln>
-        </p:spPr>
-        <p:txBody>
-          <a:bodyPr xmlns:a="http://schemas.openxmlformats.org/drawingml/2006/main" lIns="76200" tIns="38100" rIns="76200" bIns="38100" anchor="ctr"/>
-          <a:lstStyle xmlns:a="http://schemas.openxmlformats.org/drawingml/2006/main"/>
-          <a:p xmlns:a="http://schemas.openxmlformats.org/drawingml/2006/main">
-            <a:pPr algn="ctr">
-              <a:defRPr sz="1350" b="1">
-                <a:solidFill>
-                  <a:srgbClr val="FFFFFF"/>
-                </a:solidFill>
-              </a:defRPr>
-            </a:pPr>
-            <a:r>
-              <a:rPr sz="1350" b="1">
-                <a:solidFill>
-                  <a:srgbClr val="FFFFFF"/>
-                </a:solidFill>
-                <a:latin typeface="Microsoft YaHei"/>
-                <a:ea typeface="Microsoft YaHei"/>
-                <a:cs typeface="Microsoft YaHei"/>
-              </a:rPr>
-              <a:t>原文实际</a:t>
-            </a:r>
-          </a:p>
-        </p:txBody>
-      </p:sp>
-      <p:sp>
-        <p:nvSpPr>
-          <p:cNvPr id="10" name="p12-audit-h-3">
-            <a:extLst xmlns:a="http://schemas.openxmlformats.org/drawingml/2006/main">
-              <a:ext uri="{FF2B5EF4-FFF2-40B4-BE49-F238E27FC236}">
-                <a16:creationId xmlns:a16="http://schemas.microsoft.com/office/drawing/2014/main" id="{8BCE16FA-FC86-4BC9-A5DD-0FA626FD2FF9}"/>
-              </a:ext>
-            </a:extLst>
-          </p:cNvPr>
-          <p:cNvSpPr>
-            <a:spLocks xmlns:a="http://schemas.openxmlformats.org/drawingml/2006/main" noGrp="1"/>
-          </p:cNvSpPr>
-          <p:nvPr/>
-        </p:nvSpPr>
-        <p:spPr>
-          <a:xfrm xmlns:a="http://schemas.openxmlformats.org/drawingml/2006/main">
-            <a:off x="7524750" y="1428750"/>
-            <a:ext cx="2190750" cy="419100"/>
-          </a:xfrm>
-          <a:prstGeom xmlns:a="http://schemas.openxmlformats.org/drawingml/2006/main" prst="rect">
-            <a:avLst/>
-          </a:prstGeom>
-          <a:solidFill xmlns:a="http://schemas.openxmlformats.org/drawingml/2006/main">
-            <a:srgbClr val="18354E"/>
-          </a:solidFill>
-          <a:ln xmlns:a="http://schemas.openxmlformats.org/drawingml/2006/main" w="0">
-            <a:noFill/>
-            <a:prstDash val="solid"/>
-          </a:ln>
-        </p:spPr>
-        <p:txBody>
-          <a:bodyPr xmlns:a="http://schemas.openxmlformats.org/drawingml/2006/main" lIns="76200" tIns="38100" rIns="76200" bIns="38100" anchor="ctr"/>
-          <a:lstStyle xmlns:a="http://schemas.openxmlformats.org/drawingml/2006/main"/>
-          <a:p xmlns:a="http://schemas.openxmlformats.org/drawingml/2006/main">
-            <a:pPr algn="ctr">
-              <a:defRPr sz="1350" b="1">
-                <a:solidFill>
-                  <a:srgbClr val="FFFFFF"/>
-                </a:solidFill>
-              </a:defRPr>
-            </a:pPr>
-            <a:r>
-              <a:rPr sz="1350" b="1">
-                <a:solidFill>
-                  <a:srgbClr val="FFFFFF"/>
-                </a:solidFill>
-                <a:latin typeface="Microsoft YaHei"/>
-                <a:ea typeface="Microsoft YaHei"/>
-                <a:cs typeface="Microsoft YaHei"/>
-              </a:rPr>
-              <a:t>核验位置</a:t>
-            </a:r>
-          </a:p>
-        </p:txBody>
-      </p:sp>
-      <p:sp>
-        <p:nvSpPr>
-          <p:cNvPr id="11" name="p12-audit-h-4">
-            <a:extLst xmlns:a="http://schemas.openxmlformats.org/drawingml/2006/main">
-              <a:ext uri="{FF2B5EF4-FFF2-40B4-BE49-F238E27FC236}">
-                <a16:creationId xmlns:a16="http://schemas.microsoft.com/office/drawing/2014/main" id="{9DCCFDBB-BCC0-4633-93CC-AFB27AFDC059}"/>
-              </a:ext>
-            </a:extLst>
-          </p:cNvPr>
-          <p:cNvSpPr>
-            <a:spLocks xmlns:a="http://schemas.openxmlformats.org/drawingml/2006/main" noGrp="1"/>
-          </p:cNvSpPr>
-          <p:nvPr/>
-        </p:nvSpPr>
-        <p:spPr>
-          <a:xfrm xmlns:a="http://schemas.openxmlformats.org/drawingml/2006/main">
-            <a:off x="9715500" y="1428750"/>
-            <a:ext cx="1619250" cy="419100"/>
-          </a:xfrm>
-          <a:prstGeom xmlns:a="http://schemas.openxmlformats.org/drawingml/2006/main" prst="rect">
-            <a:avLst/>
-          </a:prstGeom>
-          <a:solidFill xmlns:a="http://schemas.openxmlformats.org/drawingml/2006/main">
-            <a:srgbClr val="18354E"/>
-          </a:solidFill>
-          <a:ln xmlns:a="http://schemas.openxmlformats.org/drawingml/2006/main" w="0">
-            <a:noFill/>
-            <a:prstDash val="solid"/>
-          </a:ln>
-        </p:spPr>
-        <p:txBody>
-          <a:bodyPr xmlns:a="http://schemas.openxmlformats.org/drawingml/2006/main" lIns="76200" tIns="38100" rIns="76200" bIns="38100" anchor="ctr"/>
-          <a:lstStyle xmlns:a="http://schemas.openxmlformats.org/drawingml/2006/main"/>
-          <a:p xmlns:a="http://schemas.openxmlformats.org/drawingml/2006/main">
-            <a:pPr algn="ctr">
-              <a:defRPr sz="1350" b="1">
-                <a:solidFill>
-                  <a:srgbClr val="FFFFFF"/>
-                </a:solidFill>
-              </a:defRPr>
-            </a:pPr>
-            <a:r>
-              <a:rPr sz="1350" b="1">
-                <a:solidFill>
-                  <a:srgbClr val="FFFFFF"/>
-                </a:solidFill>
-                <a:latin typeface="Microsoft YaHei"/>
-                <a:ea typeface="Microsoft YaHei"/>
-                <a:cs typeface="Microsoft YaHei"/>
-              </a:rPr>
-              <a:t>处理</a:t>
-            </a:r>
-          </a:p>
-        </p:txBody>
-      </p:sp>
-      <p:sp>
-        <p:nvSpPr>
-          <p:cNvPr id="12" name="p12-audit-r0-0">
-            <a:extLst xmlns:a="http://schemas.openxmlformats.org/drawingml/2006/main">
-              <a:ext uri="{FF2B5EF4-FFF2-40B4-BE49-F238E27FC236}">
-                <a16:creationId xmlns:a16="http://schemas.microsoft.com/office/drawing/2014/main" id="{2AC64597-811B-420B-BC2E-95C368E0AE5F}"/>
-              </a:ext>
-            </a:extLst>
-          </p:cNvPr>
-          <p:cNvSpPr>
-            <a:spLocks xmlns:a="http://schemas.openxmlformats.org/drawingml/2006/main" noGrp="1"/>
-          </p:cNvSpPr>
-          <p:nvPr/>
-        </p:nvSpPr>
-        <p:spPr>
-          <a:xfrm xmlns:a="http://schemas.openxmlformats.org/drawingml/2006/main">
-            <a:off x="476250" y="1847850"/>
-            <a:ext cx="2476500" cy="857250"/>
-          </a:xfrm>
-          <a:prstGeom xmlns:a="http://schemas.openxmlformats.org/drawingml/2006/main" prst="rect">
-            <a:avLst/>
-          </a:prstGeom>
-          <a:solidFill xmlns:a="http://schemas.openxmlformats.org/drawingml/2006/main">
-            <a:srgbClr val="F3F6F7"/>
-          </a:solidFill>
-          <a:ln xmlns:a="http://schemas.openxmlformats.org/drawingml/2006/main" w="9525">
-            <a:solidFill>
-              <a:srgbClr val="D6DDE2"/>
-            </a:solidFill>
-            <a:prstDash val="solid"/>
-          </a:ln>
-        </p:spPr>
-        <p:txBody>
-          <a:bodyPr xmlns:a="http://schemas.openxmlformats.org/drawingml/2006/main" lIns="76200" tIns="38100" rIns="76200" bIns="38100" anchor="ctr"/>
-          <a:lstStyle xmlns:a="http://schemas.openxmlformats.org/drawingml/2006/main"/>
-          <a:p xmlns:a="http://schemas.openxmlformats.org/drawingml/2006/main">
-            <a:pPr algn="l">
-              <a:lnSpc>
-                <a:spcPct val="105000"/>
-              </a:lnSpc>
-              <a:buNone/>
-              <a:defRPr sz="1350" b="1">
-                <a:solidFill>
-                  <a:srgbClr val="263746"/>
-                </a:solidFill>
-              </a:defRPr>
-            </a:pPr>
-            <a:r>
-              <a:rPr sz="1350" b="1">
-                <a:solidFill>
-                  <a:srgbClr val="263746"/>
-                </a:solidFill>
-                <a:latin typeface="Microsoft YaHei"/>
-                <a:ea typeface="Microsoft YaHei"/>
-                <a:cs typeface="Microsoft YaHei"/>
-              </a:rPr>
-              <a:t>受控实验降低 50%</a:t>
-            </a:r>
-          </a:p>
-        </p:txBody>
-      </p:sp>
-      <p:sp>
-        <p:nvSpPr>
-          <p:cNvPr id="13" name="p12-audit-r0-1">
-            <a:extLst xmlns:a="http://schemas.openxmlformats.org/drawingml/2006/main">
-              <a:ext uri="{FF2B5EF4-FFF2-40B4-BE49-F238E27FC236}">
-                <a16:creationId xmlns:a16="http://schemas.microsoft.com/office/drawing/2014/main" id="{E2174422-DB69-42C0-BF5B-BF487B978E04}"/>
-              </a:ext>
-            </a:extLst>
-          </p:cNvPr>
-          <p:cNvSpPr>
-            <a:spLocks xmlns:a="http://schemas.openxmlformats.org/drawingml/2006/main" noGrp="1"/>
-          </p:cNvSpPr>
-          <p:nvPr/>
-        </p:nvSpPr>
-        <p:spPr>
-          <a:xfrm xmlns:a="http://schemas.openxmlformats.org/drawingml/2006/main">
-            <a:off x="2952750" y="1847850"/>
-            <a:ext cx="1714500" cy="857250"/>
-          </a:xfrm>
-          <a:prstGeom xmlns:a="http://schemas.openxmlformats.org/drawingml/2006/main" prst="rect">
-            <a:avLst/>
-          </a:prstGeom>
-          <a:solidFill xmlns:a="http://schemas.openxmlformats.org/drawingml/2006/main">
-            <a:srgbClr val="F3F6F7"/>
-          </a:solidFill>
-          <a:ln xmlns:a="http://schemas.openxmlformats.org/drawingml/2006/main" w="9525">
-            <a:solidFill>
-              <a:srgbClr val="D6DDE2"/>
-            </a:solidFill>
-            <a:prstDash val="solid"/>
-          </a:ln>
-        </p:spPr>
-        <p:txBody>
-          <a:bodyPr xmlns:a="http://schemas.openxmlformats.org/drawingml/2006/main" lIns="76200" tIns="38100" rIns="76200" bIns="38100" anchor="ctr"/>
-          <a:lstStyle xmlns:a="http://schemas.openxmlformats.org/drawingml/2006/main"/>
-          <a:p xmlns:a="http://schemas.openxmlformats.org/drawingml/2006/main">
-            <a:pPr algn="ctr">
-              <a:lnSpc>
-                <a:spcPct val="105000"/>
-              </a:lnSpc>
-              <a:buNone/>
-              <a:defRPr sz="1350" b="1">
-                <a:solidFill>
-                  <a:srgbClr val="C8161E"/>
-                </a:solidFill>
-              </a:defRPr>
-            </a:pPr>
-            <a:r>
-              <a:rPr sz="1350" b="1">
-                <a:solidFill>
-                  <a:srgbClr val="C8161E"/>
-                </a:solidFill>
-                <a:latin typeface="Microsoft YaHei"/>
-                <a:ea typeface="Microsoft YaHei"/>
-                <a:cs typeface="Microsoft YaHei"/>
-              </a:rPr>
-              <a:t>虚构证据</a:t>
-            </a:r>
-          </a:p>
-        </p:txBody>
-      </p:sp>
-      <p:sp>
-        <p:nvSpPr>
-          <p:cNvPr id="14" name="p12-audit-r0-2">
-            <a:extLst xmlns:a="http://schemas.openxmlformats.org/drawingml/2006/main">
-              <a:ext uri="{FF2B5EF4-FFF2-40B4-BE49-F238E27FC236}">
-                <a16:creationId xmlns:a16="http://schemas.microsoft.com/office/drawing/2014/main" id="{97270347-EBAE-4390-9489-38F7A9CDB158}"/>
-              </a:ext>
-            </a:extLst>
-          </p:cNvPr>
-          <p:cNvSpPr>
-            <a:spLocks xmlns:a="http://schemas.openxmlformats.org/drawingml/2006/main" noGrp="1"/>
-          </p:cNvSpPr>
-          <p:nvPr/>
-        </p:nvSpPr>
-        <p:spPr>
-          <a:xfrm xmlns:a="http://schemas.openxmlformats.org/drawingml/2006/main">
-            <a:off x="4667250" y="1847850"/>
-            <a:ext cx="2857500" cy="857250"/>
-          </a:xfrm>
-          <a:prstGeom xmlns:a="http://schemas.openxmlformats.org/drawingml/2006/main" prst="rect">
-            <a:avLst/>
-          </a:prstGeom>
-          <a:solidFill xmlns:a="http://schemas.openxmlformats.org/drawingml/2006/main">
-            <a:srgbClr val="F3F6F7"/>
-          </a:solidFill>
-          <a:ln xmlns:a="http://schemas.openxmlformats.org/drawingml/2006/main" w="9525">
-            <a:solidFill>
-              <a:srgbClr val="D6DDE2"/>
-            </a:solidFill>
-            <a:prstDash val="solid"/>
-          </a:ln>
-        </p:spPr>
-        <p:txBody>
-          <a:bodyPr xmlns:a="http://schemas.openxmlformats.org/drawingml/2006/main" lIns="76200" tIns="38100" rIns="76200" bIns="38100" anchor="ctr"/>
-          <a:lstStyle xmlns:a="http://schemas.openxmlformats.org/drawingml/2006/main"/>
-          <a:p xmlns:a="http://schemas.openxmlformats.org/drawingml/2006/main">
-            <a:pPr algn="l">
-              <a:lnSpc>
-                <a:spcPct val="105000"/>
-              </a:lnSpc>
-              <a:buNone/>
-              <a:defRPr sz="1350" b="0">
-                <a:solidFill>
-                  <a:srgbClr val="263746"/>
-                </a:solidFill>
-              </a:defRPr>
-            </a:pPr>
-            <a:r>
-              <a:rPr sz="1350" b="0">
-                <a:solidFill>
-                  <a:srgbClr val="263746"/>
-                </a:solidFill>
-                <a:latin typeface="Microsoft YaHei"/>
-                <a:ea typeface="Microsoft YaHei"/>
-                <a:cs typeface="Microsoft YaHei"/>
-              </a:rPr>
-              <a:t>没有实验或效果量</a:t>
-            </a:r>
-          </a:p>
-        </p:txBody>
-      </p:sp>
-      <p:sp>
-        <p:nvSpPr>
-          <p:cNvPr id="15" name="p12-audit-r0-3">
-            <a:extLst xmlns:a="http://schemas.openxmlformats.org/drawingml/2006/main">
-              <a:ext uri="{FF2B5EF4-FFF2-40B4-BE49-F238E27FC236}">
-                <a16:creationId xmlns:a16="http://schemas.microsoft.com/office/drawing/2014/main" id="{A2CFD79B-1EA8-40CB-B838-40BCB35981EE}"/>
-              </a:ext>
-            </a:extLst>
-          </p:cNvPr>
-          <p:cNvSpPr>
-            <a:spLocks xmlns:a="http://schemas.openxmlformats.org/drawingml/2006/main" noGrp="1"/>
-          </p:cNvSpPr>
-          <p:nvPr/>
-        </p:nvSpPr>
-        <p:spPr>
-          <a:xfrm xmlns:a="http://schemas.openxmlformats.org/drawingml/2006/main">
-            <a:off x="7524750" y="1847850"/>
-            <a:ext cx="2190750" cy="857250"/>
-          </a:xfrm>
-          <a:prstGeom xmlns:a="http://schemas.openxmlformats.org/drawingml/2006/main" prst="rect">
-            <a:avLst/>
-          </a:prstGeom>
-          <a:solidFill xmlns:a="http://schemas.openxmlformats.org/drawingml/2006/main">
-            <a:srgbClr val="F3F6F7"/>
-          </a:solidFill>
-          <a:ln xmlns:a="http://schemas.openxmlformats.org/drawingml/2006/main" w="9525">
-            <a:solidFill>
-              <a:srgbClr val="D6DDE2"/>
-            </a:solidFill>
-            <a:prstDash val="solid"/>
-          </a:ln>
-        </p:spPr>
-        <p:txBody>
-          <a:bodyPr xmlns:a="http://schemas.openxmlformats.org/drawingml/2006/main" lIns="76200" tIns="38100" rIns="76200" bIns="38100" anchor="ctr"/>
-          <a:lstStyle xmlns:a="http://schemas.openxmlformats.org/drawingml/2006/main"/>
-          <a:p xmlns:a="http://schemas.openxmlformats.org/drawingml/2006/main">
-            <a:pPr algn="ctr">
-              <a:lnSpc>
-                <a:spcPct val="105000"/>
-              </a:lnSpc>
-              <a:buNone/>
-              <a:defRPr sz="1350" b="0">
-                <a:solidFill>
-                  <a:srgbClr val="263746"/>
-                </a:solidFill>
-              </a:defRPr>
-            </a:pPr>
-            <a:r>
-              <a:rPr sz="1350" b="0">
-                <a:solidFill>
-                  <a:srgbClr val="263746"/>
-                </a:solidFill>
-                <a:latin typeface="Microsoft YaHei"/>
-                <a:ea typeface="Microsoft YaHei"/>
-                <a:cs typeface="Microsoft YaHei"/>
-              </a:rPr>
-              <a:t>p.83–84 全文</a:t>
-            </a:r>
-          </a:p>
-        </p:txBody>
-      </p:sp>
-      <p:sp>
-        <p:nvSpPr>
-          <p:cNvPr id="16" name="p12-audit-r0-4">
-            <a:extLst xmlns:a="http://schemas.openxmlformats.org/drawingml/2006/main">
-              <a:ext uri="{FF2B5EF4-FFF2-40B4-BE49-F238E27FC236}">
-                <a16:creationId xmlns:a16="http://schemas.microsoft.com/office/drawing/2014/main" id="{4FD94689-D25E-47F4-8606-8AC537B48EAE}"/>
-              </a:ext>
-            </a:extLst>
-          </p:cNvPr>
-          <p:cNvSpPr>
-            <a:spLocks xmlns:a="http://schemas.openxmlformats.org/drawingml/2006/main" noGrp="1"/>
-          </p:cNvSpPr>
-          <p:nvPr/>
-        </p:nvSpPr>
-        <p:spPr>
-          <a:xfrm xmlns:a="http://schemas.openxmlformats.org/drawingml/2006/main">
-            <a:off x="9715500" y="1847850"/>
-            <a:ext cx="1619250" cy="857250"/>
-          </a:xfrm>
-          <a:prstGeom xmlns:a="http://schemas.openxmlformats.org/drawingml/2006/main" prst="rect">
-            <a:avLst/>
-          </a:prstGeom>
-          <a:solidFill xmlns:a="http://schemas.openxmlformats.org/drawingml/2006/main">
-            <a:srgbClr val="F3F6F7"/>
-          </a:solidFill>
-          <a:ln xmlns:a="http://schemas.openxmlformats.org/drawingml/2006/main" w="9525">
-            <a:solidFill>
-              <a:srgbClr val="D6DDE2"/>
-            </a:solidFill>
-            <a:prstDash val="solid"/>
-          </a:ln>
-        </p:spPr>
-        <p:txBody>
-          <a:bodyPr xmlns:a="http://schemas.openxmlformats.org/drawingml/2006/main" lIns="76200" tIns="38100" rIns="76200" bIns="38100" anchor="ctr"/>
-          <a:lstStyle xmlns:a="http://schemas.openxmlformats.org/drawingml/2006/main"/>
-          <a:p xmlns:a="http://schemas.openxmlformats.org/drawingml/2006/main">
-            <a:pPr algn="ctr">
-              <a:lnSpc>
-                <a:spcPct val="105000"/>
-              </a:lnSpc>
-              <a:buNone/>
-              <a:defRPr sz="1350" b="0">
-                <a:solidFill>
-                  <a:srgbClr val="263746"/>
-                </a:solidFill>
-              </a:defRPr>
-            </a:pPr>
-            <a:r>
-              <a:rPr sz="1350" b="0">
-                <a:solidFill>
-                  <a:srgbClr val="263746"/>
-                </a:solidFill>
-                <a:latin typeface="Microsoft YaHei"/>
-                <a:ea typeface="Microsoft YaHei"/>
-                <a:cs typeface="Microsoft YaHei"/>
-              </a:rPr>
-              <a:t>rejected</a:t>
-            </a:r>
-          </a:p>
-        </p:txBody>
-      </p:sp>
-      <p:sp>
-        <p:nvSpPr>
-          <p:cNvPr id="17" name="p12-audit-r1-0">
-            <a:extLst xmlns:a="http://schemas.openxmlformats.org/drawingml/2006/main">
-              <a:ext uri="{FF2B5EF4-FFF2-40B4-BE49-F238E27FC236}">
-                <a16:creationId xmlns:a16="http://schemas.microsoft.com/office/drawing/2014/main" id="{4526C94D-19CB-4FD0-9C3D-83E66C8DB695}"/>
-              </a:ext>
-            </a:extLst>
-          </p:cNvPr>
-          <p:cNvSpPr>
-            <a:spLocks xmlns:a="http://schemas.openxmlformats.org/drawingml/2006/main" noGrp="1"/>
-          </p:cNvSpPr>
-          <p:nvPr/>
-        </p:nvSpPr>
-        <p:spPr>
-          <a:xfrm xmlns:a="http://schemas.openxmlformats.org/drawingml/2006/main">
-            <a:off x="476250" y="2705100"/>
-            <a:ext cx="2476500" cy="857250"/>
-          </a:xfrm>
-          <a:prstGeom xmlns:a="http://schemas.openxmlformats.org/drawingml/2006/main" prst="rect">
-            <a:avLst/>
-          </a:prstGeom>
-          <a:solidFill xmlns:a="http://schemas.openxmlformats.org/drawingml/2006/main">
-            <a:srgbClr val="FFFFFF"/>
-          </a:solidFill>
-          <a:ln xmlns:a="http://schemas.openxmlformats.org/drawingml/2006/main" w="9525">
-            <a:solidFill>
-              <a:srgbClr val="D6DDE2"/>
-            </a:solidFill>
-            <a:prstDash val="solid"/>
-          </a:ln>
-        </p:spPr>
-        <p:txBody>
-          <a:bodyPr xmlns:a="http://schemas.openxmlformats.org/drawingml/2006/main" lIns="76200" tIns="38100" rIns="76200" bIns="38100" anchor="ctr"/>
-          <a:lstStyle xmlns:a="http://schemas.openxmlformats.org/drawingml/2006/main"/>
-          <a:p xmlns:a="http://schemas.openxmlformats.org/drawingml/2006/main">
-            <a:pPr algn="l">
-              <a:lnSpc>
-                <a:spcPct val="105000"/>
-              </a:lnSpc>
-              <a:buNone/>
-              <a:defRPr sz="1350" b="1">
-                <a:solidFill>
-                  <a:srgbClr val="263746"/>
-                </a:solidFill>
-              </a:defRPr>
-            </a:pPr>
-            <a:r>
-              <a:rPr sz="1350" b="1">
-                <a:solidFill>
-                  <a:srgbClr val="263746"/>
-                </a:solidFill>
-                <a:latin typeface="Microsoft YaHei"/>
-                <a:ea typeface="Microsoft YaHei"/>
-                <a:cs typeface="Microsoft YaHei"/>
-              </a:rPr>
-              <a:t>第一遍固定 5 分钟</a:t>
-            </a:r>
-          </a:p>
-        </p:txBody>
-      </p:sp>
-      <p:sp>
-        <p:nvSpPr>
-          <p:cNvPr id="18" name="p12-audit-r1-1">
-            <a:extLst xmlns:a="http://schemas.openxmlformats.org/drawingml/2006/main">
-              <a:ext uri="{FF2B5EF4-FFF2-40B4-BE49-F238E27FC236}">
-                <a16:creationId xmlns:a16="http://schemas.microsoft.com/office/drawing/2014/main" id="{8D5684C9-130C-4259-928D-9975D90B4B58}"/>
-              </a:ext>
-            </a:extLst>
-          </p:cNvPr>
-          <p:cNvSpPr>
-            <a:spLocks xmlns:a="http://schemas.openxmlformats.org/drawingml/2006/main" noGrp="1"/>
-          </p:cNvSpPr>
-          <p:nvPr/>
-        </p:nvSpPr>
-        <p:spPr>
-          <a:xfrm xmlns:a="http://schemas.openxmlformats.org/drawingml/2006/main">
-            <a:off x="2952750" y="2705100"/>
-            <a:ext cx="1714500" cy="857250"/>
-          </a:xfrm>
-          <a:prstGeom xmlns:a="http://schemas.openxmlformats.org/drawingml/2006/main" prst="rect">
-            <a:avLst/>
-          </a:prstGeom>
-          <a:solidFill xmlns:a="http://schemas.openxmlformats.org/drawingml/2006/main">
-            <a:srgbClr val="FFFFFF"/>
-          </a:solidFill>
-          <a:ln xmlns:a="http://schemas.openxmlformats.org/drawingml/2006/main" w="9525">
-            <a:solidFill>
-              <a:srgbClr val="D6DDE2"/>
-            </a:solidFill>
-            <a:prstDash val="solid"/>
-          </a:ln>
-        </p:spPr>
-        <p:txBody>
-          <a:bodyPr xmlns:a="http://schemas.openxmlformats.org/drawingml/2006/main" lIns="76200" tIns="38100" rIns="76200" bIns="38100" anchor="ctr"/>
-          <a:lstStyle xmlns:a="http://schemas.openxmlformats.org/drawingml/2006/main"/>
-          <a:p xmlns:a="http://schemas.openxmlformats.org/drawingml/2006/main">
-            <a:pPr algn="ctr">
-              <a:lnSpc>
-                <a:spcPct val="105000"/>
-              </a:lnSpc>
-              <a:buNone/>
-              <a:defRPr sz="1350" b="1">
-                <a:solidFill>
-                  <a:srgbClr val="C8161E"/>
-                </a:solidFill>
-              </a:defRPr>
-            </a:pPr>
-            <a:r>
-              <a:rPr sz="1350" b="1">
-                <a:solidFill>
-                  <a:srgbClr val="C8161E"/>
-                </a:solidFill>
-                <a:latin typeface="Microsoft YaHei"/>
-                <a:ea typeface="Microsoft YaHei"/>
-                <a:cs typeface="Microsoft YaHei"/>
-              </a:rPr>
-              <a:t>限定遗漏</a:t>
-            </a:r>
-          </a:p>
-        </p:txBody>
-      </p:sp>
-      <p:sp>
-        <p:nvSpPr>
-          <p:cNvPr id="19" name="p12-audit-r1-2">
-            <a:extLst xmlns:a="http://schemas.openxmlformats.org/drawingml/2006/main">
-              <a:ext uri="{FF2B5EF4-FFF2-40B4-BE49-F238E27FC236}">
-                <a16:creationId xmlns:a16="http://schemas.microsoft.com/office/drawing/2014/main" id="{7DEAAD42-B407-4F7D-9C37-5AF49966E327}"/>
-              </a:ext>
-            </a:extLst>
-          </p:cNvPr>
-          <p:cNvSpPr>
-            <a:spLocks xmlns:a="http://schemas.openxmlformats.org/drawingml/2006/main" noGrp="1"/>
-          </p:cNvSpPr>
-          <p:nvPr/>
-        </p:nvSpPr>
-        <p:spPr>
-          <a:xfrm xmlns:a="http://schemas.openxmlformats.org/drawingml/2006/main">
-            <a:off x="4667250" y="2705100"/>
-            <a:ext cx="2857500" cy="857250"/>
-          </a:xfrm>
-          <a:prstGeom xmlns:a="http://schemas.openxmlformats.org/drawingml/2006/main" prst="rect">
-            <a:avLst/>
-          </a:prstGeom>
-          <a:solidFill xmlns:a="http://schemas.openxmlformats.org/drawingml/2006/main">
-            <a:srgbClr val="FFFFFF"/>
-          </a:solidFill>
-          <a:ln xmlns:a="http://schemas.openxmlformats.org/drawingml/2006/main" w="9525">
-            <a:solidFill>
-              <a:srgbClr val="D6DDE2"/>
-            </a:solidFill>
-            <a:prstDash val="solid"/>
-          </a:ln>
-        </p:spPr>
-        <p:txBody>
-          <a:bodyPr xmlns:a="http://schemas.openxmlformats.org/drawingml/2006/main" lIns="76200" tIns="38100" rIns="76200" bIns="38100" anchor="ctr"/>
-          <a:lstStyle xmlns:a="http://schemas.openxmlformats.org/drawingml/2006/main"/>
-          <a:p xmlns:a="http://schemas.openxmlformats.org/drawingml/2006/main">
-            <a:pPr algn="l">
-              <a:lnSpc>
-                <a:spcPct val="105000"/>
-              </a:lnSpc>
-              <a:buNone/>
-              <a:defRPr sz="1350" b="0">
-                <a:solidFill>
-                  <a:srgbClr val="263746"/>
-                </a:solidFill>
-              </a:defRPr>
-            </a:pPr>
-            <a:r>
-              <a:rPr sz="1350" b="0">
-                <a:solidFill>
-                  <a:srgbClr val="263746"/>
-                </a:solidFill>
-                <a:latin typeface="Microsoft YaHei"/>
-                <a:ea typeface="Microsoft YaHei"/>
-                <a:cs typeface="Microsoft YaHei"/>
-              </a:rPr>
-              <a:t>first pass 约 5–10 分钟</a:t>
-            </a:r>
-          </a:p>
-        </p:txBody>
-      </p:sp>
-      <p:sp>
-        <p:nvSpPr>
-          <p:cNvPr id="20" name="p12-audit-r1-3">
-            <a:extLst xmlns:a="http://schemas.openxmlformats.org/drawingml/2006/main">
-              <a:ext uri="{FF2B5EF4-FFF2-40B4-BE49-F238E27FC236}">
-                <a16:creationId xmlns:a16="http://schemas.microsoft.com/office/drawing/2014/main" id="{0705A831-5E87-4068-969E-BEC5286EF237}"/>
-              </a:ext>
-            </a:extLst>
-          </p:cNvPr>
-          <p:cNvSpPr>
-            <a:spLocks xmlns:a="http://schemas.openxmlformats.org/drawingml/2006/main" noGrp="1"/>
-          </p:cNvSpPr>
-          <p:nvPr/>
-        </p:nvSpPr>
-        <p:spPr>
-          <a:xfrm xmlns:a="http://schemas.openxmlformats.org/drawingml/2006/main">
-            <a:off x="7524750" y="2705100"/>
-            <a:ext cx="2190750" cy="857250"/>
-          </a:xfrm>
-          <a:prstGeom xmlns:a="http://schemas.openxmlformats.org/drawingml/2006/main" prst="rect">
-            <a:avLst/>
-          </a:prstGeom>
-          <a:solidFill xmlns:a="http://schemas.openxmlformats.org/drawingml/2006/main">
-            <a:srgbClr val="FFFFFF"/>
-          </a:solidFill>
-          <a:ln xmlns:a="http://schemas.openxmlformats.org/drawingml/2006/main" w="9525">
-            <a:solidFill>
-              <a:srgbClr val="D6DDE2"/>
-            </a:solidFill>
-            <a:prstDash val="solid"/>
-          </a:ln>
-        </p:spPr>
-        <p:txBody>
-          <a:bodyPr xmlns:a="http://schemas.openxmlformats.org/drawingml/2006/main" lIns="76200" tIns="38100" rIns="76200" bIns="38100" anchor="ctr"/>
-          <a:lstStyle xmlns:a="http://schemas.openxmlformats.org/drawingml/2006/main"/>
-          <a:p xmlns:a="http://schemas.openxmlformats.org/drawingml/2006/main">
-            <a:pPr algn="ctr">
-              <a:lnSpc>
-                <a:spcPct val="105000"/>
-              </a:lnSpc>
-              <a:buNone/>
-              <a:defRPr sz="1350" b="0">
-                <a:solidFill>
-                  <a:srgbClr val="263746"/>
-                </a:solidFill>
-              </a:defRPr>
-            </a:pPr>
-            <a:r>
-              <a:rPr sz="1350" b="0">
-                <a:solidFill>
-                  <a:srgbClr val="263746"/>
-                </a:solidFill>
-                <a:latin typeface="Microsoft YaHei"/>
-                <a:ea typeface="Microsoft YaHei"/>
-                <a:cs typeface="Microsoft YaHei"/>
-              </a:rPr>
-              <a:t>§2.1, p.83</a:t>
-            </a:r>
-          </a:p>
-        </p:txBody>
-      </p:sp>
-      <p:sp>
-        <p:nvSpPr>
-          <p:cNvPr id="21" name="p12-audit-r1-4">
-            <a:extLst xmlns:a="http://schemas.openxmlformats.org/drawingml/2006/main">
-              <a:ext uri="{FF2B5EF4-FFF2-40B4-BE49-F238E27FC236}">
-                <a16:creationId xmlns:a16="http://schemas.microsoft.com/office/drawing/2014/main" id="{1DE53E12-185B-4796-8F2B-CA9E3D19D44C}"/>
-              </a:ext>
-            </a:extLst>
-          </p:cNvPr>
-          <p:cNvSpPr>
-            <a:spLocks xmlns:a="http://schemas.openxmlformats.org/drawingml/2006/main" noGrp="1"/>
-          </p:cNvSpPr>
-          <p:nvPr/>
-        </p:nvSpPr>
-        <p:spPr>
-          <a:xfrm xmlns:a="http://schemas.openxmlformats.org/drawingml/2006/main">
-            <a:off x="9715500" y="2705100"/>
-            <a:ext cx="1619250" cy="857250"/>
-          </a:xfrm>
-          <a:prstGeom xmlns:a="http://schemas.openxmlformats.org/drawingml/2006/main" prst="rect">
-            <a:avLst/>
-          </a:prstGeom>
-          <a:solidFill xmlns:a="http://schemas.openxmlformats.org/drawingml/2006/main">
-            <a:srgbClr val="FFFFFF"/>
-          </a:solidFill>
-          <a:ln xmlns:a="http://schemas.openxmlformats.org/drawingml/2006/main" w="9525">
-            <a:solidFill>
-              <a:srgbClr val="D6DDE2"/>
-            </a:solidFill>
-            <a:prstDash val="solid"/>
-          </a:ln>
-        </p:spPr>
-        <p:txBody>
-          <a:bodyPr xmlns:a="http://schemas.openxmlformats.org/drawingml/2006/main" lIns="76200" tIns="38100" rIns="76200" bIns="38100" anchor="ctr"/>
-          <a:lstStyle xmlns:a="http://schemas.openxmlformats.org/drawingml/2006/main"/>
-          <a:p xmlns:a="http://schemas.openxmlformats.org/drawingml/2006/main">
-            <a:pPr algn="ctr">
-              <a:lnSpc>
-                <a:spcPct val="105000"/>
-              </a:lnSpc>
-              <a:buNone/>
-              <a:defRPr sz="1350" b="0">
-                <a:solidFill>
-                  <a:srgbClr val="263746"/>
-                </a:solidFill>
-              </a:defRPr>
-            </a:pPr>
-            <a:r>
-              <a:rPr sz="1350" b="0">
-                <a:solidFill>
-                  <a:srgbClr val="263746"/>
-                </a:solidFill>
-                <a:latin typeface="Microsoft YaHei"/>
-                <a:ea typeface="Microsoft YaHei"/>
-                <a:cs typeface="Microsoft YaHei"/>
-              </a:rPr>
-              <a:t>补回范围</a:t>
-            </a:r>
-          </a:p>
-        </p:txBody>
-      </p:sp>
-      <p:sp>
-        <p:nvSpPr>
-          <p:cNvPr id="22" name="p12-audit-r2-0">
-            <a:extLst xmlns:a="http://schemas.openxmlformats.org/drawingml/2006/main">
-              <a:ext uri="{FF2B5EF4-FFF2-40B4-BE49-F238E27FC236}">
-                <a16:creationId xmlns:a16="http://schemas.microsoft.com/office/drawing/2014/main" id="{2EAED583-BC25-488F-A815-848C44E30E11}"/>
-              </a:ext>
-            </a:extLst>
-          </p:cNvPr>
-          <p:cNvSpPr>
-            <a:spLocks xmlns:a="http://schemas.openxmlformats.org/drawingml/2006/main" noGrp="1"/>
-          </p:cNvSpPr>
-          <p:nvPr/>
-        </p:nvSpPr>
-        <p:spPr>
-          <a:xfrm xmlns:a="http://schemas.openxmlformats.org/drawingml/2006/main">
-            <a:off x="476250" y="3562350"/>
-            <a:ext cx="2476500" cy="857250"/>
-          </a:xfrm>
-          <a:prstGeom xmlns:a="http://schemas.openxmlformats.org/drawingml/2006/main" prst="rect">
-            <a:avLst/>
-          </a:prstGeom>
-          <a:solidFill xmlns:a="http://schemas.openxmlformats.org/drawingml/2006/main">
-            <a:srgbClr val="F3F6F7"/>
-          </a:solidFill>
-          <a:ln xmlns:a="http://schemas.openxmlformats.org/drawingml/2006/main" w="9525">
-            <a:solidFill>
-              <a:srgbClr val="D6DDE2"/>
-            </a:solidFill>
-            <a:prstDash val="solid"/>
-          </a:ln>
-        </p:spPr>
-        <p:txBody>
-          <a:bodyPr xmlns:a="http://schemas.openxmlformats.org/drawingml/2006/main" lIns="76200" tIns="38100" rIns="76200" bIns="38100" anchor="ctr"/>
-          <a:lstStyle xmlns:a="http://schemas.openxmlformats.org/drawingml/2006/main"/>
-          <a:p xmlns:a="http://schemas.openxmlformats.org/drawingml/2006/main">
-            <a:pPr algn="l">
-              <a:lnSpc>
-                <a:spcPct val="105000"/>
-              </a:lnSpc>
-              <a:buNone/>
-              <a:defRPr sz="1350" b="1">
-                <a:solidFill>
-                  <a:srgbClr val="263746"/>
-                </a:solidFill>
-              </a:defRPr>
-            </a:pPr>
-            <a:r>
-              <a:rPr sz="1350" b="1">
-                <a:solidFill>
-                  <a:srgbClr val="263746"/>
-                </a:solidFill>
-                <a:latin typeface="Microsoft YaHei"/>
-                <a:ea typeface="Microsoft YaHei"/>
-                <a:cs typeface="Microsoft YaHei"/>
-              </a:rPr>
-              <a:t>适用于所有学科</a:t>
-            </a:r>
-          </a:p>
-        </p:txBody>
-      </p:sp>
-      <p:sp>
-        <p:nvSpPr>
-          <p:cNvPr id="23" name="p12-audit-r2-1">
-            <a:extLst xmlns:a="http://schemas.openxmlformats.org/drawingml/2006/main">
-              <a:ext uri="{FF2B5EF4-FFF2-40B4-BE49-F238E27FC236}">
-                <a16:creationId xmlns:a16="http://schemas.microsoft.com/office/drawing/2014/main" id="{3C72F5C8-6243-4DB2-91B2-E6E0CA2A5E70}"/>
-              </a:ext>
-            </a:extLst>
-          </p:cNvPr>
-          <p:cNvSpPr>
-            <a:spLocks xmlns:a="http://schemas.openxmlformats.org/drawingml/2006/main" noGrp="1"/>
-          </p:cNvSpPr>
-          <p:nvPr/>
-        </p:nvSpPr>
-        <p:spPr>
-          <a:xfrm xmlns:a="http://schemas.openxmlformats.org/drawingml/2006/main">
-            <a:off x="2952750" y="3562350"/>
-            <a:ext cx="1714500" cy="857250"/>
-          </a:xfrm>
-          <a:prstGeom xmlns:a="http://schemas.openxmlformats.org/drawingml/2006/main" prst="rect">
-            <a:avLst/>
-          </a:prstGeom>
-          <a:solidFill xmlns:a="http://schemas.openxmlformats.org/drawingml/2006/main">
-            <a:srgbClr val="F3F6F7"/>
-          </a:solidFill>
-          <a:ln xmlns:a="http://schemas.openxmlformats.org/drawingml/2006/main" w="9525">
-            <a:solidFill>
-              <a:srgbClr val="D6DDE2"/>
-            </a:solidFill>
-            <a:prstDash val="solid"/>
-          </a:ln>
-        </p:spPr>
-        <p:txBody>
-          <a:bodyPr xmlns:a="http://schemas.openxmlformats.org/drawingml/2006/main" lIns="76200" tIns="38100" rIns="76200" bIns="38100" anchor="ctr"/>
-          <a:lstStyle xmlns:a="http://schemas.openxmlformats.org/drawingml/2006/main"/>
-          <a:p xmlns:a="http://schemas.openxmlformats.org/drawingml/2006/main">
-            <a:pPr algn="ctr">
-              <a:lnSpc>
-                <a:spcPct val="105000"/>
-              </a:lnSpc>
-              <a:buNone/>
-              <a:defRPr sz="1350" b="1">
-                <a:solidFill>
-                  <a:srgbClr val="C8161E"/>
-                </a:solidFill>
-              </a:defRPr>
-            </a:pPr>
-            <a:r>
-              <a:rPr sz="1350" b="1">
-                <a:solidFill>
-                  <a:srgbClr val="C8161E"/>
-                </a:solidFill>
-                <a:latin typeface="Microsoft YaHei"/>
-                <a:ea typeface="Microsoft YaHei"/>
-                <a:cs typeface="Microsoft YaHei"/>
-              </a:rPr>
-              <a:t>过度外推</a:t>
-            </a:r>
-          </a:p>
-        </p:txBody>
-      </p:sp>
-      <p:sp>
-        <p:nvSpPr>
-          <p:cNvPr id="24" name="p12-audit-r2-2">
-            <a:extLst xmlns:a="http://schemas.openxmlformats.org/drawingml/2006/main">
-              <a:ext uri="{FF2B5EF4-FFF2-40B4-BE49-F238E27FC236}">
-                <a16:creationId xmlns:a16="http://schemas.microsoft.com/office/drawing/2014/main" id="{09284884-FF11-496F-8E07-2881509946A8}"/>
-              </a:ext>
-            </a:extLst>
-          </p:cNvPr>
-          <p:cNvSpPr>
-            <a:spLocks xmlns:a="http://schemas.openxmlformats.org/drawingml/2006/main" noGrp="1"/>
-          </p:cNvSpPr>
-          <p:nvPr/>
-        </p:nvSpPr>
-        <p:spPr>
-          <a:xfrm xmlns:a="http://schemas.openxmlformats.org/drawingml/2006/main">
-            <a:off x="4667250" y="3562350"/>
-            <a:ext cx="2857500" cy="857250"/>
-          </a:xfrm>
-          <a:prstGeom xmlns:a="http://schemas.openxmlformats.org/drawingml/2006/main" prst="rect">
-            <a:avLst/>
-          </a:prstGeom>
-          <a:solidFill xmlns:a="http://schemas.openxmlformats.org/drawingml/2006/main">
-            <a:srgbClr val="F3F6F7"/>
-          </a:solidFill>
-          <a:ln xmlns:a="http://schemas.openxmlformats.org/drawingml/2006/main" w="9525">
-            <a:solidFill>
-              <a:srgbClr val="D6DDE2"/>
-            </a:solidFill>
-            <a:prstDash val="solid"/>
-          </a:ln>
-        </p:spPr>
-        <p:txBody>
-          <a:bodyPr xmlns:a="http://schemas.openxmlformats.org/drawingml/2006/main" lIns="76200" tIns="38100" rIns="76200" bIns="38100" anchor="ctr"/>
-          <a:lstStyle xmlns:a="http://schemas.openxmlformats.org/drawingml/2006/main"/>
-          <a:p xmlns:a="http://schemas.openxmlformats.org/drawingml/2006/main">
-            <a:pPr algn="l">
-              <a:lnSpc>
-                <a:spcPct val="105000"/>
-              </a:lnSpc>
-              <a:buNone/>
-              <a:defRPr sz="1350" b="0">
-                <a:solidFill>
-                  <a:srgbClr val="263746"/>
-                </a:solidFill>
-              </a:defRPr>
-            </a:pPr>
-            <a:r>
-              <a:rPr sz="1350" b="0">
-                <a:solidFill>
-                  <a:srgbClr val="263746"/>
-                </a:solidFill>
-                <a:latin typeface="Microsoft YaHei"/>
-                <a:ea typeface="Microsoft YaHei"/>
-                <a:cs typeface="Microsoft YaHei"/>
-              </a:rPr>
-              <a:t>文章面向论文阅读；无跨学科验证</a:t>
-            </a:r>
-          </a:p>
-        </p:txBody>
-      </p:sp>
-      <p:sp>
-        <p:nvSpPr>
-          <p:cNvPr id="25" name="p12-audit-r2-3">
-            <a:extLst xmlns:a="http://schemas.openxmlformats.org/drawingml/2006/main">
-              <a:ext uri="{FF2B5EF4-FFF2-40B4-BE49-F238E27FC236}">
-                <a16:creationId xmlns:a16="http://schemas.microsoft.com/office/drawing/2014/main" id="{EABF9A34-AD3D-4B64-8592-6A9246CF81BB}"/>
-              </a:ext>
-            </a:extLst>
-          </p:cNvPr>
-          <p:cNvSpPr>
-            <a:spLocks xmlns:a="http://schemas.openxmlformats.org/drawingml/2006/main" noGrp="1"/>
-          </p:cNvSpPr>
-          <p:nvPr/>
-        </p:nvSpPr>
-        <p:spPr>
-          <a:xfrm xmlns:a="http://schemas.openxmlformats.org/drawingml/2006/main">
-            <a:off x="7524750" y="3562350"/>
-            <a:ext cx="2190750" cy="857250"/>
-          </a:xfrm>
-          <a:prstGeom xmlns:a="http://schemas.openxmlformats.org/drawingml/2006/main" prst="rect">
-            <a:avLst/>
-          </a:prstGeom>
-          <a:solidFill xmlns:a="http://schemas.openxmlformats.org/drawingml/2006/main">
-            <a:srgbClr val="F3F6F7"/>
-          </a:solidFill>
-          <a:ln xmlns:a="http://schemas.openxmlformats.org/drawingml/2006/main" w="9525">
-            <a:solidFill>
-              <a:srgbClr val="D6DDE2"/>
-            </a:solidFill>
-            <a:prstDash val="solid"/>
-          </a:ln>
-        </p:spPr>
-        <p:txBody>
-          <a:bodyPr xmlns:a="http://schemas.openxmlformats.org/drawingml/2006/main" lIns="76200" tIns="38100" rIns="76200" bIns="38100" anchor="ctr"/>
-          <a:lstStyle xmlns:a="http://schemas.openxmlformats.org/drawingml/2006/main"/>
-          <a:p xmlns:a="http://schemas.openxmlformats.org/drawingml/2006/main">
-            <a:pPr algn="ctr">
-              <a:lnSpc>
-                <a:spcPct val="105000"/>
-              </a:lnSpc>
-              <a:buNone/>
-              <a:defRPr sz="1350" b="0">
-                <a:solidFill>
-                  <a:srgbClr val="263746"/>
-                </a:solidFill>
-              </a:defRPr>
-            </a:pPr>
-            <a:r>
-              <a:rPr sz="1350" b="0">
-                <a:solidFill>
-                  <a:srgbClr val="263746"/>
-                </a:solidFill>
-                <a:latin typeface="Microsoft YaHei"/>
-                <a:ea typeface="Microsoft YaHei"/>
-                <a:cs typeface="Microsoft YaHei"/>
-              </a:rPr>
-              <a:t>摘要 / 全文</a:t>
-            </a:r>
-          </a:p>
-        </p:txBody>
-      </p:sp>
-      <p:sp>
-        <p:nvSpPr>
-          <p:cNvPr id="26" name="p12-audit-r2-4">
-            <a:extLst xmlns:a="http://schemas.openxmlformats.org/drawingml/2006/main">
-              <a:ext uri="{FF2B5EF4-FFF2-40B4-BE49-F238E27FC236}">
-                <a16:creationId xmlns:a16="http://schemas.microsoft.com/office/drawing/2014/main" id="{381A79DD-207F-461B-AC92-A90A04F03CC1}"/>
-              </a:ext>
-            </a:extLst>
-          </p:cNvPr>
-          <p:cNvSpPr>
-            <a:spLocks xmlns:a="http://schemas.openxmlformats.org/drawingml/2006/main" noGrp="1"/>
-          </p:cNvSpPr>
-          <p:nvPr/>
-        </p:nvSpPr>
-        <p:spPr>
-          <a:xfrm xmlns:a="http://schemas.openxmlformats.org/drawingml/2006/main">
-            <a:off x="9715500" y="3562350"/>
-            <a:ext cx="1619250" cy="857250"/>
-          </a:xfrm>
-          <a:prstGeom xmlns:a="http://schemas.openxmlformats.org/drawingml/2006/main" prst="rect">
-            <a:avLst/>
-          </a:prstGeom>
-          <a:solidFill xmlns:a="http://schemas.openxmlformats.org/drawingml/2006/main">
-            <a:srgbClr val="F3F6F7"/>
-          </a:solidFill>
-          <a:ln xmlns:a="http://schemas.openxmlformats.org/drawingml/2006/main" w="9525">
-            <a:solidFill>
-              <a:srgbClr val="D6DDE2"/>
-            </a:solidFill>
-            <a:prstDash val="solid"/>
-          </a:ln>
-        </p:spPr>
-        <p:txBody>
-          <a:bodyPr xmlns:a="http://schemas.openxmlformats.org/drawingml/2006/main" lIns="76200" tIns="38100" rIns="76200" bIns="38100" anchor="ctr"/>
-          <a:lstStyle xmlns:a="http://schemas.openxmlformats.org/drawingml/2006/main"/>
-          <a:p xmlns:a="http://schemas.openxmlformats.org/drawingml/2006/main">
-            <a:pPr algn="ctr">
-              <a:lnSpc>
-                <a:spcPct val="105000"/>
-              </a:lnSpc>
-              <a:buNone/>
-              <a:defRPr sz="1350" b="0">
-                <a:solidFill>
-                  <a:srgbClr val="263746"/>
-                </a:solidFill>
-              </a:defRPr>
-            </a:pPr>
-            <a:r>
-              <a:rPr sz="1350" b="0">
-                <a:solidFill>
-                  <a:srgbClr val="263746"/>
-                </a:solidFill>
-                <a:latin typeface="Microsoft YaHei"/>
-                <a:ea typeface="Microsoft YaHei"/>
-                <a:cs typeface="Microsoft YaHei"/>
-              </a:rPr>
-              <a:t>保留 caveat</a:t>
-            </a:r>
-          </a:p>
-        </p:txBody>
-      </p:sp>
-      <p:sp>
-        <p:nvSpPr>
-          <p:cNvPr id="27" name="p12-rule">
-            <a:extLst xmlns:a="http://schemas.openxmlformats.org/drawingml/2006/main">
-              <a:ext uri="{FF2B5EF4-FFF2-40B4-BE49-F238E27FC236}">
-                <a16:creationId xmlns:a16="http://schemas.microsoft.com/office/drawing/2014/main" id="{247D403E-0C86-4796-8D09-C0E5ABD059F5}"/>
-              </a:ext>
-            </a:extLst>
-          </p:cNvPr>
-          <p:cNvSpPr>
-            <a:spLocks xmlns:a="http://schemas.openxmlformats.org/drawingml/2006/main" noGrp="1"/>
-          </p:cNvSpPr>
-          <p:nvPr/>
-        </p:nvSpPr>
-        <p:spPr>
-          <a:xfrm xmlns:a="http://schemas.openxmlformats.org/drawingml/2006/main">
-            <a:off x="1066800" y="4686300"/>
-            <a:ext cx="10058400" cy="685800"/>
+        </p:spPr>
+      </p:pic>
+      <p:sp>
+        <p:nvSpPr>
+          <p:cNvPr id="8" name="p12-rule">
+            <a:extLst xmlns:a="http://schemas.openxmlformats.org/drawingml/2006/main">
+              <a:ext uri="{FF2B5EF4-FFF2-40B4-BE49-F238E27FC236}">
+                <a16:creationId xmlns:a16="http://schemas.microsoft.com/office/drawing/2014/main" id="{ACCE2A1B-C783-4410-84F6-AE49CB3762FF}"/>
+              </a:ext>
+            </a:extLst>
+          </p:cNvPr>
+          <p:cNvSpPr>
+            <a:spLocks xmlns:a="http://schemas.openxmlformats.org/drawingml/2006/main" noGrp="1"/>
+          </p:cNvSpPr>
+          <p:nvPr/>
+        </p:nvSpPr>
+        <p:spPr>
+          <a:xfrm xmlns:a="http://schemas.openxmlformats.org/drawingml/2006/main">
+            <a:off x="1733550" y="5238750"/>
+            <a:ext cx="8724900" cy="419100"/>
           </a:xfrm>
           <a:prstGeom xmlns:a="http://schemas.openxmlformats.org/drawingml/2006/main" prst="rect">
             <a:avLst/>
@@ -7226,14 +6045,14 @@
           <a:lstStyle xmlns:a="http://schemas.openxmlformats.org/drawingml/2006/main"/>
           <a:p xmlns:a="http://schemas.openxmlformats.org/drawingml/2006/main">
             <a:pPr algn="ctr">
-              <a:defRPr sz="1800" b="1">
+              <a:defRPr sz="1650" b="1">
                 <a:solidFill>
                   <a:srgbClr val="18354E"/>
                 </a:solidFill>
               </a:defRPr>
             </a:pPr>
             <a:r>
-              <a:rPr sz="1800" b="1">
+              <a:rPr sz="1650" b="1">
                 <a:solidFill>
                   <a:srgbClr val="18354E"/>
                 </a:solidFill>
@@ -7241,7 +6060,7 @@
                 <a:ea typeface="Microsoft YaHei"/>
                 <a:cs typeface="Microsoft YaHei"/>
               </a:rPr>
-              <a:t>审计的不是“AI 有没有犯错”，而是差异能否被复查并形成处理决定</a:t>
+              <a:t>阅读卡先固定位置、设置、指标与局限，再决定证据角色。</a:t>
             </a:r>
           </a:p>
         </p:txBody>
@@ -7304,7 +6123,7 @@
                 <a:ea typeface="Microsoft YaHei"/>
                 <a:cs typeface="Microsoft YaHei"/>
               </a:rPr>
-              <a:t>演示：阅读卡第一版与判断点</a:t>
+              <a:t>MI 演示：从 patching 成功到受限判断</a:t>
             </a:r>
             <a:endParaRPr/>
           </a:p>
@@ -7343,23 +6162,23 @@
           <p:cNvPr id="6" name="p13-real">
             <a:extLst xmlns:a="http://schemas.openxmlformats.org/drawingml/2006/main">
               <a:ext uri="{FF2B5EF4-FFF2-40B4-BE49-F238E27FC236}">
-                <a16:creationId xmlns:a16="http://schemas.microsoft.com/office/drawing/2014/main" id="{A76582AD-CEEA-48E9-8425-002E7DDB5D21}"/>
-              </a:ext>
-            </a:extLst>
-          </p:cNvPr>
-          <p:cNvSpPr>
-            <a:spLocks xmlns:a="http://schemas.openxmlformats.org/drawingml/2006/main" noGrp="1"/>
-          </p:cNvSpPr>
-          <p:nvPr/>
-        </p:nvSpPr>
-        <p:spPr>
-          <a:xfrm xmlns:a="http://schemas.openxmlformats.org/drawingml/2006/main">
-            <a:off x="628650" y="876300"/>
-            <a:ext cx="3619500" cy="342900"/>
+                <a16:creationId xmlns:a16="http://schemas.microsoft.com/office/drawing/2014/main" id="{906D270C-49F4-4840-8B82-66C2BCE7543E}"/>
+              </a:ext>
+            </a:extLst>
+          </p:cNvPr>
+          <p:cNvSpPr>
+            <a:spLocks xmlns:a="http://schemas.openxmlformats.org/drawingml/2006/main" noGrp="1"/>
+          </p:cNvSpPr>
+          <p:nvPr/>
+        </p:nvSpPr>
+        <p:spPr>
+          <a:xfrm xmlns:a="http://schemas.openxmlformats.org/drawingml/2006/main">
+            <a:off x="628650" y="857250"/>
+            <a:ext cx="4191000" cy="323850"/>
           </a:xfrm>
           <a:prstGeom xmlns:a="http://schemas.openxmlformats.org/drawingml/2006/main" prst="roundRect">
             <a:avLst>
-              <a:gd name="adj" fmla="val 22222"/>
+              <a:gd name="adj" fmla="val 23529"/>
             </a:avLst>
           </a:prstGeom>
           <a:solidFill xmlns:a="http://schemas.openxmlformats.org/drawingml/2006/main">
@@ -7390,34 +6209,38 @@
                 <a:ea typeface="Microsoft YaHei"/>
                 <a:cs typeface="Microsoft YaHei"/>
               </a:rPr>
-              <a:t>真实来源阅读卡｜Keshav 2007</a:t>
-            </a:r>
-          </a:p>
-        </p:txBody>
-      </p:sp>
-      <p:sp>
-        <p:nvSpPr>
-          <p:cNvPr id="7" name="p13-card-title">
-            <a:extLst xmlns:a="http://schemas.openxmlformats.org/drawingml/2006/main">
-              <a:ext uri="{FF2B5EF4-FFF2-40B4-BE49-F238E27FC236}">
-                <a16:creationId xmlns:a16="http://schemas.microsoft.com/office/drawing/2014/main" id="{960760E4-6925-4AFA-99B1-39E50D313617}"/>
-              </a:ext>
-            </a:extLst>
-          </p:cNvPr>
-          <p:cNvSpPr>
-            <a:spLocks xmlns:a="http://schemas.openxmlformats.org/drawingml/2006/main" noGrp="1"/>
-          </p:cNvSpPr>
-          <p:nvPr/>
-        </p:nvSpPr>
-        <p:spPr>
-          <a:xfrm xmlns:a="http://schemas.openxmlformats.org/drawingml/2006/main">
-            <a:off x="590550" y="1352550"/>
-            <a:ext cx="6286500" cy="438150"/>
-          </a:xfrm>
-          <a:prstGeom xmlns:a="http://schemas.openxmlformats.org/drawingml/2006/main" prst="rect">
-            <a:avLst/>
-          </a:prstGeom>
-          <a:noFill xmlns:a="http://schemas.openxmlformats.org/drawingml/2006/main"/>
+              <a:t>真实来源阅读卡｜C02 + C16 + C31</a:t>
+            </a:r>
+          </a:p>
+        </p:txBody>
+      </p:sp>
+      <p:sp>
+        <p:nvSpPr>
+          <p:cNvPr id="7" name="p13-head-0">
+            <a:extLst xmlns:a="http://schemas.openxmlformats.org/drawingml/2006/main">
+              <a:ext uri="{FF2B5EF4-FFF2-40B4-BE49-F238E27FC236}">
+                <a16:creationId xmlns:a16="http://schemas.microsoft.com/office/drawing/2014/main" id="{06874554-C250-4F82-B657-D3571BD5481A}"/>
+              </a:ext>
+            </a:extLst>
+          </p:cNvPr>
+          <p:cNvSpPr>
+            <a:spLocks xmlns:a="http://schemas.openxmlformats.org/drawingml/2006/main" noGrp="1"/>
+          </p:cNvSpPr>
+          <p:nvPr/>
+        </p:nvSpPr>
+        <p:spPr>
+          <a:xfrm xmlns:a="http://schemas.openxmlformats.org/drawingml/2006/main">
+            <a:off x="590550" y="1381125"/>
+            <a:ext cx="2381250" cy="704850"/>
+          </a:xfrm>
+          <a:prstGeom xmlns:a="http://schemas.openxmlformats.org/drawingml/2006/main" prst="roundRect">
+            <a:avLst>
+              <a:gd name="adj" fmla="val 10811"/>
+            </a:avLst>
+          </a:prstGeom>
+          <a:solidFill xmlns:a="http://schemas.openxmlformats.org/drawingml/2006/main">
+            <a:srgbClr val="28745A"/>
+          </a:solidFill>
           <a:ln xmlns:a="http://schemas.openxmlformats.org/drawingml/2006/main" w="0">
             <a:noFill/>
             <a:prstDash val="solid"/>
@@ -7427,51 +6250,53 @@
           <a:bodyPr xmlns:a="http://schemas.openxmlformats.org/drawingml/2006/main" lIns="76200" tIns="38100" rIns="76200" bIns="38100" anchor="ctr"/>
           <a:lstStyle xmlns:a="http://schemas.openxmlformats.org/drawingml/2006/main"/>
           <a:p xmlns:a="http://schemas.openxmlformats.org/drawingml/2006/main">
-            <a:pPr algn="l">
-              <a:defRPr sz="1875" b="1">
-                <a:solidFill>
-                  <a:srgbClr val="18354E"/>
-                </a:solidFill>
-              </a:defRPr>
-            </a:pPr>
-            <a:r>
-              <a:rPr sz="1875" b="1">
-                <a:solidFill>
-                  <a:srgbClr val="18354E"/>
-                </a:solidFill>
-                <a:latin typeface="Microsoft YaHei"/>
-                <a:ea typeface="Microsoft YaHei"/>
-                <a:cs typeface="Microsoft YaHei"/>
-              </a:rPr>
-              <a:t>完整阅读卡（压缩展示）</a:t>
-            </a:r>
-          </a:p>
-        </p:txBody>
-      </p:sp>
-      <p:sp>
-        <p:nvSpPr>
-          <p:cNvPr id="8" name="p13-card">
-            <a:extLst xmlns:a="http://schemas.openxmlformats.org/drawingml/2006/main">
-              <a:ext uri="{FF2B5EF4-FFF2-40B4-BE49-F238E27FC236}">
-                <a16:creationId xmlns:a16="http://schemas.microsoft.com/office/drawing/2014/main" id="{E9B00E9A-0849-46E5-977F-3C60CCA2F254}"/>
-              </a:ext>
-            </a:extLst>
-          </p:cNvPr>
-          <p:cNvSpPr>
-            <a:spLocks xmlns:a="http://schemas.openxmlformats.org/drawingml/2006/main" noGrp="1"/>
-          </p:cNvSpPr>
-          <p:nvPr/>
-        </p:nvSpPr>
-        <p:spPr>
-          <a:xfrm xmlns:a="http://schemas.openxmlformats.org/drawingml/2006/main">
-            <a:off x="590550" y="1790700"/>
-            <a:ext cx="6572250" cy="3333750"/>
-          </a:xfrm>
-          <a:prstGeom xmlns:a="http://schemas.openxmlformats.org/drawingml/2006/main" prst="rect">
-            <a:avLst/>
+            <a:pPr algn="ctr">
+              <a:defRPr sz="1575" b="1">
+                <a:solidFill>
+                  <a:srgbClr val="FFFFFF"/>
+                </a:solidFill>
+              </a:defRPr>
+            </a:pPr>
+            <a:r>
+              <a:rPr sz="1575" b="1">
+                <a:solidFill>
+                  <a:srgbClr val="FFFFFF"/>
+                </a:solidFill>
+                <a:latin typeface="Microsoft YaHei"/>
+                <a:ea typeface="Microsoft YaHei"/>
+                <a:cs typeface="Microsoft YaHei"/>
+              </a:rPr>
+              <a:t>C02｜能支持</a:t>
+            </a:r>
+          </a:p>
+        </p:txBody>
+      </p:sp>
+      <p:sp>
+        <p:nvSpPr>
+          <p:cNvPr id="8" name="p13-body-0">
+            <a:extLst xmlns:a="http://schemas.openxmlformats.org/drawingml/2006/main">
+              <a:ext uri="{FF2B5EF4-FFF2-40B4-BE49-F238E27FC236}">
+                <a16:creationId xmlns:a16="http://schemas.microsoft.com/office/drawing/2014/main" id="{2F71542B-5D2E-4079-982A-B961F2BF14C8}"/>
+              </a:ext>
+            </a:extLst>
+          </p:cNvPr>
+          <p:cNvSpPr>
+            <a:spLocks xmlns:a="http://schemas.openxmlformats.org/drawingml/2006/main" noGrp="1"/>
+          </p:cNvSpPr>
+          <p:nvPr/>
+        </p:nvSpPr>
+        <p:spPr>
+          <a:xfrm xmlns:a="http://schemas.openxmlformats.org/drawingml/2006/main">
+            <a:off x="3105150" y="1381125"/>
+            <a:ext cx="8191500" cy="704850"/>
+          </a:xfrm>
+          <a:prstGeom xmlns:a="http://schemas.openxmlformats.org/drawingml/2006/main" prst="roundRect">
+            <a:avLst>
+              <a:gd name="adj" fmla="val 10811"/>
+            </a:avLst>
           </a:prstGeom>
           <a:solidFill xmlns:a="http://schemas.openxmlformats.org/drawingml/2006/main">
-            <a:srgbClr val="F3F6F7"/>
+            <a:srgbClr val="E7F2ED"/>
           </a:solidFill>
           <a:ln xmlns:a="http://schemas.openxmlformats.org/drawingml/2006/main" w="9525">
             <a:solidFill>
@@ -7484,246 +6309,54 @@
           <a:bodyPr xmlns:a="http://schemas.openxmlformats.org/drawingml/2006/main" lIns="76200" tIns="38100" rIns="76200" bIns="38100" anchor="ctr"/>
           <a:lstStyle xmlns:a="http://schemas.openxmlformats.org/drawingml/2006/main"/>
           <a:p xmlns:a="http://schemas.openxmlformats.org/drawingml/2006/main">
-            <a:pPr algn="l">
-              <a:lnSpc>
-                <a:spcPct val="116000"/>
-              </a:lnSpc>
-              <a:buNone/>
-              <a:defRPr sz="1350" b="0">
-                <a:solidFill>
-                  <a:srgbClr val="263746"/>
-                </a:solidFill>
-              </a:defRPr>
-            </a:pPr>
-            <a:r>
-              <a:rPr sz="1350" b="0">
-                <a:solidFill>
-                  <a:srgbClr val="263746"/>
-                </a:solidFill>
-                <a:latin typeface="Consolas"/>
-                <a:ea typeface="Consolas"/>
-                <a:cs typeface="Consolas"/>
-              </a:rPr>
-              <a:t>身份　Keshav｜2007｜CCR｜DOI 10.1145/1273445.1273458</a:t>
-            </a:r>
-          </a:p>
-          <a:p xmlns:a="http://schemas.openxmlformats.org/drawingml/2006/main">
-            <a:pPr algn="l">
-              <a:lnSpc>
-                <a:spcPct val="116000"/>
-              </a:lnSpc>
-              <a:buNone/>
-              <a:defRPr sz="1350" b="0">
-                <a:solidFill>
-                  <a:srgbClr val="263746"/>
-                </a:solidFill>
-              </a:defRPr>
-            </a:pPr>
-            <a:r>
-              <a:rPr sz="1350" b="0">
-                <a:solidFill>
-                  <a:srgbClr val="263746"/>
-                </a:solidFill>
-                <a:latin typeface="Consolas"/>
-                <a:ea typeface="Consolas"/>
-                <a:cs typeface="Consolas"/>
-              </a:rPr>
-              <a:t>来源状态　verified-with-caveat｜方法依据</a:t>
-            </a:r>
-          </a:p>
-          <a:p xmlns:a="http://schemas.openxmlformats.org/drawingml/2006/main">
-            <a:pPr algn="l">
-              <a:lnSpc>
-                <a:spcPct val="116000"/>
-              </a:lnSpc>
-              <a:buNone/>
-              <a:defRPr sz="1350" b="0">
-                <a:solidFill>
-                  <a:srgbClr val="263746"/>
-                </a:solidFill>
-              </a:defRPr>
-            </a:pPr>
-            <a:r>
-              <a:rPr sz="1350" b="0">
-                <a:solidFill>
-                  <a:srgbClr val="263746"/>
-                </a:solidFill>
-                <a:latin typeface="Consolas"/>
-                <a:ea typeface="Consolas"/>
-                <a:cs typeface="Consolas"/>
-              </a:rPr>
-              <a:t>中心问题　如何高效阅读论文？</a:t>
-            </a:r>
-          </a:p>
-          <a:p xmlns:a="http://schemas.openxmlformats.org/drawingml/2006/main">
-            <a:pPr algn="l">
-              <a:lnSpc>
-                <a:spcPct val="116000"/>
-              </a:lnSpc>
-              <a:buNone/>
-              <a:defRPr sz="1350" b="0">
-                <a:solidFill>
-                  <a:srgbClr val="263746"/>
-                </a:solidFill>
-              </a:defRPr>
-            </a:pPr>
-            <a:r>
-              <a:rPr sz="1350" b="0">
-                <a:solidFill>
-                  <a:srgbClr val="263746"/>
-                </a:solidFill>
-                <a:latin typeface="Consolas"/>
-                <a:ea typeface="Consolas"/>
-                <a:cs typeface="Consolas"/>
-              </a:rPr>
-              <a:t>作者主张　three-pass approach（摘要；§2）</a:t>
-            </a:r>
-          </a:p>
-          <a:p xmlns:a="http://schemas.openxmlformats.org/drawingml/2006/main">
-            <a:pPr algn="l">
-              <a:lnSpc>
-                <a:spcPct val="116000"/>
-              </a:lnSpc>
-              <a:buNone/>
-              <a:defRPr sz="1350" b="0">
-                <a:solidFill>
-                  <a:srgbClr val="263746"/>
-                </a:solidFill>
-              </a:defRPr>
-            </a:pPr>
-            <a:r>
-              <a:rPr sz="1350" b="0">
-                <a:solidFill>
-                  <a:srgbClr val="263746"/>
-                </a:solidFill>
-                <a:latin typeface="Consolas"/>
-                <a:ea typeface="Consolas"/>
-                <a:cs typeface="Consolas"/>
-              </a:rPr>
-              <a:t>原文证据　步骤与时间建议；无对照/样本/效果量</a:t>
-            </a:r>
-          </a:p>
-          <a:p xmlns:a="http://schemas.openxmlformats.org/drawingml/2006/main">
-            <a:pPr algn="l">
-              <a:lnSpc>
-                <a:spcPct val="116000"/>
-              </a:lnSpc>
-              <a:buNone/>
-              <a:defRPr sz="1350" b="0">
-                <a:solidFill>
-                  <a:srgbClr val="263746"/>
-                </a:solidFill>
-              </a:defRPr>
-            </a:pPr>
-            <a:r>
-              <a:rPr sz="1350" b="0">
-                <a:solidFill>
-                  <a:srgbClr val="263746"/>
-                </a:solidFill>
-                <a:latin typeface="Consolas"/>
-                <a:ea typeface="Consolas"/>
-                <a:cs typeface="Consolas"/>
-              </a:rPr>
-              <a:t>边界　实践性文章，缺少受控验证</a:t>
-            </a:r>
-          </a:p>
-          <a:p xmlns:a="http://schemas.openxmlformats.org/drawingml/2006/main">
-            <a:pPr algn="l">
-              <a:lnSpc>
-                <a:spcPct val="116000"/>
-              </a:lnSpc>
-              <a:buNone/>
-              <a:defRPr sz="1350" b="0">
-                <a:solidFill>
-                  <a:srgbClr val="263746"/>
-                </a:solidFill>
-              </a:defRPr>
-            </a:pPr>
-            <a:r>
-              <a:rPr sz="1350" b="0">
-                <a:solidFill>
-                  <a:srgbClr val="263746"/>
-                </a:solidFill>
-                <a:latin typeface="Consolas"/>
-                <a:ea typeface="Consolas"/>
-                <a:cs typeface="Consolas"/>
-              </a:rPr>
-              <a:t>个人判断　可作流程框架，不作效果量主证据</a:t>
-            </a:r>
-          </a:p>
-          <a:p xmlns:a="http://schemas.openxmlformats.org/drawingml/2006/main">
-            <a:pPr algn="l">
-              <a:lnSpc>
-                <a:spcPct val="116000"/>
-              </a:lnSpc>
-              <a:buNone/>
-              <a:defRPr sz="1350" b="0">
-                <a:solidFill>
-                  <a:srgbClr val="263746"/>
-                </a:solidFill>
-              </a:defRPr>
-            </a:pPr>
-            <a:r>
-              <a:rPr sz="1350" b="0">
-                <a:solidFill>
-                  <a:srgbClr val="263746"/>
-                </a:solidFill>
-                <a:latin typeface="Consolas"/>
-                <a:ea typeface="Consolas"/>
-                <a:cs typeface="Consolas"/>
-              </a:rPr>
-              <a:t>AI 建议　“降低 50%”待核验 → rejected</a:t>
-            </a:r>
-          </a:p>
-          <a:p xmlns:a="http://schemas.openxmlformats.org/drawingml/2006/main">
-            <a:pPr algn="l">
-              <a:lnSpc>
-                <a:spcPct val="116000"/>
-              </a:lnSpc>
-              <a:buNone/>
-              <a:defRPr sz="1350" b="0">
-                <a:solidFill>
-                  <a:srgbClr val="263746"/>
-                </a:solidFill>
-              </a:defRPr>
-            </a:pPr>
-            <a:r>
-              <a:rPr sz="1350" b="0">
-                <a:solidFill>
-                  <a:srgbClr val="263746"/>
-                </a:solidFill>
-                <a:latin typeface="Consolas"/>
-                <a:ea typeface="Consolas"/>
-                <a:cs typeface="Consolas"/>
-              </a:rPr>
-              <a:t>偏差审计　虚构证据 / 固定值 / 过度外推</a:t>
-            </a:r>
-          </a:p>
-        </p:txBody>
-      </p:sp>
-      <p:sp>
-        <p:nvSpPr>
-          <p:cNvPr id="9" name="p13-q-title">
-            <a:extLst xmlns:a="http://schemas.openxmlformats.org/drawingml/2006/main">
-              <a:ext uri="{FF2B5EF4-FFF2-40B4-BE49-F238E27FC236}">
-                <a16:creationId xmlns:a16="http://schemas.microsoft.com/office/drawing/2014/main" id="{9105352E-BC5D-4331-A385-A2BF6AE5B1E8}"/>
-              </a:ext>
-            </a:extLst>
-          </p:cNvPr>
-          <p:cNvSpPr>
-            <a:spLocks xmlns:a="http://schemas.openxmlformats.org/drawingml/2006/main" noGrp="1"/>
-          </p:cNvSpPr>
-          <p:nvPr/>
-        </p:nvSpPr>
-        <p:spPr>
-          <a:xfrm xmlns:a="http://schemas.openxmlformats.org/drawingml/2006/main">
-            <a:off x="7067550" y="1352550"/>
-            <a:ext cx="4343400" cy="438150"/>
-          </a:xfrm>
-          <a:prstGeom xmlns:a="http://schemas.openxmlformats.org/drawingml/2006/main" prst="rect">
-            <a:avLst/>
-          </a:prstGeom>
-          <a:noFill xmlns:a="http://schemas.openxmlformats.org/drawingml/2006/main"/>
+            <a:pPr algn="ctr">
+              <a:defRPr sz="1425" b="1">
+                <a:solidFill>
+                  <a:srgbClr val="263746"/>
+                </a:solidFill>
+              </a:defRPr>
+            </a:pPr>
+            <a:r>
+              <a:rPr sz="1425" b="1">
+                <a:solidFill>
+                  <a:srgbClr val="263746"/>
+                </a:solidFill>
+                <a:latin typeface="Microsoft YaHei"/>
+                <a:ea typeface="Microsoft YaHei"/>
+                <a:cs typeface="Microsoft YaHei"/>
+              </a:rPr>
+              <a:t>Pythia-410M · IOI · layer 11；相同 KL 下，SAE patching 比 PCA 需要更少方向与更小编辑量。</a:t>
+            </a:r>
+          </a:p>
+        </p:txBody>
+      </p:sp>
+      <p:sp>
+        <p:nvSpPr>
+          <p:cNvPr id="9" name="p13-head-1">
+            <a:extLst xmlns:a="http://schemas.openxmlformats.org/drawingml/2006/main">
+              <a:ext uri="{FF2B5EF4-FFF2-40B4-BE49-F238E27FC236}">
+                <a16:creationId xmlns:a16="http://schemas.microsoft.com/office/drawing/2014/main" id="{91BB44B7-AB52-4F62-A4AD-883E389789FB}"/>
+              </a:ext>
+            </a:extLst>
+          </p:cNvPr>
+          <p:cNvSpPr>
+            <a:spLocks xmlns:a="http://schemas.openxmlformats.org/drawingml/2006/main" noGrp="1"/>
+          </p:cNvSpPr>
+          <p:nvPr/>
+        </p:nvSpPr>
+        <p:spPr>
+          <a:xfrm xmlns:a="http://schemas.openxmlformats.org/drawingml/2006/main">
+            <a:off x="590550" y="2505075"/>
+            <a:ext cx="2381250" cy="704850"/>
+          </a:xfrm>
+          <a:prstGeom xmlns:a="http://schemas.openxmlformats.org/drawingml/2006/main" prst="roundRect">
+            <a:avLst>
+              <a:gd name="adj" fmla="val 10811"/>
+            </a:avLst>
+          </a:prstGeom>
+          <a:solidFill xmlns:a="http://schemas.openxmlformats.org/drawingml/2006/main">
+            <a:srgbClr val="A86C12"/>
+          </a:solidFill>
           <a:ln xmlns:a="http://schemas.openxmlformats.org/drawingml/2006/main" w="0">
             <a:noFill/>
             <a:prstDash val="solid"/>
@@ -7734,50 +6367,52 @@
           <a:lstStyle xmlns:a="http://schemas.openxmlformats.org/drawingml/2006/main"/>
           <a:p xmlns:a="http://schemas.openxmlformats.org/drawingml/2006/main">
             <a:pPr algn="ctr">
-              <a:defRPr sz="1875" b="1">
-                <a:solidFill>
-                  <a:srgbClr val="C8161E"/>
-                </a:solidFill>
-              </a:defRPr>
-            </a:pPr>
-            <a:r>
-              <a:rPr sz="1875" b="1">
-                <a:solidFill>
-                  <a:srgbClr val="C8161E"/>
-                </a:solidFill>
-                <a:latin typeface="Microsoft YaHei"/>
-                <a:ea typeface="Microsoft YaHei"/>
-                <a:cs typeface="Microsoft YaHei"/>
-              </a:rPr>
-              <a:t>四个判断点</a:t>
-            </a:r>
-          </a:p>
-        </p:txBody>
-      </p:sp>
-      <p:sp>
-        <p:nvSpPr>
-          <p:cNvPr id="10" name="p13-q-0">
-            <a:extLst xmlns:a="http://schemas.openxmlformats.org/drawingml/2006/main">
-              <a:ext uri="{FF2B5EF4-FFF2-40B4-BE49-F238E27FC236}">
-                <a16:creationId xmlns:a16="http://schemas.microsoft.com/office/drawing/2014/main" id="{34D4380D-70BE-4D0C-AB4B-6A3B13D766C4}"/>
-              </a:ext>
-            </a:extLst>
-          </p:cNvPr>
-          <p:cNvSpPr>
-            <a:spLocks xmlns:a="http://schemas.openxmlformats.org/drawingml/2006/main" noGrp="1"/>
-          </p:cNvSpPr>
-          <p:nvPr/>
-        </p:nvSpPr>
-        <p:spPr>
-          <a:xfrm xmlns:a="http://schemas.openxmlformats.org/drawingml/2006/main">
-            <a:off x="6896100" y="1943100"/>
-            <a:ext cx="4762500" cy="495300"/>
-          </a:xfrm>
-          <a:prstGeom xmlns:a="http://schemas.openxmlformats.org/drawingml/2006/main" prst="rect">
-            <a:avLst/>
+              <a:defRPr sz="1575" b="1">
+                <a:solidFill>
+                  <a:srgbClr val="FFFFFF"/>
+                </a:solidFill>
+              </a:defRPr>
+            </a:pPr>
+            <a:r>
+              <a:rPr sz="1575" b="1">
+                <a:solidFill>
+                  <a:srgbClr val="FFFFFF"/>
+                </a:solidFill>
+                <a:latin typeface="Microsoft YaHei"/>
+                <a:ea typeface="Microsoft YaHei"/>
+                <a:cs typeface="Microsoft YaHei"/>
+              </a:rPr>
+              <a:t>C16｜限制</a:t>
+            </a:r>
+          </a:p>
+        </p:txBody>
+      </p:sp>
+      <p:sp>
+        <p:nvSpPr>
+          <p:cNvPr id="10" name="p13-body-1">
+            <a:extLst xmlns:a="http://schemas.openxmlformats.org/drawingml/2006/main">
+              <a:ext uri="{FF2B5EF4-FFF2-40B4-BE49-F238E27FC236}">
+                <a16:creationId xmlns:a16="http://schemas.microsoft.com/office/drawing/2014/main" id="{56507379-6764-4DB7-990D-DFEAF29B745A}"/>
+              </a:ext>
+            </a:extLst>
+          </p:cNvPr>
+          <p:cNvSpPr>
+            <a:spLocks xmlns:a="http://schemas.openxmlformats.org/drawingml/2006/main" noGrp="1"/>
+          </p:cNvSpPr>
+          <p:nvPr/>
+        </p:nvSpPr>
+        <p:spPr>
+          <a:xfrm xmlns:a="http://schemas.openxmlformats.org/drawingml/2006/main">
+            <a:off x="3105150" y="2505075"/>
+            <a:ext cx="8191500" cy="704850"/>
+          </a:xfrm>
+          <a:prstGeom xmlns:a="http://schemas.openxmlformats.org/drawingml/2006/main" prst="roundRect">
+            <a:avLst>
+              <a:gd name="adj" fmla="val 10811"/>
+            </a:avLst>
           </a:prstGeom>
           <a:solidFill xmlns:a="http://schemas.openxmlformats.org/drawingml/2006/main">
-            <a:srgbClr val="FFFFFF"/>
+            <a:srgbClr val="FAF0DD"/>
           </a:solidFill>
           <a:ln xmlns:a="http://schemas.openxmlformats.org/drawingml/2006/main" w="9525">
             <a:solidFill>
@@ -7790,162 +6425,107 @@
           <a:bodyPr xmlns:a="http://schemas.openxmlformats.org/drawingml/2006/main" lIns="76200" tIns="38100" rIns="76200" bIns="38100" anchor="ctr"/>
           <a:lstStyle xmlns:a="http://schemas.openxmlformats.org/drawingml/2006/main"/>
           <a:p xmlns:a="http://schemas.openxmlformats.org/drawingml/2006/main">
-            <a:pPr algn="l">
-              <a:defRPr sz="1500" b="0">
-                <a:solidFill>
-                  <a:srgbClr val="263746"/>
-                </a:solidFill>
-              </a:defRPr>
-            </a:pPr>
-            <a:r>
-              <a:rPr sz="1500" b="0">
-                <a:solidFill>
-                  <a:srgbClr val="263746"/>
-                </a:solidFill>
-                <a:latin typeface="Microsoft YaHei"/>
-                <a:ea typeface="Microsoft YaHei"/>
-                <a:cs typeface="Microsoft YaHei"/>
-              </a:rPr>
-              <a:t>1. 为什么状态是 caveat？</a:t>
-            </a:r>
-          </a:p>
-        </p:txBody>
-      </p:sp>
-      <p:sp>
-        <p:nvSpPr>
-          <p:cNvPr id="11" name="p13-q-1">
-            <a:extLst xmlns:a="http://schemas.openxmlformats.org/drawingml/2006/main">
-              <a:ext uri="{FF2B5EF4-FFF2-40B4-BE49-F238E27FC236}">
-                <a16:creationId xmlns:a16="http://schemas.microsoft.com/office/drawing/2014/main" id="{1CE91FB3-3012-4A11-9897-451DD4740FBF}"/>
-              </a:ext>
-            </a:extLst>
-          </p:cNvPr>
-          <p:cNvSpPr>
-            <a:spLocks xmlns:a="http://schemas.openxmlformats.org/drawingml/2006/main" noGrp="1"/>
-          </p:cNvSpPr>
-          <p:nvPr/>
-        </p:nvSpPr>
-        <p:spPr>
-          <a:xfrm xmlns:a="http://schemas.openxmlformats.org/drawingml/2006/main">
-            <a:off x="6896100" y="2619375"/>
-            <a:ext cx="4762500" cy="495300"/>
-          </a:xfrm>
-          <a:prstGeom xmlns:a="http://schemas.openxmlformats.org/drawingml/2006/main" prst="rect">
-            <a:avLst/>
+            <a:pPr algn="ctr">
+              <a:defRPr sz="1425" b="0">
+                <a:solidFill>
+                  <a:srgbClr val="263746"/>
+                </a:solidFill>
+              </a:defRPr>
+            </a:pPr>
+            <a:r>
+              <a:rPr sz="1425" b="0">
+                <a:solidFill>
+                  <a:srgbClr val="263746"/>
+                </a:solidFill>
+                <a:latin typeface="Microsoft YaHei"/>
+                <a:ea typeface="Microsoft YaHei"/>
+                <a:cs typeface="Microsoft YaHei"/>
+              </a:rPr>
+              <a:t>在 GPT2-small IOI 上，可解释 SAE 特征的控制性弱于监督字典，并出现 feature occlusion / over-splitting。</a:t>
+            </a:r>
+          </a:p>
+        </p:txBody>
+      </p:sp>
+      <p:sp>
+        <p:nvSpPr>
+          <p:cNvPr id="11" name="p13-head-2">
+            <a:extLst xmlns:a="http://schemas.openxmlformats.org/drawingml/2006/main">
+              <a:ext uri="{FF2B5EF4-FFF2-40B4-BE49-F238E27FC236}">
+                <a16:creationId xmlns:a16="http://schemas.microsoft.com/office/drawing/2014/main" id="{E1CB7C13-F00F-4FD5-B73C-58677DAE5163}"/>
+              </a:ext>
+            </a:extLst>
+          </p:cNvPr>
+          <p:cNvSpPr>
+            <a:spLocks xmlns:a="http://schemas.openxmlformats.org/drawingml/2006/main" noGrp="1"/>
+          </p:cNvSpPr>
+          <p:nvPr/>
+        </p:nvSpPr>
+        <p:spPr>
+          <a:xfrm xmlns:a="http://schemas.openxmlformats.org/drawingml/2006/main">
+            <a:off x="590550" y="3629025"/>
+            <a:ext cx="2381250" cy="704850"/>
+          </a:xfrm>
+          <a:prstGeom xmlns:a="http://schemas.openxmlformats.org/drawingml/2006/main" prst="roundRect">
+            <a:avLst>
+              <a:gd name="adj" fmla="val 10811"/>
+            </a:avLst>
           </a:prstGeom>
           <a:solidFill xmlns:a="http://schemas.openxmlformats.org/drawingml/2006/main">
-            <a:srgbClr val="FFFFFF"/>
+            <a:srgbClr val="C8161E"/>
           </a:solidFill>
-          <a:ln xmlns:a="http://schemas.openxmlformats.org/drawingml/2006/main" w="9525">
-            <a:solidFill>
-              <a:srgbClr val="D6DDE2"/>
-            </a:solidFill>
-            <a:prstDash val="solid"/>
-          </a:ln>
-        </p:spPr>
-        <p:txBody>
-          <a:bodyPr xmlns:a="http://schemas.openxmlformats.org/drawingml/2006/main" lIns="76200" tIns="38100" rIns="76200" bIns="38100" anchor="ctr"/>
-          <a:lstStyle xmlns:a="http://schemas.openxmlformats.org/drawingml/2006/main"/>
-          <a:p xmlns:a="http://schemas.openxmlformats.org/drawingml/2006/main">
-            <a:pPr algn="l">
-              <a:defRPr sz="1500" b="0">
-                <a:solidFill>
-                  <a:srgbClr val="263746"/>
-                </a:solidFill>
-              </a:defRPr>
-            </a:pPr>
-            <a:r>
-              <a:rPr sz="1500" b="0">
-                <a:solidFill>
-                  <a:srgbClr val="263746"/>
-                </a:solidFill>
-                <a:latin typeface="Microsoft YaHei"/>
-                <a:ea typeface="Microsoft YaHei"/>
-                <a:cs typeface="Microsoft YaHei"/>
-              </a:rPr>
-              <a:t>2. 原文没有实验时如何记录？</a:t>
-            </a:r>
-          </a:p>
-        </p:txBody>
-      </p:sp>
-      <p:sp>
-        <p:nvSpPr>
-          <p:cNvPr id="12" name="p13-q-2">
-            <a:extLst xmlns:a="http://schemas.openxmlformats.org/drawingml/2006/main">
-              <a:ext uri="{FF2B5EF4-FFF2-40B4-BE49-F238E27FC236}">
-                <a16:creationId xmlns:a16="http://schemas.microsoft.com/office/drawing/2014/main" id="{49F290E3-FA91-4784-9FFF-022B95F93D4D}"/>
-              </a:ext>
-            </a:extLst>
-          </p:cNvPr>
-          <p:cNvSpPr>
-            <a:spLocks xmlns:a="http://schemas.openxmlformats.org/drawingml/2006/main" noGrp="1"/>
-          </p:cNvSpPr>
-          <p:nvPr/>
-        </p:nvSpPr>
-        <p:spPr>
-          <a:xfrm xmlns:a="http://schemas.openxmlformats.org/drawingml/2006/main">
-            <a:off x="6896100" y="3295650"/>
-            <a:ext cx="4762500" cy="495300"/>
-          </a:xfrm>
-          <a:prstGeom xmlns:a="http://schemas.openxmlformats.org/drawingml/2006/main" prst="rect">
-            <a:avLst/>
-          </a:prstGeom>
-          <a:solidFill xmlns:a="http://schemas.openxmlformats.org/drawingml/2006/main">
-            <a:srgbClr val="FFFFFF"/>
-          </a:solidFill>
-          <a:ln xmlns:a="http://schemas.openxmlformats.org/drawingml/2006/main" w="9525">
-            <a:solidFill>
-              <a:srgbClr val="D6DDE2"/>
-            </a:solidFill>
-            <a:prstDash val="solid"/>
-          </a:ln>
-        </p:spPr>
-        <p:txBody>
-          <a:bodyPr xmlns:a="http://schemas.openxmlformats.org/drawingml/2006/main" lIns="76200" tIns="38100" rIns="76200" bIns="38100" anchor="ctr"/>
-          <a:lstStyle xmlns:a="http://schemas.openxmlformats.org/drawingml/2006/main"/>
-          <a:p xmlns:a="http://schemas.openxmlformats.org/drawingml/2006/main">
-            <a:pPr algn="l">
-              <a:defRPr sz="1500" b="0">
-                <a:solidFill>
-                  <a:srgbClr val="263746"/>
-                </a:solidFill>
-              </a:defRPr>
-            </a:pPr>
-            <a:r>
-              <a:rPr sz="1500" b="0">
-                <a:solidFill>
-                  <a:srgbClr val="263746"/>
-                </a:solidFill>
-                <a:latin typeface="Microsoft YaHei"/>
-                <a:ea typeface="Microsoft YaHei"/>
-                <a:cs typeface="Microsoft YaHei"/>
-              </a:rPr>
-              <a:t>3. AI 的 50% 断言进哪一栏？</a:t>
-            </a:r>
-          </a:p>
-        </p:txBody>
-      </p:sp>
-      <p:sp>
-        <p:nvSpPr>
-          <p:cNvPr id="13" name="p13-q-3">
-            <a:extLst xmlns:a="http://schemas.openxmlformats.org/drawingml/2006/main">
-              <a:ext uri="{FF2B5EF4-FFF2-40B4-BE49-F238E27FC236}">
-                <a16:creationId xmlns:a16="http://schemas.microsoft.com/office/drawing/2014/main" id="{6D772204-E55B-41A7-A656-5DA3F08D4F6F}"/>
-              </a:ext>
-            </a:extLst>
-          </p:cNvPr>
-          <p:cNvSpPr>
-            <a:spLocks xmlns:a="http://schemas.openxmlformats.org/drawingml/2006/main" noGrp="1"/>
-          </p:cNvSpPr>
-          <p:nvPr/>
-        </p:nvSpPr>
-        <p:spPr>
-          <a:xfrm xmlns:a="http://schemas.openxmlformats.org/drawingml/2006/main">
-            <a:off x="6896100" y="3971925"/>
-            <a:ext cx="4762500" cy="495300"/>
-          </a:xfrm>
-          <a:prstGeom xmlns:a="http://schemas.openxmlformats.org/drawingml/2006/main" prst="rect">
-            <a:avLst/>
+          <a:ln xmlns:a="http://schemas.openxmlformats.org/drawingml/2006/main" w="0">
+            <a:noFill/>
+            <a:prstDash val="solid"/>
+          </a:ln>
+        </p:spPr>
+        <p:txBody>
+          <a:bodyPr xmlns:a="http://schemas.openxmlformats.org/drawingml/2006/main" lIns="76200" tIns="38100" rIns="76200" bIns="38100" anchor="ctr"/>
+          <a:lstStyle xmlns:a="http://schemas.openxmlformats.org/drawingml/2006/main"/>
+          <a:p xmlns:a="http://schemas.openxmlformats.org/drawingml/2006/main">
+            <a:pPr algn="ctr">
+              <a:defRPr sz="1575" b="1">
+                <a:solidFill>
+                  <a:srgbClr val="FFFFFF"/>
+                </a:solidFill>
+              </a:defRPr>
+            </a:pPr>
+            <a:r>
+              <a:rPr sz="1575" b="1">
+                <a:solidFill>
+                  <a:srgbClr val="FFFFFF"/>
+                </a:solidFill>
+                <a:latin typeface="Microsoft YaHei"/>
+                <a:ea typeface="Microsoft YaHei"/>
+                <a:cs typeface="Microsoft YaHei"/>
+              </a:rPr>
+              <a:t>C31｜效度威胁</a:t>
+            </a:r>
+          </a:p>
+        </p:txBody>
+      </p:sp>
+      <p:sp>
+        <p:nvSpPr>
+          <p:cNvPr id="12" name="p13-body-2">
+            <a:extLst xmlns:a="http://schemas.openxmlformats.org/drawingml/2006/main">
+              <a:ext uri="{FF2B5EF4-FFF2-40B4-BE49-F238E27FC236}">
+                <a16:creationId xmlns:a16="http://schemas.microsoft.com/office/drawing/2014/main" id="{F2492E7B-F386-4D3D-96B9-A44A72297776}"/>
+              </a:ext>
+            </a:extLst>
+          </p:cNvPr>
+          <p:cNvSpPr>
+            <a:spLocks xmlns:a="http://schemas.openxmlformats.org/drawingml/2006/main" noGrp="1"/>
+          </p:cNvSpPr>
+          <p:nvPr/>
+        </p:nvSpPr>
+        <p:spPr>
+          <a:xfrm xmlns:a="http://schemas.openxmlformats.org/drawingml/2006/main">
+            <a:off x="3105150" y="3629025"/>
+            <a:ext cx="8191500" cy="704850"/>
+          </a:xfrm>
+          <a:prstGeom xmlns:a="http://schemas.openxmlformats.org/drawingml/2006/main" prst="roundRect">
+            <a:avLst>
+              <a:gd name="adj" fmla="val 10811"/>
+            </a:avLst>
           </a:prstGeom>
           <a:solidFill xmlns:a="http://schemas.openxmlformats.org/drawingml/2006/main">
             <a:srgbClr val="F8E9EA"/>
@@ -7961,68 +6541,74 @@
           <a:bodyPr xmlns:a="http://schemas.openxmlformats.org/drawingml/2006/main" lIns="76200" tIns="38100" rIns="76200" bIns="38100" anchor="ctr"/>
           <a:lstStyle xmlns:a="http://schemas.openxmlformats.org/drawingml/2006/main"/>
           <a:p xmlns:a="http://schemas.openxmlformats.org/drawingml/2006/main">
-            <a:pPr algn="l">
-              <a:defRPr sz="1500" b="1">
-                <a:solidFill>
-                  <a:srgbClr val="263746"/>
-                </a:solidFill>
-              </a:defRPr>
-            </a:pPr>
-            <a:r>
-              <a:rPr sz="1500" b="1">
-                <a:solidFill>
-                  <a:srgbClr val="263746"/>
-                </a:solidFill>
-                <a:latin typeface="Microsoft YaHei"/>
-                <a:ea typeface="Microsoft YaHei"/>
-                <a:cs typeface="Microsoft YaHei"/>
-              </a:rPr>
-              <a:t>4. 为什么不能单独支撑 stable？</a:t>
-            </a:r>
-          </a:p>
-        </p:txBody>
-      </p:sp>
-      <p:sp>
-        <p:nvSpPr>
-          <p:cNvPr id="14" name="p13-fail">
-            <a:extLst xmlns:a="http://schemas.openxmlformats.org/drawingml/2006/main">
-              <a:ext uri="{FF2B5EF4-FFF2-40B4-BE49-F238E27FC236}">
-                <a16:creationId xmlns:a16="http://schemas.microsoft.com/office/drawing/2014/main" id="{DD076709-BE5E-4FFD-86EA-0E9141BE4899}"/>
-              </a:ext>
-            </a:extLst>
-          </p:cNvPr>
-          <p:cNvSpPr>
-            <a:spLocks xmlns:a="http://schemas.openxmlformats.org/drawingml/2006/main" noGrp="1"/>
-          </p:cNvSpPr>
-          <p:nvPr/>
-        </p:nvSpPr>
-        <p:spPr>
-          <a:xfrm xmlns:a="http://schemas.openxmlformats.org/drawingml/2006/main">
-            <a:off x="6953250" y="4838700"/>
-            <a:ext cx="4629150" cy="457200"/>
-          </a:xfrm>
-          <a:prstGeom xmlns:a="http://schemas.openxmlformats.org/drawingml/2006/main" prst="rect">
-            <a:avLst/>
-          </a:prstGeom>
-          <a:noFill xmlns:a="http://schemas.openxmlformats.org/drawingml/2006/main"/>
-          <a:ln xmlns:a="http://schemas.openxmlformats.org/drawingml/2006/main" w="0">
-            <a:noFill/>
-            <a:prstDash val="solid"/>
-          </a:ln>
-        </p:spPr>
-        <p:txBody>
-          <a:bodyPr xmlns:a="http://schemas.openxmlformats.org/drawingml/2006/main" lIns="76200" tIns="38100" rIns="76200" bIns="38100" anchor="ctr"/>
-          <a:lstStyle xmlns:a="http://schemas.openxmlformats.org/drawingml/2006/main"/>
-          <a:p xmlns:a="http://schemas.openxmlformats.org/drawingml/2006/main">
             <a:pPr algn="ctr">
-              <a:defRPr sz="1500" b="1">
+              <a:defRPr sz="1425" b="0">
+                <a:solidFill>
+                  <a:srgbClr val="263746"/>
+                </a:solidFill>
+              </a:defRPr>
+            </a:pPr>
+            <a:r>
+              <a:rPr sz="1425" b="0">
+                <a:solidFill>
+                  <a:srgbClr val="263746"/>
+                </a:solidFill>
+                <a:latin typeface="Microsoft YaHei"/>
+                <a:ea typeface="Microsoft YaHei"/>
+                <a:cs typeface="Microsoft YaHei"/>
+              </a:rPr>
+              <a:t>subspace patching 可能沿 dormant pathway 产生成功效果；行为改变本身不自动证明因果忠实。</a:t>
+            </a:r>
+          </a:p>
+        </p:txBody>
+      </p:sp>
+      <p:sp>
+        <p:nvSpPr>
+          <p:cNvPr id="13" name="p13-judgment">
+            <a:extLst xmlns:a="http://schemas.openxmlformats.org/drawingml/2006/main">
+              <a:ext uri="{FF2B5EF4-FFF2-40B4-BE49-F238E27FC236}">
+                <a16:creationId xmlns:a16="http://schemas.microsoft.com/office/drawing/2014/main" id="{18A63F95-61EC-4431-8D0B-90C44E24EE08}"/>
+              </a:ext>
+            </a:extLst>
+          </p:cNvPr>
+          <p:cNvSpPr>
+            <a:spLocks xmlns:a="http://schemas.openxmlformats.org/drawingml/2006/main" noGrp="1"/>
+          </p:cNvSpPr>
+          <p:nvPr/>
+        </p:nvSpPr>
+        <p:spPr>
+          <a:xfrm xmlns:a="http://schemas.openxmlformats.org/drawingml/2006/main">
+            <a:off x="990600" y="4857750"/>
+            <a:ext cx="10210800" cy="685800"/>
+          </a:xfrm>
+          <a:prstGeom xmlns:a="http://schemas.openxmlformats.org/drawingml/2006/main" prst="roundRect">
+            <a:avLst>
+              <a:gd name="adj" fmla="val 11111"/>
+            </a:avLst>
+          </a:prstGeom>
+          <a:solidFill xmlns:a="http://schemas.openxmlformats.org/drawingml/2006/main">
+            <a:srgbClr val="F8E9EA"/>
+          </a:solidFill>
+          <a:ln xmlns:a="http://schemas.openxmlformats.org/drawingml/2006/main" w="9525">
+            <a:solidFill>
+              <a:srgbClr val="C8161E"/>
+            </a:solidFill>
+            <a:prstDash val="solid"/>
+          </a:ln>
+        </p:spPr>
+        <p:txBody>
+          <a:bodyPr xmlns:a="http://schemas.openxmlformats.org/drawingml/2006/main" lIns="76200" tIns="38100" rIns="76200" bIns="38100" anchor="ctr"/>
+          <a:lstStyle xmlns:a="http://schemas.openxmlformats.org/drawingml/2006/main"/>
+          <a:p xmlns:a="http://schemas.openxmlformats.org/drawingml/2006/main">
+            <a:pPr algn="ctr">
+              <a:defRPr sz="1725" b="1">
                 <a:solidFill>
                   <a:srgbClr val="C8161E"/>
                 </a:solidFill>
               </a:defRPr>
             </a:pPr>
             <a:r>
-              <a:rPr sz="1500" b="1">
+              <a:rPr sz="1725" b="1">
                 <a:solidFill>
                   <a:srgbClr val="C8161E"/>
                 </a:solidFill>
@@ -8030,7 +6616,7 @@
                 <a:ea typeface="Microsoft YaHei"/>
                 <a:cs typeface="Microsoft YaHei"/>
               </a:rPr>
-              <a:t>失败演示：AI 摘要直接进入“作者主张”栏</a:t>
+              <a:t>人工判断｜review：足以进入 L5 证据矩阵与 L9 baseline 设计；不足以把“SAE 因果忠实”标记为 stable。</a:t>
             </a:r>
           </a:p>
         </p:txBody>
@@ -8132,7 +6718,7 @@
           <p:cNvPr id="6" name="p14-n-0">
             <a:extLst xmlns:a="http://schemas.openxmlformats.org/drawingml/2006/main">
               <a:ext uri="{FF2B5EF4-FFF2-40B4-BE49-F238E27FC236}">
-                <a16:creationId xmlns:a16="http://schemas.microsoft.com/office/drawing/2014/main" id="{BD2EC784-6E87-416C-82CD-343685018400}"/>
+                <a16:creationId xmlns:a16="http://schemas.microsoft.com/office/drawing/2014/main" id="{3CAD8579-AB83-4573-9CC5-0F64600CE655}"/>
               </a:ext>
             </a:extLst>
           </p:cNvPr>
@@ -8189,7 +6775,7 @@
           <p:cNvPr id="7" name="p14-label-0">
             <a:extLst xmlns:a="http://schemas.openxmlformats.org/drawingml/2006/main">
               <a:ext uri="{FF2B5EF4-FFF2-40B4-BE49-F238E27FC236}">
-                <a16:creationId xmlns:a16="http://schemas.microsoft.com/office/drawing/2014/main" id="{2CEC4043-0D71-4851-9840-30E9AB39CC6F}"/>
+                <a16:creationId xmlns:a16="http://schemas.microsoft.com/office/drawing/2014/main" id="{99D7D67C-C7B7-4913-B731-17B53177EBBB}"/>
               </a:ext>
             </a:extLst>
           </p:cNvPr>
@@ -8242,7 +6828,7 @@
           <p:cNvPr id="8" name="p14-detail-0">
             <a:extLst xmlns:a="http://schemas.openxmlformats.org/drawingml/2006/main">
               <a:ext uri="{FF2B5EF4-FFF2-40B4-BE49-F238E27FC236}">
-                <a16:creationId xmlns:a16="http://schemas.microsoft.com/office/drawing/2014/main" id="{7035203E-C9BB-4537-9165-25AFEA91E8F1}"/>
+                <a16:creationId xmlns:a16="http://schemas.microsoft.com/office/drawing/2014/main" id="{FC38FCF0-6C36-4052-980E-EC2432B0D8B9}"/>
               </a:ext>
             </a:extLst>
           </p:cNvPr>
@@ -8297,7 +6883,7 @@
           <p:cNvPr id="9" name="p14-n-1">
             <a:extLst xmlns:a="http://schemas.openxmlformats.org/drawingml/2006/main">
               <a:ext uri="{FF2B5EF4-FFF2-40B4-BE49-F238E27FC236}">
-                <a16:creationId xmlns:a16="http://schemas.microsoft.com/office/drawing/2014/main" id="{4CB368F4-C792-4048-80A6-67919E11AD75}"/>
+                <a16:creationId xmlns:a16="http://schemas.microsoft.com/office/drawing/2014/main" id="{146C4E01-53B9-4293-BE93-4736493E6992}"/>
               </a:ext>
             </a:extLst>
           </p:cNvPr>
@@ -8354,7 +6940,7 @@
           <p:cNvPr id="10" name="p14-label-1">
             <a:extLst xmlns:a="http://schemas.openxmlformats.org/drawingml/2006/main">
               <a:ext uri="{FF2B5EF4-FFF2-40B4-BE49-F238E27FC236}">
-                <a16:creationId xmlns:a16="http://schemas.microsoft.com/office/drawing/2014/main" id="{2746D1BE-A449-494D-A58F-B7684FD45BED}"/>
+                <a16:creationId xmlns:a16="http://schemas.microsoft.com/office/drawing/2014/main" id="{82A272FF-5EAD-4FFB-BD5C-40BC87E459BA}"/>
               </a:ext>
             </a:extLst>
           </p:cNvPr>
@@ -8407,7 +6993,7 @@
           <p:cNvPr id="11" name="p14-detail-1">
             <a:extLst xmlns:a="http://schemas.openxmlformats.org/drawingml/2006/main">
               <a:ext uri="{FF2B5EF4-FFF2-40B4-BE49-F238E27FC236}">
-                <a16:creationId xmlns:a16="http://schemas.microsoft.com/office/drawing/2014/main" id="{73C57751-5129-4B7C-A28F-7BFD8DC69A55}"/>
+                <a16:creationId xmlns:a16="http://schemas.microsoft.com/office/drawing/2014/main" id="{3C38B714-14C2-4437-96A7-5480A5386879}"/>
               </a:ext>
             </a:extLst>
           </p:cNvPr>
@@ -8462,7 +7048,7 @@
           <p:cNvPr id="12" name="p14-n-2">
             <a:extLst xmlns:a="http://schemas.openxmlformats.org/drawingml/2006/main">
               <a:ext uri="{FF2B5EF4-FFF2-40B4-BE49-F238E27FC236}">
-                <a16:creationId xmlns:a16="http://schemas.microsoft.com/office/drawing/2014/main" id="{ECBCD729-2106-4E28-A18E-42EF0A5C4B81}"/>
+                <a16:creationId xmlns:a16="http://schemas.microsoft.com/office/drawing/2014/main" id="{CE0A368D-8B24-4D9C-8BF5-D54A801CC814}"/>
               </a:ext>
             </a:extLst>
           </p:cNvPr>
@@ -8519,7 +7105,7 @@
           <p:cNvPr id="13" name="p14-label-2">
             <a:extLst xmlns:a="http://schemas.openxmlformats.org/drawingml/2006/main">
               <a:ext uri="{FF2B5EF4-FFF2-40B4-BE49-F238E27FC236}">
-                <a16:creationId xmlns:a16="http://schemas.microsoft.com/office/drawing/2014/main" id="{4AA444D4-CD22-433D-8E16-32C4A689C807}"/>
+                <a16:creationId xmlns:a16="http://schemas.microsoft.com/office/drawing/2014/main" id="{D44B8CCA-761E-4314-BB9A-48BB6C5A15A9}"/>
               </a:ext>
             </a:extLst>
           </p:cNvPr>
@@ -8572,7 +7158,7 @@
           <p:cNvPr id="14" name="p14-detail-2">
             <a:extLst xmlns:a="http://schemas.openxmlformats.org/drawingml/2006/main">
               <a:ext uri="{FF2B5EF4-FFF2-40B4-BE49-F238E27FC236}">
-                <a16:creationId xmlns:a16="http://schemas.microsoft.com/office/drawing/2014/main" id="{C10BD4D7-FC8F-4A5B-8206-78A777B261F4}"/>
+                <a16:creationId xmlns:a16="http://schemas.microsoft.com/office/drawing/2014/main" id="{9A1C4D44-13C7-4681-BB2D-7DE4649EC1E6}"/>
               </a:ext>
             </a:extLst>
           </p:cNvPr>
@@ -8627,7 +7213,7 @@
           <p:cNvPr id="15" name="p14-n-3">
             <a:extLst xmlns:a="http://schemas.openxmlformats.org/drawingml/2006/main">
               <a:ext uri="{FF2B5EF4-FFF2-40B4-BE49-F238E27FC236}">
-                <a16:creationId xmlns:a16="http://schemas.microsoft.com/office/drawing/2014/main" id="{7FD9CFD5-8C13-4707-8D19-666E9E1A9CFA}"/>
+                <a16:creationId xmlns:a16="http://schemas.microsoft.com/office/drawing/2014/main" id="{BD90ED40-B1EB-4548-891C-BE8E23C251EE}"/>
               </a:ext>
             </a:extLst>
           </p:cNvPr>
@@ -8684,7 +7270,7 @@
           <p:cNvPr id="16" name="p14-label-3">
             <a:extLst xmlns:a="http://schemas.openxmlformats.org/drawingml/2006/main">
               <a:ext uri="{FF2B5EF4-FFF2-40B4-BE49-F238E27FC236}">
-                <a16:creationId xmlns:a16="http://schemas.microsoft.com/office/drawing/2014/main" id="{73E7366A-E3FE-4FA2-9541-D10117CBF927}"/>
+                <a16:creationId xmlns:a16="http://schemas.microsoft.com/office/drawing/2014/main" id="{32A150B3-CFB4-4ECD-92AF-EF1816D00564}"/>
               </a:ext>
             </a:extLst>
           </p:cNvPr>
@@ -8737,7 +7323,7 @@
           <p:cNvPr id="17" name="p14-detail-3">
             <a:extLst xmlns:a="http://schemas.openxmlformats.org/drawingml/2006/main">
               <a:ext uri="{FF2B5EF4-FFF2-40B4-BE49-F238E27FC236}">
-                <a16:creationId xmlns:a16="http://schemas.microsoft.com/office/drawing/2014/main" id="{78D9F7C3-0637-471C-9601-3CBCACA9304C}"/>
+                <a16:creationId xmlns:a16="http://schemas.microsoft.com/office/drawing/2014/main" id="{7E53ADB9-26AD-4609-A885-6318622A7B83}"/>
               </a:ext>
             </a:extLst>
           </p:cNvPr>
@@ -8792,7 +7378,7 @@
           <p:cNvPr id="18" name="p14-n-4">
             <a:extLst xmlns:a="http://schemas.openxmlformats.org/drawingml/2006/main">
               <a:ext uri="{FF2B5EF4-FFF2-40B4-BE49-F238E27FC236}">
-                <a16:creationId xmlns:a16="http://schemas.microsoft.com/office/drawing/2014/main" id="{9D578A8B-C867-4A3C-98DC-6721BD5609C6}"/>
+                <a16:creationId xmlns:a16="http://schemas.microsoft.com/office/drawing/2014/main" id="{50F9F5CD-B8A9-4044-B048-E4F8E66AFFE0}"/>
               </a:ext>
             </a:extLst>
           </p:cNvPr>
@@ -8849,7 +7435,7 @@
           <p:cNvPr id="19" name="p14-label-4">
             <a:extLst xmlns:a="http://schemas.openxmlformats.org/drawingml/2006/main">
               <a:ext uri="{FF2B5EF4-FFF2-40B4-BE49-F238E27FC236}">
-                <a16:creationId xmlns:a16="http://schemas.microsoft.com/office/drawing/2014/main" id="{EEB59D09-8DB5-4146-9B93-A964895B97AD}"/>
+                <a16:creationId xmlns:a16="http://schemas.microsoft.com/office/drawing/2014/main" id="{455A7BCA-23F2-481C-B2D2-72B3A8CB85A4}"/>
               </a:ext>
             </a:extLst>
           </p:cNvPr>
@@ -8902,7 +7488,7 @@
           <p:cNvPr id="20" name="p14-detail-4">
             <a:extLst xmlns:a="http://schemas.openxmlformats.org/drawingml/2006/main">
               <a:ext uri="{FF2B5EF4-FFF2-40B4-BE49-F238E27FC236}">
-                <a16:creationId xmlns:a16="http://schemas.microsoft.com/office/drawing/2014/main" id="{4305F5A2-7B39-4042-98AE-28F0A731A155}"/>
+                <a16:creationId xmlns:a16="http://schemas.microsoft.com/office/drawing/2014/main" id="{D9337735-31B0-457D-86BE-47B1D7627D54}"/>
               </a:ext>
             </a:extLst>
           </p:cNvPr>
@@ -8957,7 +7543,7 @@
           <p:cNvPr id="21" name="p14-n-5">
             <a:extLst xmlns:a="http://schemas.openxmlformats.org/drawingml/2006/main">
               <a:ext uri="{FF2B5EF4-FFF2-40B4-BE49-F238E27FC236}">
-                <a16:creationId xmlns:a16="http://schemas.microsoft.com/office/drawing/2014/main" id="{D65530F5-D7CA-44AF-AAB8-871734B8EDE7}"/>
+                <a16:creationId xmlns:a16="http://schemas.microsoft.com/office/drawing/2014/main" id="{B619CAC2-290E-4D51-9D6F-E30254DA9CA8}"/>
               </a:ext>
             </a:extLst>
           </p:cNvPr>
@@ -9014,7 +7600,7 @@
           <p:cNvPr id="22" name="p14-label-5">
             <a:extLst xmlns:a="http://schemas.openxmlformats.org/drawingml/2006/main">
               <a:ext uri="{FF2B5EF4-FFF2-40B4-BE49-F238E27FC236}">
-                <a16:creationId xmlns:a16="http://schemas.microsoft.com/office/drawing/2014/main" id="{572277C1-AACE-4CFE-9DD8-031984111A50}"/>
+                <a16:creationId xmlns:a16="http://schemas.microsoft.com/office/drawing/2014/main" id="{3AAA9192-4048-4957-9FCA-7AAA3D3B307B}"/>
               </a:ext>
             </a:extLst>
           </p:cNvPr>
@@ -9067,7 +7653,7 @@
           <p:cNvPr id="23" name="p14-detail-5">
             <a:extLst xmlns:a="http://schemas.openxmlformats.org/drawingml/2006/main">
               <a:ext uri="{FF2B5EF4-FFF2-40B4-BE49-F238E27FC236}">
-                <a16:creationId xmlns:a16="http://schemas.microsoft.com/office/drawing/2014/main" id="{94393A4F-99BB-46D1-8610-6CFCCB8D9E4F}"/>
+                <a16:creationId xmlns:a16="http://schemas.microsoft.com/office/drawing/2014/main" id="{4F66FB59-2190-4CAF-876C-09126367372A}"/>
               </a:ext>
             </a:extLst>
           </p:cNvPr>
@@ -9122,7 +7708,7 @@
           <p:cNvPr id="24" name="p14-n-6">
             <a:extLst xmlns:a="http://schemas.openxmlformats.org/drawingml/2006/main">
               <a:ext uri="{FF2B5EF4-FFF2-40B4-BE49-F238E27FC236}">
-                <a16:creationId xmlns:a16="http://schemas.microsoft.com/office/drawing/2014/main" id="{C466FAD1-9EB7-4C2C-9C4B-0C3292E511D7}"/>
+                <a16:creationId xmlns:a16="http://schemas.microsoft.com/office/drawing/2014/main" id="{4046DB29-F878-421C-AB72-CF85DF811B08}"/>
               </a:ext>
             </a:extLst>
           </p:cNvPr>
@@ -9179,7 +7765,7 @@
           <p:cNvPr id="25" name="p14-label-6">
             <a:extLst xmlns:a="http://schemas.openxmlformats.org/drawingml/2006/main">
               <a:ext uri="{FF2B5EF4-FFF2-40B4-BE49-F238E27FC236}">
-                <a16:creationId xmlns:a16="http://schemas.microsoft.com/office/drawing/2014/main" id="{ED6D24E6-C91E-4E57-8CE4-3EDB1738C46E}"/>
+                <a16:creationId xmlns:a16="http://schemas.microsoft.com/office/drawing/2014/main" id="{A656CFBD-3935-493C-9E8F-F796BA613F65}"/>
               </a:ext>
             </a:extLst>
           </p:cNvPr>
@@ -9232,7 +7818,7 @@
           <p:cNvPr id="26" name="p14-detail-6">
             <a:extLst xmlns:a="http://schemas.openxmlformats.org/drawingml/2006/main">
               <a:ext uri="{FF2B5EF4-FFF2-40B4-BE49-F238E27FC236}">
-                <a16:creationId xmlns:a16="http://schemas.microsoft.com/office/drawing/2014/main" id="{1540806D-A9EF-46C5-8E84-28767A8234AF}"/>
+                <a16:creationId xmlns:a16="http://schemas.microsoft.com/office/drawing/2014/main" id="{BF290535-EC06-4250-A7C3-A550D013E31E}"/>
               </a:ext>
             </a:extLst>
           </p:cNvPr>
@@ -9287,7 +7873,7 @@
           <p:cNvPr id="27" name="p14-backup">
             <a:extLst xmlns:a="http://schemas.openxmlformats.org/drawingml/2006/main">
               <a:ext uri="{FF2B5EF4-FFF2-40B4-BE49-F238E27FC236}">
-                <a16:creationId xmlns:a16="http://schemas.microsoft.com/office/drawing/2014/main" id="{F3A94861-9F42-44E1-9053-49E8035F71FD}"/>
+                <a16:creationId xmlns:a16="http://schemas.microsoft.com/office/drawing/2014/main" id="{76F5CF62-A7FA-4C40-B894-3B6D3583A58B}"/>
               </a:ext>
             </a:extLst>
           </p:cNvPr>
@@ -9434,7 +8020,7 @@
           <p:cNvPr id="6" name="p15-time">
             <a:extLst xmlns:a="http://schemas.openxmlformats.org/drawingml/2006/main">
               <a:ext uri="{FF2B5EF4-FFF2-40B4-BE49-F238E27FC236}">
-                <a16:creationId xmlns:a16="http://schemas.microsoft.com/office/drawing/2014/main" id="{E13FFC06-8692-4D32-BC05-FC002F0BF20B}"/>
+                <a16:creationId xmlns:a16="http://schemas.microsoft.com/office/drawing/2014/main" id="{4C1B2757-18B3-46A6-857E-965E749A7FE3}"/>
               </a:ext>
             </a:extLst>
           </p:cNvPr>
@@ -9491,7 +8077,7 @@
           <p:cNvPr id="7" name="p15-card-title">
             <a:extLst xmlns:a="http://schemas.openxmlformats.org/drawingml/2006/main">
               <a:ext uri="{FF2B5EF4-FFF2-40B4-BE49-F238E27FC236}">
-                <a16:creationId xmlns:a16="http://schemas.microsoft.com/office/drawing/2014/main" id="{E3D65D85-710C-4E1D-85DF-A9E706FE5393}"/>
+                <a16:creationId xmlns:a16="http://schemas.microsoft.com/office/drawing/2014/main" id="{3AC625CF-DB88-44B6-AAB3-6667D6A3CBFF}"/>
               </a:ext>
             </a:extLst>
           </p:cNvPr>
@@ -9544,7 +8130,7 @@
           <p:cNvPr id="8" name="p15-card">
             <a:extLst xmlns:a="http://schemas.openxmlformats.org/drawingml/2006/main">
               <a:ext uri="{FF2B5EF4-FFF2-40B4-BE49-F238E27FC236}">
-                <a16:creationId xmlns:a16="http://schemas.microsoft.com/office/drawing/2014/main" id="{B2303229-03E1-4055-8850-06C465E95C53}"/>
+                <a16:creationId xmlns:a16="http://schemas.microsoft.com/office/drawing/2014/main" id="{9932285B-8A2B-45CC-AFBC-F7B8E3321585}"/>
               </a:ext>
             </a:extLst>
           </p:cNvPr>
@@ -9797,7 +8383,7 @@
           <p:cNvPr id="9" name="p15-audit-title">
             <a:extLst xmlns:a="http://schemas.openxmlformats.org/drawingml/2006/main">
               <a:ext uri="{FF2B5EF4-FFF2-40B4-BE49-F238E27FC236}">
-                <a16:creationId xmlns:a16="http://schemas.microsoft.com/office/drawing/2014/main" id="{3592B157-E474-4046-BBC0-809ACE2878E3}"/>
+                <a16:creationId xmlns:a16="http://schemas.microsoft.com/office/drawing/2014/main" id="{61126D9B-89E8-4036-9EBD-A85E28135F35}"/>
               </a:ext>
             </a:extLst>
           </p:cNvPr>
@@ -9850,7 +8436,7 @@
           <p:cNvPr id="10" name="p15-audit">
             <a:extLst xmlns:a="http://schemas.openxmlformats.org/drawingml/2006/main">
               <a:ext uri="{FF2B5EF4-FFF2-40B4-BE49-F238E27FC236}">
-                <a16:creationId xmlns:a16="http://schemas.microsoft.com/office/drawing/2014/main" id="{A51093BA-657C-4F40-89C8-9EB3945E1229}"/>
+                <a16:creationId xmlns:a16="http://schemas.microsoft.com/office/drawing/2014/main" id="{E589A04D-08D5-4BBF-92F7-862E9B970832}"/>
               </a:ext>
             </a:extLst>
           </p:cNvPr>
@@ -10027,7 +8613,7 @@
           <p:cNvPr id="11" name="p15-min">
             <a:extLst xmlns:a="http://schemas.openxmlformats.org/drawingml/2006/main">
               <a:ext uri="{FF2B5EF4-FFF2-40B4-BE49-F238E27FC236}">
-                <a16:creationId xmlns:a16="http://schemas.microsoft.com/office/drawing/2014/main" id="{70526058-FD60-4B18-8991-47E2EBCF38E8}"/>
+                <a16:creationId xmlns:a16="http://schemas.microsoft.com/office/drawing/2014/main" id="{43794116-19F9-4A9F-8B3E-5B9EC5971C06}"/>
               </a:ext>
             </a:extLst>
           </p:cNvPr>
@@ -10174,7 +8760,7 @@
           <p:cNvPr id="6" name="p16-n-0">
             <a:extLst xmlns:a="http://schemas.openxmlformats.org/drawingml/2006/main">
               <a:ext uri="{FF2B5EF4-FFF2-40B4-BE49-F238E27FC236}">
-                <a16:creationId xmlns:a16="http://schemas.microsoft.com/office/drawing/2014/main" id="{0CA8F851-E8F9-4BCA-A7A1-A2CE4F5DD943}"/>
+                <a16:creationId xmlns:a16="http://schemas.microsoft.com/office/drawing/2014/main" id="{3F203DE8-B27A-48F8-8504-CE8E99900C33}"/>
               </a:ext>
             </a:extLst>
           </p:cNvPr>
@@ -10231,7 +8817,7 @@
           <p:cNvPr id="7" name="p16-q-0">
             <a:extLst xmlns:a="http://schemas.openxmlformats.org/drawingml/2006/main">
               <a:ext uri="{FF2B5EF4-FFF2-40B4-BE49-F238E27FC236}">
-                <a16:creationId xmlns:a16="http://schemas.microsoft.com/office/drawing/2014/main" id="{DAE282F5-24ED-4934-87EC-C31DF623F3D4}"/>
+                <a16:creationId xmlns:a16="http://schemas.microsoft.com/office/drawing/2014/main" id="{95850ADD-9A37-4D5A-8A81-37E310140EC0}"/>
               </a:ext>
             </a:extLst>
           </p:cNvPr>
@@ -10284,7 +8870,7 @@
           <p:cNvPr id="8" name="p16-d-0">
             <a:extLst xmlns:a="http://schemas.openxmlformats.org/drawingml/2006/main">
               <a:ext uri="{FF2B5EF4-FFF2-40B4-BE49-F238E27FC236}">
-                <a16:creationId xmlns:a16="http://schemas.microsoft.com/office/drawing/2014/main" id="{DA38064C-F4DB-46CE-BB2E-20629D6C8D23}"/>
+                <a16:creationId xmlns:a16="http://schemas.microsoft.com/office/drawing/2014/main" id="{45BA6D91-BA73-4317-80F8-8C643CAD15D8}"/>
               </a:ext>
             </a:extLst>
           </p:cNvPr>
@@ -10339,7 +8925,7 @@
           <p:cNvPr id="9" name="p16-n-1">
             <a:extLst xmlns:a="http://schemas.openxmlformats.org/drawingml/2006/main">
               <a:ext uri="{FF2B5EF4-FFF2-40B4-BE49-F238E27FC236}">
-                <a16:creationId xmlns:a16="http://schemas.microsoft.com/office/drawing/2014/main" id="{9CE812F9-FB1F-49B2-A075-12D2526DB607}"/>
+                <a16:creationId xmlns:a16="http://schemas.microsoft.com/office/drawing/2014/main" id="{26FE4DDC-F692-4CC8-9E69-98BF29D76E43}"/>
               </a:ext>
             </a:extLst>
           </p:cNvPr>
@@ -10396,7 +8982,7 @@
           <p:cNvPr id="10" name="p16-q-1">
             <a:extLst xmlns:a="http://schemas.openxmlformats.org/drawingml/2006/main">
               <a:ext uri="{FF2B5EF4-FFF2-40B4-BE49-F238E27FC236}">
-                <a16:creationId xmlns:a16="http://schemas.microsoft.com/office/drawing/2014/main" id="{063460CC-8632-4F27-9628-650ABF425156}"/>
+                <a16:creationId xmlns:a16="http://schemas.microsoft.com/office/drawing/2014/main" id="{9DCD49C4-13EF-40F3-AB70-AC0147932598}"/>
               </a:ext>
             </a:extLst>
           </p:cNvPr>
@@ -10449,7 +9035,7 @@
           <p:cNvPr id="11" name="p16-d-1">
             <a:extLst xmlns:a="http://schemas.openxmlformats.org/drawingml/2006/main">
               <a:ext uri="{FF2B5EF4-FFF2-40B4-BE49-F238E27FC236}">
-                <a16:creationId xmlns:a16="http://schemas.microsoft.com/office/drawing/2014/main" id="{C9633EB9-454A-40D2-8023-E3708A3E073D}"/>
+                <a16:creationId xmlns:a16="http://schemas.microsoft.com/office/drawing/2014/main" id="{7E4BF78C-86D0-449F-8F14-27E6F74DEEF1}"/>
               </a:ext>
             </a:extLst>
           </p:cNvPr>
@@ -10504,7 +9090,7 @@
           <p:cNvPr id="12" name="p16-n-2">
             <a:extLst xmlns:a="http://schemas.openxmlformats.org/drawingml/2006/main">
               <a:ext uri="{FF2B5EF4-FFF2-40B4-BE49-F238E27FC236}">
-                <a16:creationId xmlns:a16="http://schemas.microsoft.com/office/drawing/2014/main" id="{F0CE84E3-8F8D-4709-9C2F-EACEE8C7CA1E}"/>
+                <a16:creationId xmlns:a16="http://schemas.microsoft.com/office/drawing/2014/main" id="{96C2EFCB-66E6-4BC6-8F08-2DF4F5C6793F}"/>
               </a:ext>
             </a:extLst>
           </p:cNvPr>
@@ -10561,7 +9147,7 @@
           <p:cNvPr id="13" name="p16-q-2">
             <a:extLst xmlns:a="http://schemas.openxmlformats.org/drawingml/2006/main">
               <a:ext uri="{FF2B5EF4-FFF2-40B4-BE49-F238E27FC236}">
-                <a16:creationId xmlns:a16="http://schemas.microsoft.com/office/drawing/2014/main" id="{D43ADD45-C5B2-4EA8-9B54-319198C5BA16}"/>
+                <a16:creationId xmlns:a16="http://schemas.microsoft.com/office/drawing/2014/main" id="{EFEE03CF-AD22-4BA0-A1C0-CB372E3EE8A3}"/>
               </a:ext>
             </a:extLst>
           </p:cNvPr>
@@ -10614,7 +9200,7 @@
           <p:cNvPr id="14" name="p16-d-2">
             <a:extLst xmlns:a="http://schemas.openxmlformats.org/drawingml/2006/main">
               <a:ext uri="{FF2B5EF4-FFF2-40B4-BE49-F238E27FC236}">
-                <a16:creationId xmlns:a16="http://schemas.microsoft.com/office/drawing/2014/main" id="{EF4671D7-7F99-493C-927A-7141FCCB83AB}"/>
+                <a16:creationId xmlns:a16="http://schemas.microsoft.com/office/drawing/2014/main" id="{522B0DAA-B69E-46F5-9785-26E84668D771}"/>
               </a:ext>
             </a:extLst>
           </p:cNvPr>
@@ -10669,7 +9255,7 @@
           <p:cNvPr id="15" name="p16-author">
             <a:extLst xmlns:a="http://schemas.openxmlformats.org/drawingml/2006/main">
               <a:ext uri="{FF2B5EF4-FFF2-40B4-BE49-F238E27FC236}">
-                <a16:creationId xmlns:a16="http://schemas.microsoft.com/office/drawing/2014/main" id="{75385372-6DBD-43BE-9950-BF3F2CBB22BD}"/>
+                <a16:creationId xmlns:a16="http://schemas.microsoft.com/office/drawing/2014/main" id="{00D5DB1F-53F6-4224-8BAA-C260E9DC534E}"/>
               </a:ext>
             </a:extLst>
           </p:cNvPr>
@@ -10722,7 +9308,7 @@
           <p:cNvPr id="16" name="p16-state-0">
             <a:extLst xmlns:a="http://schemas.openxmlformats.org/drawingml/2006/main">
               <a:ext uri="{FF2B5EF4-FFF2-40B4-BE49-F238E27FC236}">
-                <a16:creationId xmlns:a16="http://schemas.microsoft.com/office/drawing/2014/main" id="{293F6FBB-6419-420B-A118-FD16D2C29C72}"/>
+                <a16:creationId xmlns:a16="http://schemas.microsoft.com/office/drawing/2014/main" id="{A7F86F63-D45E-47E5-8E2E-917B466732DA}"/>
               </a:ext>
             </a:extLst>
           </p:cNvPr>
@@ -10783,7 +9369,7 @@
           <p:cNvPr id="17" name="p16-state-1">
             <a:extLst xmlns:a="http://schemas.openxmlformats.org/drawingml/2006/main">
               <a:ext uri="{FF2B5EF4-FFF2-40B4-BE49-F238E27FC236}">
-                <a16:creationId xmlns:a16="http://schemas.microsoft.com/office/drawing/2014/main" id="{9B3B4C62-EC1A-47E6-852C-47570B60259D}"/>
+                <a16:creationId xmlns:a16="http://schemas.microsoft.com/office/drawing/2014/main" id="{5770206C-CB2D-4DC2-ACF6-22C9E1955B53}"/>
               </a:ext>
             </a:extLst>
           </p:cNvPr>
@@ -10844,7 +9430,7 @@
           <p:cNvPr id="18" name="p16-state-2">
             <a:extLst xmlns:a="http://schemas.openxmlformats.org/drawingml/2006/main">
               <a:ext uri="{FF2B5EF4-FFF2-40B4-BE49-F238E27FC236}">
-                <a16:creationId xmlns:a16="http://schemas.microsoft.com/office/drawing/2014/main" id="{7F62803D-1B9D-4FA0-AE16-EDA44A8795A0}"/>
+                <a16:creationId xmlns:a16="http://schemas.microsoft.com/office/drawing/2014/main" id="{9901AA6B-8753-454E-9F55-64E2DE8EF568}"/>
               </a:ext>
             </a:extLst>
           </p:cNvPr>
@@ -10905,7 +9491,7 @@
           <p:cNvPr id="19" name="p16-boundary">
             <a:extLst xmlns:a="http://schemas.openxmlformats.org/drawingml/2006/main">
               <a:ext uri="{FF2B5EF4-FFF2-40B4-BE49-F238E27FC236}">
-                <a16:creationId xmlns:a16="http://schemas.microsoft.com/office/drawing/2014/main" id="{79395D21-57AD-4D6A-B20F-9F5D52716D60}"/>
+                <a16:creationId xmlns:a16="http://schemas.microsoft.com/office/drawing/2014/main" id="{2F8C4594-436C-4C49-A538-A391FE1ECEFC}"/>
               </a:ext>
             </a:extLst>
           </p:cNvPr>
@@ -11013,7 +9599,7 @@
                 <a:ea typeface="Microsoft YaHei"/>
                 <a:cs typeface="Microsoft YaHei"/>
               </a:rPr>
-              <a:t>退出卡与第 5 课预告</a:t>
+              <a:t>本讲知识点总结</a:t>
             </a:r>
             <a:endParaRPr/>
           </a:p>
@@ -11049,22 +9635,199 @@
       </p:sp>
       <p:sp>
         <p:nvSpPr>
-          <p:cNvPr id="6" name="p17-exit-title">
-            <a:extLst xmlns:a="http://schemas.openxmlformats.org/drawingml/2006/main">
-              <a:ext uri="{FF2B5EF4-FFF2-40B4-BE49-F238E27FC236}">
-                <a16:creationId xmlns:a16="http://schemas.microsoft.com/office/drawing/2014/main" id="{83791532-BA1A-4057-B31D-CAF9D6A56E7A}"/>
-              </a:ext>
-            </a:extLst>
-          </p:cNvPr>
-          <p:cNvSpPr>
-            <a:spLocks xmlns:a="http://schemas.openxmlformats.org/drawingml/2006/main" noGrp="1"/>
-          </p:cNvSpPr>
-          <p:nvPr/>
-        </p:nvSpPr>
-        <p:spPr>
-          <a:xfrm xmlns:a="http://schemas.openxmlformats.org/drawingml/2006/main">
-            <a:off x="552450" y="990600"/>
-            <a:ext cx="4095750" cy="457200"/>
+          <p:cNvPr id="6" name="p17-n-0">
+            <a:extLst xmlns:a="http://schemas.openxmlformats.org/drawingml/2006/main">
+              <a:ext uri="{FF2B5EF4-FFF2-40B4-BE49-F238E27FC236}">
+                <a16:creationId xmlns:a16="http://schemas.microsoft.com/office/drawing/2014/main" id="{340F7E0C-0B15-40CA-B527-897B468D4DD2}"/>
+              </a:ext>
+            </a:extLst>
+          </p:cNvPr>
+          <p:cNvSpPr>
+            <a:spLocks xmlns:a="http://schemas.openxmlformats.org/drawingml/2006/main" noGrp="1"/>
+          </p:cNvSpPr>
+          <p:nvPr/>
+        </p:nvSpPr>
+        <p:spPr>
+          <a:xfrm xmlns:a="http://schemas.openxmlformats.org/drawingml/2006/main">
+            <a:off x="523875" y="1200150"/>
+            <a:ext cx="495300" cy="495300"/>
+          </a:xfrm>
+          <a:prstGeom xmlns:a="http://schemas.openxmlformats.org/drawingml/2006/main" prst="roundRect">
+            <a:avLst>
+              <a:gd name="adj" fmla="val 15385"/>
+            </a:avLst>
+          </a:prstGeom>
+          <a:solidFill xmlns:a="http://schemas.openxmlformats.org/drawingml/2006/main">
+            <a:srgbClr val="2F638A"/>
+          </a:solidFill>
+          <a:ln xmlns:a="http://schemas.openxmlformats.org/drawingml/2006/main" w="0">
+            <a:noFill/>
+            <a:prstDash val="solid"/>
+          </a:ln>
+        </p:spPr>
+        <p:txBody>
+          <a:bodyPr xmlns:a="http://schemas.openxmlformats.org/drawingml/2006/main" lIns="76200" tIns="38100" rIns="76200" bIns="38100" anchor="ctr"/>
+          <a:lstStyle xmlns:a="http://schemas.openxmlformats.org/drawingml/2006/main"/>
+          <a:p xmlns:a="http://schemas.openxmlformats.org/drawingml/2006/main">
+            <a:pPr algn="ctr">
+              <a:defRPr sz="1500" b="1">
+                <a:solidFill>
+                  <a:srgbClr val="FFFFFF"/>
+                </a:solidFill>
+              </a:defRPr>
+            </a:pPr>
+            <a:r>
+              <a:rPr sz="1500" b="1">
+                <a:solidFill>
+                  <a:srgbClr val="FFFFFF"/>
+                </a:solidFill>
+                <a:latin typeface="Arial"/>
+                <a:ea typeface="Arial"/>
+                <a:cs typeface="Arial"/>
+              </a:rPr>
+              <a:t>1</a:t>
+            </a:r>
+          </a:p>
+        </p:txBody>
+      </p:sp>
+      <p:sp>
+        <p:nvSpPr>
+          <p:cNvPr id="7" name="p17-label-0">
+            <a:extLst xmlns:a="http://schemas.openxmlformats.org/drawingml/2006/main">
+              <a:ext uri="{FF2B5EF4-FFF2-40B4-BE49-F238E27FC236}">
+                <a16:creationId xmlns:a16="http://schemas.microsoft.com/office/drawing/2014/main" id="{155D4FF0-B7C9-483D-8EB9-CFFAB1C5BE68}"/>
+              </a:ext>
+            </a:extLst>
+          </p:cNvPr>
+          <p:cNvSpPr>
+            <a:spLocks xmlns:a="http://schemas.openxmlformats.org/drawingml/2006/main" noGrp="1"/>
+          </p:cNvSpPr>
+          <p:nvPr/>
+        </p:nvSpPr>
+        <p:spPr>
+          <a:xfrm xmlns:a="http://schemas.openxmlformats.org/drawingml/2006/main">
+            <a:off x="1133475" y="1143000"/>
+            <a:ext cx="2000250" cy="552450"/>
+          </a:xfrm>
+          <a:prstGeom xmlns:a="http://schemas.openxmlformats.org/drawingml/2006/main" prst="roundRect">
+            <a:avLst>
+              <a:gd name="adj" fmla="val 13793"/>
+            </a:avLst>
+          </a:prstGeom>
+          <a:solidFill xmlns:a="http://schemas.openxmlformats.org/drawingml/2006/main">
+            <a:srgbClr val="E8F0F6"/>
+          </a:solidFill>
+          <a:ln xmlns:a="http://schemas.openxmlformats.org/drawingml/2006/main" w="0">
+            <a:noFill/>
+            <a:prstDash val="solid"/>
+          </a:ln>
+        </p:spPr>
+        <p:txBody>
+          <a:bodyPr xmlns:a="http://schemas.openxmlformats.org/drawingml/2006/main" lIns="76200" tIns="38100" rIns="76200" bIns="38100" anchor="ctr"/>
+          <a:lstStyle xmlns:a="http://schemas.openxmlformats.org/drawingml/2006/main"/>
+          <a:p xmlns:a="http://schemas.openxmlformats.org/drawingml/2006/main">
+            <a:pPr algn="ctr">
+              <a:defRPr sz="1725" b="1">
+                <a:solidFill>
+                  <a:srgbClr val="2F638A"/>
+                </a:solidFill>
+              </a:defRPr>
+            </a:pPr>
+            <a:r>
+              <a:rPr sz="1725" b="1">
+                <a:solidFill>
+                  <a:srgbClr val="2F638A"/>
+                </a:solidFill>
+                <a:latin typeface="Microsoft YaHei"/>
+                <a:ea typeface="Microsoft YaHei"/>
+                <a:cs typeface="Microsoft YaHei"/>
+              </a:rPr>
+              <a:t>AI 导航</a:t>
+            </a:r>
+          </a:p>
+        </p:txBody>
+      </p:sp>
+      <p:sp>
+        <p:nvSpPr>
+          <p:cNvPr id="8" name="p17-detail-0">
+            <a:extLst xmlns:a="http://schemas.openxmlformats.org/drawingml/2006/main">
+              <a:ext uri="{FF2B5EF4-FFF2-40B4-BE49-F238E27FC236}">
+                <a16:creationId xmlns:a16="http://schemas.microsoft.com/office/drawing/2014/main" id="{C0886EFA-B3B5-483E-8F94-21606657AC62}"/>
+              </a:ext>
+            </a:extLst>
+          </p:cNvPr>
+          <p:cNvSpPr>
+            <a:spLocks xmlns:a="http://schemas.openxmlformats.org/drawingml/2006/main" noGrp="1"/>
+          </p:cNvSpPr>
+          <p:nvPr/>
+        </p:nvSpPr>
+        <p:spPr>
+          <a:xfrm xmlns:a="http://schemas.openxmlformats.org/drawingml/2006/main">
+            <a:off x="523875" y="1952625"/>
+            <a:ext cx="2609850" cy="1428750"/>
+          </a:xfrm>
+          <a:prstGeom xmlns:a="http://schemas.openxmlformats.org/drawingml/2006/main" prst="roundRect">
+            <a:avLst>
+              <a:gd name="adj" fmla="val 5333"/>
+            </a:avLst>
+          </a:prstGeom>
+          <a:solidFill xmlns:a="http://schemas.openxmlformats.org/drawingml/2006/main">
+            <a:srgbClr val="FFFFFF"/>
+          </a:solidFill>
+          <a:ln xmlns:a="http://schemas.openxmlformats.org/drawingml/2006/main" w="9525">
+            <a:solidFill>
+              <a:srgbClr val="D6DDE2"/>
+            </a:solidFill>
+            <a:prstDash val="solid"/>
+          </a:ln>
+        </p:spPr>
+        <p:txBody>
+          <a:bodyPr xmlns:a="http://schemas.openxmlformats.org/drawingml/2006/main" lIns="76200" tIns="38100" rIns="76200" bIns="38100" anchor="ctr"/>
+          <a:lstStyle xmlns:a="http://schemas.openxmlformats.org/drawingml/2006/main"/>
+          <a:p xmlns:a="http://schemas.openxmlformats.org/drawingml/2006/main">
+            <a:pPr algn="ctr">
+              <a:lnSpc>
+                <a:spcPct val="118000"/>
+              </a:lnSpc>
+              <a:buNone/>
+              <a:defRPr sz="1500" b="1">
+                <a:solidFill>
+                  <a:srgbClr val="263746"/>
+                </a:solidFill>
+              </a:defRPr>
+            </a:pPr>
+            <a:r>
+              <a:rPr sz="1500" b="1">
+                <a:solidFill>
+                  <a:srgbClr val="263746"/>
+                </a:solidFill>
+                <a:latin typeface="Microsoft YaHei"/>
+                <a:ea typeface="Microsoft YaHei"/>
+                <a:cs typeface="Microsoft YaHei"/>
+              </a:rPr>
+              <a:t>先定位任务、设置与关键位置</a:t>
+            </a:r>
+          </a:p>
+        </p:txBody>
+      </p:sp>
+      <p:sp>
+        <p:nvSpPr>
+          <p:cNvPr id="9" name="p17-arrow-0">
+            <a:extLst xmlns:a="http://schemas.openxmlformats.org/drawingml/2006/main">
+              <a:ext uri="{FF2B5EF4-FFF2-40B4-BE49-F238E27FC236}">
+                <a16:creationId xmlns:a16="http://schemas.microsoft.com/office/drawing/2014/main" id="{5E5316A5-4ACE-48B2-8364-61B3A834BA8B}"/>
+              </a:ext>
+            </a:extLst>
+          </p:cNvPr>
+          <p:cNvSpPr>
+            <a:spLocks xmlns:a="http://schemas.openxmlformats.org/drawingml/2006/main" noGrp="1"/>
+          </p:cNvSpPr>
+          <p:nvPr/>
+        </p:nvSpPr>
+        <p:spPr>
+          <a:xfrm xmlns:a="http://schemas.openxmlformats.org/drawingml/2006/main">
+            <a:off x="3114675" y="2419350"/>
+            <a:ext cx="323850" cy="400050"/>
           </a:xfrm>
           <a:prstGeom xmlns:a="http://schemas.openxmlformats.org/drawingml/2006/main" prst="rect">
             <a:avLst/>
@@ -11079,6 +9842,849 @@
           <a:bodyPr xmlns:a="http://schemas.openxmlformats.org/drawingml/2006/main" lIns="76200" tIns="38100" rIns="76200" bIns="38100" anchor="ctr"/>
           <a:lstStyle xmlns:a="http://schemas.openxmlformats.org/drawingml/2006/main"/>
           <a:p xmlns:a="http://schemas.openxmlformats.org/drawingml/2006/main">
+            <a:pPr algn="ctr">
+              <a:defRPr sz="2250" b="1">
+                <a:solidFill>
+                  <a:srgbClr val="667684"/>
+                </a:solidFill>
+              </a:defRPr>
+            </a:pPr>
+            <a:r>
+              <a:rPr sz="2250" b="1">
+                <a:solidFill>
+                  <a:srgbClr val="667684"/>
+                </a:solidFill>
+                <a:latin typeface="Arial"/>
+                <a:ea typeface="Arial"/>
+                <a:cs typeface="Arial"/>
+              </a:rPr>
+              <a:t>→</a:t>
+            </a:r>
+          </a:p>
+        </p:txBody>
+      </p:sp>
+      <p:sp>
+        <p:nvSpPr>
+          <p:cNvPr id="10" name="p17-n-1">
+            <a:extLst xmlns:a="http://schemas.openxmlformats.org/drawingml/2006/main">
+              <a:ext uri="{FF2B5EF4-FFF2-40B4-BE49-F238E27FC236}">
+                <a16:creationId xmlns:a16="http://schemas.microsoft.com/office/drawing/2014/main" id="{F72CEE1C-7E87-40BB-8BE8-E66BD8F288F1}"/>
+              </a:ext>
+            </a:extLst>
+          </p:cNvPr>
+          <p:cNvSpPr>
+            <a:spLocks xmlns:a="http://schemas.openxmlformats.org/drawingml/2006/main" noGrp="1"/>
+          </p:cNvSpPr>
+          <p:nvPr/>
+        </p:nvSpPr>
+        <p:spPr>
+          <a:xfrm xmlns:a="http://schemas.openxmlformats.org/drawingml/2006/main">
+            <a:off x="3429000" y="1200150"/>
+            <a:ext cx="495300" cy="495300"/>
+          </a:xfrm>
+          <a:prstGeom xmlns:a="http://schemas.openxmlformats.org/drawingml/2006/main" prst="roundRect">
+            <a:avLst>
+              <a:gd name="adj" fmla="val 15385"/>
+            </a:avLst>
+          </a:prstGeom>
+          <a:solidFill xmlns:a="http://schemas.openxmlformats.org/drawingml/2006/main">
+            <a:srgbClr val="28745A"/>
+          </a:solidFill>
+          <a:ln xmlns:a="http://schemas.openxmlformats.org/drawingml/2006/main" w="0">
+            <a:noFill/>
+            <a:prstDash val="solid"/>
+          </a:ln>
+        </p:spPr>
+        <p:txBody>
+          <a:bodyPr xmlns:a="http://schemas.openxmlformats.org/drawingml/2006/main" lIns="76200" tIns="38100" rIns="76200" bIns="38100" anchor="ctr"/>
+          <a:lstStyle xmlns:a="http://schemas.openxmlformats.org/drawingml/2006/main"/>
+          <a:p xmlns:a="http://schemas.openxmlformats.org/drawingml/2006/main">
+            <a:pPr algn="ctr">
+              <a:defRPr sz="1500" b="1">
+                <a:solidFill>
+                  <a:srgbClr val="FFFFFF"/>
+                </a:solidFill>
+              </a:defRPr>
+            </a:pPr>
+            <a:r>
+              <a:rPr sz="1500" b="1">
+                <a:solidFill>
+                  <a:srgbClr val="FFFFFF"/>
+                </a:solidFill>
+                <a:latin typeface="Arial"/>
+                <a:ea typeface="Arial"/>
+                <a:cs typeface="Arial"/>
+              </a:rPr>
+              <a:t>2</a:t>
+            </a:r>
+          </a:p>
+        </p:txBody>
+      </p:sp>
+      <p:sp>
+        <p:nvSpPr>
+          <p:cNvPr id="11" name="p17-label-1">
+            <a:extLst xmlns:a="http://schemas.openxmlformats.org/drawingml/2006/main">
+              <a:ext uri="{FF2B5EF4-FFF2-40B4-BE49-F238E27FC236}">
+                <a16:creationId xmlns:a16="http://schemas.microsoft.com/office/drawing/2014/main" id="{F089D3F1-458B-4E0C-9693-A22C686A6483}"/>
+              </a:ext>
+            </a:extLst>
+          </p:cNvPr>
+          <p:cNvSpPr>
+            <a:spLocks xmlns:a="http://schemas.openxmlformats.org/drawingml/2006/main" noGrp="1"/>
+          </p:cNvSpPr>
+          <p:nvPr/>
+        </p:nvSpPr>
+        <p:spPr>
+          <a:xfrm xmlns:a="http://schemas.openxmlformats.org/drawingml/2006/main">
+            <a:off x="4038600" y="1143000"/>
+            <a:ext cx="2000250" cy="552450"/>
+          </a:xfrm>
+          <a:prstGeom xmlns:a="http://schemas.openxmlformats.org/drawingml/2006/main" prst="roundRect">
+            <a:avLst>
+              <a:gd name="adj" fmla="val 13793"/>
+            </a:avLst>
+          </a:prstGeom>
+          <a:solidFill xmlns:a="http://schemas.openxmlformats.org/drawingml/2006/main">
+            <a:srgbClr val="E7F2ED"/>
+          </a:solidFill>
+          <a:ln xmlns:a="http://schemas.openxmlformats.org/drawingml/2006/main" w="0">
+            <a:noFill/>
+            <a:prstDash val="solid"/>
+          </a:ln>
+        </p:spPr>
+        <p:txBody>
+          <a:bodyPr xmlns:a="http://schemas.openxmlformats.org/drawingml/2006/main" lIns="76200" tIns="38100" rIns="76200" bIns="38100" anchor="ctr"/>
+          <a:lstStyle xmlns:a="http://schemas.openxmlformats.org/drawingml/2006/main"/>
+          <a:p xmlns:a="http://schemas.openxmlformats.org/drawingml/2006/main">
+            <a:pPr algn="ctr">
+              <a:defRPr sz="1725" b="1">
+                <a:solidFill>
+                  <a:srgbClr val="28745A"/>
+                </a:solidFill>
+              </a:defRPr>
+            </a:pPr>
+            <a:r>
+              <a:rPr sz="1725" b="1">
+                <a:solidFill>
+                  <a:srgbClr val="28745A"/>
+                </a:solidFill>
+                <a:latin typeface="Microsoft YaHei"/>
+                <a:ea typeface="Microsoft YaHei"/>
+                <a:cs typeface="Microsoft YaHei"/>
+              </a:rPr>
+              <a:t>原文核验</a:t>
+            </a:r>
+          </a:p>
+        </p:txBody>
+      </p:sp>
+      <p:sp>
+        <p:nvSpPr>
+          <p:cNvPr id="12" name="p17-detail-1">
+            <a:extLst xmlns:a="http://schemas.openxmlformats.org/drawingml/2006/main">
+              <a:ext uri="{FF2B5EF4-FFF2-40B4-BE49-F238E27FC236}">
+                <a16:creationId xmlns:a16="http://schemas.microsoft.com/office/drawing/2014/main" id="{8D70E620-A828-46DE-B612-54E81A727A79}"/>
+              </a:ext>
+            </a:extLst>
+          </p:cNvPr>
+          <p:cNvSpPr>
+            <a:spLocks xmlns:a="http://schemas.openxmlformats.org/drawingml/2006/main" noGrp="1"/>
+          </p:cNvSpPr>
+          <p:nvPr/>
+        </p:nvSpPr>
+        <p:spPr>
+          <a:xfrm xmlns:a="http://schemas.openxmlformats.org/drawingml/2006/main">
+            <a:off x="3429000" y="1952625"/>
+            <a:ext cx="2609850" cy="1428750"/>
+          </a:xfrm>
+          <a:prstGeom xmlns:a="http://schemas.openxmlformats.org/drawingml/2006/main" prst="roundRect">
+            <a:avLst>
+              <a:gd name="adj" fmla="val 5333"/>
+            </a:avLst>
+          </a:prstGeom>
+          <a:solidFill xmlns:a="http://schemas.openxmlformats.org/drawingml/2006/main">
+            <a:srgbClr val="FFFFFF"/>
+          </a:solidFill>
+          <a:ln xmlns:a="http://schemas.openxmlformats.org/drawingml/2006/main" w="9525">
+            <a:solidFill>
+              <a:srgbClr val="D6DDE2"/>
+            </a:solidFill>
+            <a:prstDash val="solid"/>
+          </a:ln>
+        </p:spPr>
+        <p:txBody>
+          <a:bodyPr xmlns:a="http://schemas.openxmlformats.org/drawingml/2006/main" lIns="76200" tIns="38100" rIns="76200" bIns="38100" anchor="ctr"/>
+          <a:lstStyle xmlns:a="http://schemas.openxmlformats.org/drawingml/2006/main"/>
+          <a:p xmlns:a="http://schemas.openxmlformats.org/drawingml/2006/main">
+            <a:pPr algn="ctr">
+              <a:lnSpc>
+                <a:spcPct val="118000"/>
+              </a:lnSpc>
+              <a:buNone/>
+              <a:defRPr sz="1500" b="1">
+                <a:solidFill>
+                  <a:srgbClr val="263746"/>
+                </a:solidFill>
+              </a:defRPr>
+            </a:pPr>
+            <a:r>
+              <a:rPr sz="1500" b="1">
+                <a:solidFill>
+                  <a:srgbClr val="263746"/>
+                </a:solidFill>
+                <a:latin typeface="Microsoft YaHei"/>
+                <a:ea typeface="Microsoft YaHei"/>
+                <a:cs typeface="Microsoft YaHei"/>
+              </a:rPr>
+              <a:t>逐条检查指标、对照与限定</a:t>
+            </a:r>
+          </a:p>
+        </p:txBody>
+      </p:sp>
+      <p:sp>
+        <p:nvSpPr>
+          <p:cNvPr id="13" name="p17-arrow-1">
+            <a:extLst xmlns:a="http://schemas.openxmlformats.org/drawingml/2006/main">
+              <a:ext uri="{FF2B5EF4-FFF2-40B4-BE49-F238E27FC236}">
+                <a16:creationId xmlns:a16="http://schemas.microsoft.com/office/drawing/2014/main" id="{39715AE0-B644-4A1C-8279-2DE4BC2A8A7E}"/>
+              </a:ext>
+            </a:extLst>
+          </p:cNvPr>
+          <p:cNvSpPr>
+            <a:spLocks xmlns:a="http://schemas.openxmlformats.org/drawingml/2006/main" noGrp="1"/>
+          </p:cNvSpPr>
+          <p:nvPr/>
+        </p:nvSpPr>
+        <p:spPr>
+          <a:xfrm xmlns:a="http://schemas.openxmlformats.org/drawingml/2006/main">
+            <a:off x="6019800" y="2419350"/>
+            <a:ext cx="323850" cy="400050"/>
+          </a:xfrm>
+          <a:prstGeom xmlns:a="http://schemas.openxmlformats.org/drawingml/2006/main" prst="rect">
+            <a:avLst/>
+          </a:prstGeom>
+          <a:noFill xmlns:a="http://schemas.openxmlformats.org/drawingml/2006/main"/>
+          <a:ln xmlns:a="http://schemas.openxmlformats.org/drawingml/2006/main" w="0">
+            <a:noFill/>
+            <a:prstDash val="solid"/>
+          </a:ln>
+        </p:spPr>
+        <p:txBody>
+          <a:bodyPr xmlns:a="http://schemas.openxmlformats.org/drawingml/2006/main" lIns="76200" tIns="38100" rIns="76200" bIns="38100" anchor="ctr"/>
+          <a:lstStyle xmlns:a="http://schemas.openxmlformats.org/drawingml/2006/main"/>
+          <a:p xmlns:a="http://schemas.openxmlformats.org/drawingml/2006/main">
+            <a:pPr algn="ctr">
+              <a:defRPr sz="2250" b="1">
+                <a:solidFill>
+                  <a:srgbClr val="667684"/>
+                </a:solidFill>
+              </a:defRPr>
+            </a:pPr>
+            <a:r>
+              <a:rPr sz="2250" b="1">
+                <a:solidFill>
+                  <a:srgbClr val="667684"/>
+                </a:solidFill>
+                <a:latin typeface="Arial"/>
+                <a:ea typeface="Arial"/>
+                <a:cs typeface="Arial"/>
+              </a:rPr>
+              <a:t>→</a:t>
+            </a:r>
+          </a:p>
+        </p:txBody>
+      </p:sp>
+      <p:sp>
+        <p:nvSpPr>
+          <p:cNvPr id="14" name="p17-n-2">
+            <a:extLst xmlns:a="http://schemas.openxmlformats.org/drawingml/2006/main">
+              <a:ext uri="{FF2B5EF4-FFF2-40B4-BE49-F238E27FC236}">
+                <a16:creationId xmlns:a16="http://schemas.microsoft.com/office/drawing/2014/main" id="{7BC7CEA6-B2D3-460E-848F-8760DD3CCCF0}"/>
+              </a:ext>
+            </a:extLst>
+          </p:cNvPr>
+          <p:cNvSpPr>
+            <a:spLocks xmlns:a="http://schemas.openxmlformats.org/drawingml/2006/main" noGrp="1"/>
+          </p:cNvSpPr>
+          <p:nvPr/>
+        </p:nvSpPr>
+        <p:spPr>
+          <a:xfrm xmlns:a="http://schemas.openxmlformats.org/drawingml/2006/main">
+            <a:off x="6334125" y="1200150"/>
+            <a:ext cx="495300" cy="495300"/>
+          </a:xfrm>
+          <a:prstGeom xmlns:a="http://schemas.openxmlformats.org/drawingml/2006/main" prst="roundRect">
+            <a:avLst>
+              <a:gd name="adj" fmla="val 15385"/>
+            </a:avLst>
+          </a:prstGeom>
+          <a:solidFill xmlns:a="http://schemas.openxmlformats.org/drawingml/2006/main">
+            <a:srgbClr val="A86C12"/>
+          </a:solidFill>
+          <a:ln xmlns:a="http://schemas.openxmlformats.org/drawingml/2006/main" w="0">
+            <a:noFill/>
+            <a:prstDash val="solid"/>
+          </a:ln>
+        </p:spPr>
+        <p:txBody>
+          <a:bodyPr xmlns:a="http://schemas.openxmlformats.org/drawingml/2006/main" lIns="76200" tIns="38100" rIns="76200" bIns="38100" anchor="ctr"/>
+          <a:lstStyle xmlns:a="http://schemas.openxmlformats.org/drawingml/2006/main"/>
+          <a:p xmlns:a="http://schemas.openxmlformats.org/drawingml/2006/main">
+            <a:pPr algn="ctr">
+              <a:defRPr sz="1500" b="1">
+                <a:solidFill>
+                  <a:srgbClr val="FFFFFF"/>
+                </a:solidFill>
+              </a:defRPr>
+            </a:pPr>
+            <a:r>
+              <a:rPr sz="1500" b="1">
+                <a:solidFill>
+                  <a:srgbClr val="FFFFFF"/>
+                </a:solidFill>
+                <a:latin typeface="Arial"/>
+                <a:ea typeface="Arial"/>
+                <a:cs typeface="Arial"/>
+              </a:rPr>
+              <a:t>3</a:t>
+            </a:r>
+          </a:p>
+        </p:txBody>
+      </p:sp>
+      <p:sp>
+        <p:nvSpPr>
+          <p:cNvPr id="15" name="p17-label-2">
+            <a:extLst xmlns:a="http://schemas.openxmlformats.org/drawingml/2006/main">
+              <a:ext uri="{FF2B5EF4-FFF2-40B4-BE49-F238E27FC236}">
+                <a16:creationId xmlns:a16="http://schemas.microsoft.com/office/drawing/2014/main" id="{08ACC5EF-262F-4F78-854D-F06EA2A212E4}"/>
+              </a:ext>
+            </a:extLst>
+          </p:cNvPr>
+          <p:cNvSpPr>
+            <a:spLocks xmlns:a="http://schemas.openxmlformats.org/drawingml/2006/main" noGrp="1"/>
+          </p:cNvSpPr>
+          <p:nvPr/>
+        </p:nvSpPr>
+        <p:spPr>
+          <a:xfrm xmlns:a="http://schemas.openxmlformats.org/drawingml/2006/main">
+            <a:off x="6943725" y="1143000"/>
+            <a:ext cx="2000250" cy="552450"/>
+          </a:xfrm>
+          <a:prstGeom xmlns:a="http://schemas.openxmlformats.org/drawingml/2006/main" prst="roundRect">
+            <a:avLst>
+              <a:gd name="adj" fmla="val 13793"/>
+            </a:avLst>
+          </a:prstGeom>
+          <a:solidFill xmlns:a="http://schemas.openxmlformats.org/drawingml/2006/main">
+            <a:srgbClr val="FAF0DD"/>
+          </a:solidFill>
+          <a:ln xmlns:a="http://schemas.openxmlformats.org/drawingml/2006/main" w="0">
+            <a:noFill/>
+            <a:prstDash val="solid"/>
+          </a:ln>
+        </p:spPr>
+        <p:txBody>
+          <a:bodyPr xmlns:a="http://schemas.openxmlformats.org/drawingml/2006/main" lIns="76200" tIns="38100" rIns="76200" bIns="38100" anchor="ctr"/>
+          <a:lstStyle xmlns:a="http://schemas.openxmlformats.org/drawingml/2006/main"/>
+          <a:p xmlns:a="http://schemas.openxmlformats.org/drawingml/2006/main">
+            <a:pPr algn="ctr">
+              <a:defRPr sz="1725" b="1">
+                <a:solidFill>
+                  <a:srgbClr val="A86C12"/>
+                </a:solidFill>
+              </a:defRPr>
+            </a:pPr>
+            <a:r>
+              <a:rPr sz="1725" b="1">
+                <a:solidFill>
+                  <a:srgbClr val="A86C12"/>
+                </a:solidFill>
+                <a:latin typeface="Microsoft YaHei"/>
+                <a:ea typeface="Microsoft YaHei"/>
+                <a:cs typeface="Microsoft YaHei"/>
+              </a:rPr>
+              <a:t>偏差审计</a:t>
+            </a:r>
+          </a:p>
+        </p:txBody>
+      </p:sp>
+      <p:sp>
+        <p:nvSpPr>
+          <p:cNvPr id="16" name="p17-detail-2">
+            <a:extLst xmlns:a="http://schemas.openxmlformats.org/drawingml/2006/main">
+              <a:ext uri="{FF2B5EF4-FFF2-40B4-BE49-F238E27FC236}">
+                <a16:creationId xmlns:a16="http://schemas.microsoft.com/office/drawing/2014/main" id="{7D2E315F-9AF2-403A-AFBE-86028AF06F67}"/>
+              </a:ext>
+            </a:extLst>
+          </p:cNvPr>
+          <p:cNvSpPr>
+            <a:spLocks xmlns:a="http://schemas.openxmlformats.org/drawingml/2006/main" noGrp="1"/>
+          </p:cNvSpPr>
+          <p:nvPr/>
+        </p:nvSpPr>
+        <p:spPr>
+          <a:xfrm xmlns:a="http://schemas.openxmlformats.org/drawingml/2006/main">
+            <a:off x="6334125" y="1952625"/>
+            <a:ext cx="2609850" cy="1428750"/>
+          </a:xfrm>
+          <a:prstGeom xmlns:a="http://schemas.openxmlformats.org/drawingml/2006/main" prst="roundRect">
+            <a:avLst>
+              <a:gd name="adj" fmla="val 5333"/>
+            </a:avLst>
+          </a:prstGeom>
+          <a:solidFill xmlns:a="http://schemas.openxmlformats.org/drawingml/2006/main">
+            <a:srgbClr val="FFFFFF"/>
+          </a:solidFill>
+          <a:ln xmlns:a="http://schemas.openxmlformats.org/drawingml/2006/main" w="9525">
+            <a:solidFill>
+              <a:srgbClr val="D6DDE2"/>
+            </a:solidFill>
+            <a:prstDash val="solid"/>
+          </a:ln>
+        </p:spPr>
+        <p:txBody>
+          <a:bodyPr xmlns:a="http://schemas.openxmlformats.org/drawingml/2006/main" lIns="76200" tIns="38100" rIns="76200" bIns="38100" anchor="ctr"/>
+          <a:lstStyle xmlns:a="http://schemas.openxmlformats.org/drawingml/2006/main"/>
+          <a:p xmlns:a="http://schemas.openxmlformats.org/drawingml/2006/main">
+            <a:pPr algn="ctr">
+              <a:lnSpc>
+                <a:spcPct val="118000"/>
+              </a:lnSpc>
+              <a:buNone/>
+              <a:defRPr sz="1500" b="1">
+                <a:solidFill>
+                  <a:srgbClr val="263746"/>
+                </a:solidFill>
+              </a:defRPr>
+            </a:pPr>
+            <a:r>
+              <a:rPr sz="1500" b="1">
+                <a:solidFill>
+                  <a:srgbClr val="263746"/>
+                </a:solidFill>
+                <a:latin typeface="Microsoft YaHei"/>
+                <a:ea typeface="Microsoft YaHei"/>
+                <a:cs typeface="Microsoft YaHei"/>
+              </a:rPr>
+              <a:t>记录错读、遗漏或已查风险</a:t>
+            </a:r>
+          </a:p>
+        </p:txBody>
+      </p:sp>
+      <p:sp>
+        <p:nvSpPr>
+          <p:cNvPr id="17" name="p17-arrow-2">
+            <a:extLst xmlns:a="http://schemas.openxmlformats.org/drawingml/2006/main">
+              <a:ext uri="{FF2B5EF4-FFF2-40B4-BE49-F238E27FC236}">
+                <a16:creationId xmlns:a16="http://schemas.microsoft.com/office/drawing/2014/main" id="{C23AF6E1-40CA-4B44-849E-84CBC987C41C}"/>
+              </a:ext>
+            </a:extLst>
+          </p:cNvPr>
+          <p:cNvSpPr>
+            <a:spLocks xmlns:a="http://schemas.openxmlformats.org/drawingml/2006/main" noGrp="1"/>
+          </p:cNvSpPr>
+          <p:nvPr/>
+        </p:nvSpPr>
+        <p:spPr>
+          <a:xfrm xmlns:a="http://schemas.openxmlformats.org/drawingml/2006/main">
+            <a:off x="8924925" y="2419350"/>
+            <a:ext cx="323850" cy="400050"/>
+          </a:xfrm>
+          <a:prstGeom xmlns:a="http://schemas.openxmlformats.org/drawingml/2006/main" prst="rect">
+            <a:avLst/>
+          </a:prstGeom>
+          <a:noFill xmlns:a="http://schemas.openxmlformats.org/drawingml/2006/main"/>
+          <a:ln xmlns:a="http://schemas.openxmlformats.org/drawingml/2006/main" w="0">
+            <a:noFill/>
+            <a:prstDash val="solid"/>
+          </a:ln>
+        </p:spPr>
+        <p:txBody>
+          <a:bodyPr xmlns:a="http://schemas.openxmlformats.org/drawingml/2006/main" lIns="76200" tIns="38100" rIns="76200" bIns="38100" anchor="ctr"/>
+          <a:lstStyle xmlns:a="http://schemas.openxmlformats.org/drawingml/2006/main"/>
+          <a:p xmlns:a="http://schemas.openxmlformats.org/drawingml/2006/main">
+            <a:pPr algn="ctr">
+              <a:defRPr sz="2250" b="1">
+                <a:solidFill>
+                  <a:srgbClr val="667684"/>
+                </a:solidFill>
+              </a:defRPr>
+            </a:pPr>
+            <a:r>
+              <a:rPr sz="2250" b="1">
+                <a:solidFill>
+                  <a:srgbClr val="667684"/>
+                </a:solidFill>
+                <a:latin typeface="Arial"/>
+                <a:ea typeface="Arial"/>
+                <a:cs typeface="Arial"/>
+              </a:rPr>
+              <a:t>→</a:t>
+            </a:r>
+          </a:p>
+        </p:txBody>
+      </p:sp>
+      <p:sp>
+        <p:nvSpPr>
+          <p:cNvPr id="18" name="p17-n-3">
+            <a:extLst xmlns:a="http://schemas.openxmlformats.org/drawingml/2006/main">
+              <a:ext uri="{FF2B5EF4-FFF2-40B4-BE49-F238E27FC236}">
+                <a16:creationId xmlns:a16="http://schemas.microsoft.com/office/drawing/2014/main" id="{35E4C962-9C22-41BF-BA7F-764183482849}"/>
+              </a:ext>
+            </a:extLst>
+          </p:cNvPr>
+          <p:cNvSpPr>
+            <a:spLocks xmlns:a="http://schemas.openxmlformats.org/drawingml/2006/main" noGrp="1"/>
+          </p:cNvSpPr>
+          <p:nvPr/>
+        </p:nvSpPr>
+        <p:spPr>
+          <a:xfrm xmlns:a="http://schemas.openxmlformats.org/drawingml/2006/main">
+            <a:off x="9239250" y="1200150"/>
+            <a:ext cx="495300" cy="495300"/>
+          </a:xfrm>
+          <a:prstGeom xmlns:a="http://schemas.openxmlformats.org/drawingml/2006/main" prst="roundRect">
+            <a:avLst>
+              <a:gd name="adj" fmla="val 15385"/>
+            </a:avLst>
+          </a:prstGeom>
+          <a:solidFill xmlns:a="http://schemas.openxmlformats.org/drawingml/2006/main">
+            <a:srgbClr val="C8161E"/>
+          </a:solidFill>
+          <a:ln xmlns:a="http://schemas.openxmlformats.org/drawingml/2006/main" w="0">
+            <a:noFill/>
+            <a:prstDash val="solid"/>
+          </a:ln>
+        </p:spPr>
+        <p:txBody>
+          <a:bodyPr xmlns:a="http://schemas.openxmlformats.org/drawingml/2006/main" lIns="76200" tIns="38100" rIns="76200" bIns="38100" anchor="ctr"/>
+          <a:lstStyle xmlns:a="http://schemas.openxmlformats.org/drawingml/2006/main"/>
+          <a:p xmlns:a="http://schemas.openxmlformats.org/drawingml/2006/main">
+            <a:pPr algn="ctr">
+              <a:defRPr sz="1500" b="1">
+                <a:solidFill>
+                  <a:srgbClr val="FFFFFF"/>
+                </a:solidFill>
+              </a:defRPr>
+            </a:pPr>
+            <a:r>
+              <a:rPr sz="1500" b="1">
+                <a:solidFill>
+                  <a:srgbClr val="FFFFFF"/>
+                </a:solidFill>
+                <a:latin typeface="Arial"/>
+                <a:ea typeface="Arial"/>
+                <a:cs typeface="Arial"/>
+              </a:rPr>
+              <a:t>4</a:t>
+            </a:r>
+          </a:p>
+        </p:txBody>
+      </p:sp>
+      <p:sp>
+        <p:nvSpPr>
+          <p:cNvPr id="19" name="p17-label-3">
+            <a:extLst xmlns:a="http://schemas.openxmlformats.org/drawingml/2006/main">
+              <a:ext uri="{FF2B5EF4-FFF2-40B4-BE49-F238E27FC236}">
+                <a16:creationId xmlns:a16="http://schemas.microsoft.com/office/drawing/2014/main" id="{EE857E78-7D88-4DF9-819A-EB0D0AB863EA}"/>
+              </a:ext>
+            </a:extLst>
+          </p:cNvPr>
+          <p:cNvSpPr>
+            <a:spLocks xmlns:a="http://schemas.openxmlformats.org/drawingml/2006/main" noGrp="1"/>
+          </p:cNvSpPr>
+          <p:nvPr/>
+        </p:nvSpPr>
+        <p:spPr>
+          <a:xfrm xmlns:a="http://schemas.openxmlformats.org/drawingml/2006/main">
+            <a:off x="9848850" y="1143000"/>
+            <a:ext cx="2000250" cy="552450"/>
+          </a:xfrm>
+          <a:prstGeom xmlns:a="http://schemas.openxmlformats.org/drawingml/2006/main" prst="roundRect">
+            <a:avLst>
+              <a:gd name="adj" fmla="val 13793"/>
+            </a:avLst>
+          </a:prstGeom>
+          <a:solidFill xmlns:a="http://schemas.openxmlformats.org/drawingml/2006/main">
+            <a:srgbClr val="F8E9EA"/>
+          </a:solidFill>
+          <a:ln xmlns:a="http://schemas.openxmlformats.org/drawingml/2006/main" w="0">
+            <a:noFill/>
+            <a:prstDash val="solid"/>
+          </a:ln>
+        </p:spPr>
+        <p:txBody>
+          <a:bodyPr xmlns:a="http://schemas.openxmlformats.org/drawingml/2006/main" lIns="76200" tIns="38100" rIns="76200" bIns="38100" anchor="ctr"/>
+          <a:lstStyle xmlns:a="http://schemas.openxmlformats.org/drawingml/2006/main"/>
+          <a:p xmlns:a="http://schemas.openxmlformats.org/drawingml/2006/main">
+            <a:pPr algn="ctr">
+              <a:defRPr sz="1725" b="1">
+                <a:solidFill>
+                  <a:srgbClr val="C8161E"/>
+                </a:solidFill>
+              </a:defRPr>
+            </a:pPr>
+            <a:r>
+              <a:rPr sz="1725" b="1">
+                <a:solidFill>
+                  <a:srgbClr val="C8161E"/>
+                </a:solidFill>
+                <a:latin typeface="Microsoft YaHei"/>
+                <a:ea typeface="Microsoft YaHei"/>
+                <a:cs typeface="Microsoft YaHei"/>
+              </a:rPr>
+              <a:t>人工定稿</a:t>
+            </a:r>
+          </a:p>
+        </p:txBody>
+      </p:sp>
+      <p:sp>
+        <p:nvSpPr>
+          <p:cNvPr id="20" name="p17-detail-3">
+            <a:extLst xmlns:a="http://schemas.openxmlformats.org/drawingml/2006/main">
+              <a:ext uri="{FF2B5EF4-FFF2-40B4-BE49-F238E27FC236}">
+                <a16:creationId xmlns:a16="http://schemas.microsoft.com/office/drawing/2014/main" id="{2060B186-2A58-446D-A2ED-09A77C24300B}"/>
+              </a:ext>
+            </a:extLst>
+          </p:cNvPr>
+          <p:cNvSpPr>
+            <a:spLocks xmlns:a="http://schemas.openxmlformats.org/drawingml/2006/main" noGrp="1"/>
+          </p:cNvSpPr>
+          <p:nvPr/>
+        </p:nvSpPr>
+        <p:spPr>
+          <a:xfrm xmlns:a="http://schemas.openxmlformats.org/drawingml/2006/main">
+            <a:off x="9239250" y="1952625"/>
+            <a:ext cx="2609850" cy="1428750"/>
+          </a:xfrm>
+          <a:prstGeom xmlns:a="http://schemas.openxmlformats.org/drawingml/2006/main" prst="roundRect">
+            <a:avLst>
+              <a:gd name="adj" fmla="val 5333"/>
+            </a:avLst>
+          </a:prstGeom>
+          <a:solidFill xmlns:a="http://schemas.openxmlformats.org/drawingml/2006/main">
+            <a:srgbClr val="FFFFFF"/>
+          </a:solidFill>
+          <a:ln xmlns:a="http://schemas.openxmlformats.org/drawingml/2006/main" w="9525">
+            <a:solidFill>
+              <a:srgbClr val="D6DDE2"/>
+            </a:solidFill>
+            <a:prstDash val="solid"/>
+          </a:ln>
+        </p:spPr>
+        <p:txBody>
+          <a:bodyPr xmlns:a="http://schemas.openxmlformats.org/drawingml/2006/main" lIns="76200" tIns="38100" rIns="76200" bIns="38100" anchor="ctr"/>
+          <a:lstStyle xmlns:a="http://schemas.openxmlformats.org/drawingml/2006/main"/>
+          <a:p xmlns:a="http://schemas.openxmlformats.org/drawingml/2006/main">
+            <a:pPr algn="ctr">
+              <a:lnSpc>
+                <a:spcPct val="118000"/>
+              </a:lnSpc>
+              <a:buNone/>
+              <a:defRPr sz="1500" b="1">
+                <a:solidFill>
+                  <a:srgbClr val="263746"/>
+                </a:solidFill>
+              </a:defRPr>
+            </a:pPr>
+            <a:r>
+              <a:rPr sz="1500" b="1">
+                <a:solidFill>
+                  <a:srgbClr val="263746"/>
+                </a:solidFill>
+                <a:latin typeface="Microsoft YaHei"/>
+                <a:ea typeface="Microsoft YaHei"/>
+                <a:cs typeface="Microsoft YaHei"/>
+              </a:rPr>
+              <a:t>保留原文位置与判断边界</a:t>
+            </a:r>
+          </a:p>
+        </p:txBody>
+      </p:sp>
+      <p:sp>
+        <p:nvSpPr>
+          <p:cNvPr id="21" name="p17-boundary">
+            <a:extLst xmlns:a="http://schemas.openxmlformats.org/drawingml/2006/main">
+              <a:ext uri="{FF2B5EF4-FFF2-40B4-BE49-F238E27FC236}">
+                <a16:creationId xmlns:a16="http://schemas.microsoft.com/office/drawing/2014/main" id="{6D4189AE-C7E0-47CA-B863-E6B3F7B787E8}"/>
+              </a:ext>
+            </a:extLst>
+          </p:cNvPr>
+          <p:cNvSpPr>
+            <a:spLocks xmlns:a="http://schemas.openxmlformats.org/drawingml/2006/main" noGrp="1"/>
+          </p:cNvSpPr>
+          <p:nvPr/>
+        </p:nvSpPr>
+        <p:spPr>
+          <a:xfrm xmlns:a="http://schemas.openxmlformats.org/drawingml/2006/main">
+            <a:off x="1285875" y="4095750"/>
+            <a:ext cx="9620250" cy="819150"/>
+          </a:xfrm>
+          <a:prstGeom xmlns:a="http://schemas.openxmlformats.org/drawingml/2006/main" prst="roundRect">
+            <a:avLst>
+              <a:gd name="adj" fmla="val 9302"/>
+            </a:avLst>
+          </a:prstGeom>
+          <a:solidFill xmlns:a="http://schemas.openxmlformats.org/drawingml/2006/main">
+            <a:srgbClr val="F8E9EA"/>
+          </a:solidFill>
+          <a:ln xmlns:a="http://schemas.openxmlformats.org/drawingml/2006/main" w="0">
+            <a:noFill/>
+            <a:prstDash val="solid"/>
+          </a:ln>
+        </p:spPr>
+        <p:txBody>
+          <a:bodyPr xmlns:a="http://schemas.openxmlformats.org/drawingml/2006/main" lIns="76200" tIns="38100" rIns="76200" bIns="38100" anchor="ctr"/>
+          <a:lstStyle xmlns:a="http://schemas.openxmlformats.org/drawingml/2006/main"/>
+          <a:p xmlns:a="http://schemas.openxmlformats.org/drawingml/2006/main">
+            <a:pPr algn="ctr">
+              <a:lnSpc>
+                <a:spcPct val="116000"/>
+              </a:lnSpc>
+              <a:buNone/>
+              <a:defRPr sz="1875" b="1">
+                <a:solidFill>
+                  <a:srgbClr val="C8161E"/>
+                </a:solidFill>
+              </a:defRPr>
+            </a:pPr>
+            <a:r>
+              <a:rPr sz="1875" b="1">
+                <a:solidFill>
+                  <a:srgbClr val="C8161E"/>
+                </a:solidFill>
+                <a:latin typeface="Microsoft YaHei"/>
+                <a:ea typeface="Microsoft YaHei"/>
+                <a:cs typeface="Microsoft YaHei"/>
+              </a:rPr>
+              <a:t>关键边界：AI 输出只提供阅读线索；关键主张必须绑定原文位置，并由研究者作最终判断。</a:t>
+            </a:r>
+          </a:p>
+        </p:txBody>
+      </p:sp>
+    </p:spTree>
+    <p:extLst>
+      <p:ext uri="{BB962C8B-B14F-4D97-AF65-F5344CB8AC3E}">
+        <p14:creationId xmlns:p14="http://schemas.microsoft.com/office/powerpoint/2010/main" val="1443728403"/>
+      </p:ext>
+    </p:extLst>
+  </p:cSld>
+</p:sld>
+</file>
+
+<file path=ppt/slides/slide18.xml><?xml version="1.0" encoding="utf-8"?>
+<p:sld xmlns:p="http://schemas.openxmlformats.org/presentationml/2006/main">
+  <p:cSld>
+    <p:spTree>
+      <p:nvGrpSpPr>
+        <p:cNvPr id="1" name=""/>
+        <p:cNvGrpSpPr/>
+        <p:nvPr/>
+      </p:nvGrpSpPr>
+      <p:grpSpPr>
+        <a:xfrm xmlns:a="http://schemas.openxmlformats.org/drawingml/2006/main"/>
+      </p:grpSpPr>
+      <p:sp>
+        <p:nvSpPr>
+          <p:cNvPr id="4" name="Text Placeholder 3">
+            <a:extLst xmlns:a="http://schemas.openxmlformats.org/drawingml/2006/main">
+              <a:ext uri="{FF2B5EF4-FFF2-40B4-BE49-F238E27FC236}">
+                <a16:creationId xmlns:a16="http://schemas.microsoft.com/office/drawing/2014/main" id="{4D941B40-7A0A-534E-3563-CA11753C8E3F}"/>
+              </a:ext>
+            </a:extLst>
+          </p:cNvPr>
+          <p:cNvSpPr>
+            <a:spLocks xmlns:a="http://schemas.openxmlformats.org/drawingml/2006/main" noGrp="1"/>
+          </p:cNvSpPr>
+          <p:nvPr>
+            <p:ph type="body" idx="14"/>
+          </p:nvPr>
+        </p:nvSpPr>
+        <p:spPr>
+          <a:xfrm xmlns:a="http://schemas.openxmlformats.org/drawingml/2006/main">
+            <a:off x="1028700" y="28575"/>
+            <a:ext cx="10668000" cy="628650"/>
+          </a:xfrm>
+        </p:spPr>
+        <p:txBody>
+          <a:bodyPr xmlns:a="http://schemas.openxmlformats.org/drawingml/2006/main" lIns="76200" tIns="0" rIns="76200" bIns="0" anchor="ctr"/>
+          <a:lstStyle xmlns:a="http://schemas.openxmlformats.org/drawingml/2006/main"/>
+          <a:p xmlns:a="http://schemas.openxmlformats.org/drawingml/2006/main">
+            <a:pPr algn="l"/>
+            <a:r>
+              <a:rPr sz="2250" b="1">
+                <a:solidFill>
+                  <a:srgbClr val="FFFFFF"/>
+                </a:solidFill>
+                <a:latin typeface="Microsoft YaHei"/>
+                <a:ea typeface="Microsoft YaHei"/>
+                <a:cs typeface="Microsoft YaHei"/>
+              </a:rPr>
+              <a:t>退出卡与第 5 课预告</a:t>
+            </a:r>
+            <a:endParaRPr/>
+          </a:p>
+        </p:txBody>
+      </p:sp>
+      <p:sp>
+        <p:nvSpPr>
+          <p:cNvPr id="5" name="Slide Number Placeholder 4">
+            <a:extLst xmlns:a="http://schemas.openxmlformats.org/drawingml/2006/main">
+              <a:ext uri="{FF2B5EF4-FFF2-40B4-BE49-F238E27FC236}">
+                <a16:creationId xmlns:a16="http://schemas.microsoft.com/office/drawing/2014/main" id="{EBA5909F-738E-F60C-BE8C-B3F1D94548E5}"/>
+              </a:ext>
+            </a:extLst>
+          </p:cNvPr>
+          <p:cNvSpPr>
+            <a:spLocks xmlns:a="http://schemas.openxmlformats.org/drawingml/2006/main" noGrp="1"/>
+          </p:cNvSpPr>
+          <p:nvPr>
+            <p:ph type="sldNum" idx="10"/>
+          </p:nvPr>
+        </p:nvSpPr>
+        <p:spPr/>
+        <p:txBody>
+          <a:bodyPr xmlns:a="http://schemas.openxmlformats.org/drawingml/2006/main"/>
+          <a:lstStyle xmlns:a="http://schemas.openxmlformats.org/drawingml/2006/main"/>
+          <a:p xmlns:a="http://schemas.openxmlformats.org/drawingml/2006/main">
+            <a:fld id="{B1C6C81E-38B9-7560-621D-5A151A79DF9B}" type="slidenum">
+              <a:t>18</a:t>
+            </a:fld>
+            <a:endParaRPr/>
+          </a:p>
+        </p:txBody>
+      </p:sp>
+      <p:sp>
+        <p:nvSpPr>
+          <p:cNvPr id="6" name="p18-exit-title">
+            <a:extLst xmlns:a="http://schemas.openxmlformats.org/drawingml/2006/main">
+              <a:ext uri="{FF2B5EF4-FFF2-40B4-BE49-F238E27FC236}">
+                <a16:creationId xmlns:a16="http://schemas.microsoft.com/office/drawing/2014/main" id="{2082A2D8-8ED5-4252-B253-229A1F7EEBCB}"/>
+              </a:ext>
+            </a:extLst>
+          </p:cNvPr>
+          <p:cNvSpPr>
+            <a:spLocks xmlns:a="http://schemas.openxmlformats.org/drawingml/2006/main" noGrp="1"/>
+          </p:cNvSpPr>
+          <p:nvPr/>
+        </p:nvSpPr>
+        <p:spPr>
+          <a:xfrm xmlns:a="http://schemas.openxmlformats.org/drawingml/2006/main">
+            <a:off x="552450" y="990600"/>
+            <a:ext cx="4095750" cy="457200"/>
+          </a:xfrm>
+          <a:prstGeom xmlns:a="http://schemas.openxmlformats.org/drawingml/2006/main" prst="rect">
+            <a:avLst/>
+          </a:prstGeom>
+          <a:noFill xmlns:a="http://schemas.openxmlformats.org/drawingml/2006/main"/>
+          <a:ln xmlns:a="http://schemas.openxmlformats.org/drawingml/2006/main" w="0">
+            <a:noFill/>
+            <a:prstDash val="solid"/>
+          </a:ln>
+        </p:spPr>
+        <p:txBody>
+          <a:bodyPr xmlns:a="http://schemas.openxmlformats.org/drawingml/2006/main" lIns="76200" tIns="38100" rIns="76200" bIns="38100" anchor="ctr"/>
+          <a:lstStyle xmlns:a="http://schemas.openxmlformats.org/drawingml/2006/main"/>
+          <a:p xmlns:a="http://schemas.openxmlformats.org/drawingml/2006/main">
             <a:pPr algn="l">
               <a:defRPr sz="1950" b="1">
                 <a:solidFill>
@@ -11102,10 +10708,10 @@
       </p:sp>
       <p:sp>
         <p:nvSpPr>
-          <p:cNvPr id="7" name="p17-exit">
-            <a:extLst xmlns:a="http://schemas.openxmlformats.org/drawingml/2006/main">
-              <a:ext uri="{FF2B5EF4-FFF2-40B4-BE49-F238E27FC236}">
-                <a16:creationId xmlns:a16="http://schemas.microsoft.com/office/drawing/2014/main" id="{A0A8CDD9-6616-4DDA-9D3C-16E36F948985}"/>
+          <p:cNvPr id="7" name="p18-exit">
+            <a:extLst xmlns:a="http://schemas.openxmlformats.org/drawingml/2006/main">
+              <a:ext uri="{FF2B5EF4-FFF2-40B4-BE49-F238E27FC236}">
+                <a16:creationId xmlns:a16="http://schemas.microsoft.com/office/drawing/2014/main" id="{F8FCB0A1-D95E-458D-A754-468FCEEA2F78}"/>
               </a:ext>
             </a:extLst>
           </p:cNvPr>
@@ -11233,10 +10839,10 @@
       </p:sp>
       <p:sp>
         <p:nvSpPr>
-          <p:cNvPr id="8" name="p17-next-title">
-            <a:extLst xmlns:a="http://schemas.openxmlformats.org/drawingml/2006/main">
-              <a:ext uri="{FF2B5EF4-FFF2-40B4-BE49-F238E27FC236}">
-                <a16:creationId xmlns:a16="http://schemas.microsoft.com/office/drawing/2014/main" id="{D07859E5-5758-4839-9BBD-4E846EEE5B26}"/>
+          <p:cNvPr id="8" name="p18-next-title">
+            <a:extLst xmlns:a="http://schemas.openxmlformats.org/drawingml/2006/main">
+              <a:ext uri="{FF2B5EF4-FFF2-40B4-BE49-F238E27FC236}">
+                <a16:creationId xmlns:a16="http://schemas.microsoft.com/office/drawing/2014/main" id="{B51853A8-E875-4F2F-BE3B-3A10B084E191}"/>
               </a:ext>
             </a:extLst>
           </p:cNvPr>
@@ -11286,10 +10892,10 @@
       </p:sp>
       <p:sp>
         <p:nvSpPr>
-          <p:cNvPr id="9" name="p17-a">
-            <a:extLst xmlns:a="http://schemas.openxmlformats.org/drawingml/2006/main">
-              <a:ext uri="{FF2B5EF4-FFF2-40B4-BE49-F238E27FC236}">
-                <a16:creationId xmlns:a16="http://schemas.microsoft.com/office/drawing/2014/main" id="{F3F11CE8-800A-446F-92A2-8C0E240B39E9}"/>
+          <p:cNvPr id="9" name="p18-a">
+            <a:extLst xmlns:a="http://schemas.openxmlformats.org/drawingml/2006/main">
+              <a:ext uri="{FF2B5EF4-FFF2-40B4-BE49-F238E27FC236}">
+                <a16:creationId xmlns:a16="http://schemas.microsoft.com/office/drawing/2014/main" id="{24C3E873-CCE4-4BBF-9CE2-637B76597C91}"/>
               </a:ext>
             </a:extLst>
           </p:cNvPr>
@@ -11347,10 +10953,10 @@
       </p:sp>
       <p:sp>
         <p:nvSpPr>
-          <p:cNvPr id="10" name="p17-a1">
-            <a:extLst xmlns:a="http://schemas.openxmlformats.org/drawingml/2006/main">
-              <a:ext uri="{FF2B5EF4-FFF2-40B4-BE49-F238E27FC236}">
-                <a16:creationId xmlns:a16="http://schemas.microsoft.com/office/drawing/2014/main" id="{EC9DDF79-EF22-4743-822E-7E6CF4D4B1C6}"/>
+          <p:cNvPr id="10" name="p18-a1">
+            <a:extLst xmlns:a="http://schemas.openxmlformats.org/drawingml/2006/main">
+              <a:ext uri="{FF2B5EF4-FFF2-40B4-BE49-F238E27FC236}">
+                <a16:creationId xmlns:a16="http://schemas.microsoft.com/office/drawing/2014/main" id="{16D0E489-C3EA-403A-A02A-A8D16EFEEE0A}"/>
               </a:ext>
             </a:extLst>
           </p:cNvPr>
@@ -11400,10 +11006,10 @@
       </p:sp>
       <p:sp>
         <p:nvSpPr>
-          <p:cNvPr id="11" name="p17-b">
-            <a:extLst xmlns:a="http://schemas.openxmlformats.org/drawingml/2006/main">
-              <a:ext uri="{FF2B5EF4-FFF2-40B4-BE49-F238E27FC236}">
-                <a16:creationId xmlns:a16="http://schemas.microsoft.com/office/drawing/2014/main" id="{D90E8804-E0C8-445E-B90A-AA223A47E37B}"/>
+          <p:cNvPr id="11" name="p18-b">
+            <a:extLst xmlns:a="http://schemas.openxmlformats.org/drawingml/2006/main">
+              <a:ext uri="{FF2B5EF4-FFF2-40B4-BE49-F238E27FC236}">
+                <a16:creationId xmlns:a16="http://schemas.microsoft.com/office/drawing/2014/main" id="{3DEC9E91-8CCB-49EA-9261-F4822FAE1894}"/>
               </a:ext>
             </a:extLst>
           </p:cNvPr>
@@ -11485,10 +11091,10 @@
       </p:sp>
       <p:sp>
         <p:nvSpPr>
-          <p:cNvPr id="12" name="p17-a2">
-            <a:extLst xmlns:a="http://schemas.openxmlformats.org/drawingml/2006/main">
-              <a:ext uri="{FF2B5EF4-FFF2-40B4-BE49-F238E27FC236}">
-                <a16:creationId xmlns:a16="http://schemas.microsoft.com/office/drawing/2014/main" id="{89AFF5A7-0BE9-4B24-9FD8-416F4020DB91}"/>
+          <p:cNvPr id="12" name="p18-a2">
+            <a:extLst xmlns:a="http://schemas.openxmlformats.org/drawingml/2006/main">
+              <a:ext uri="{FF2B5EF4-FFF2-40B4-BE49-F238E27FC236}">
+                <a16:creationId xmlns:a16="http://schemas.microsoft.com/office/drawing/2014/main" id="{792BF681-7413-46DE-8959-8377CB78B9C7}"/>
               </a:ext>
             </a:extLst>
           </p:cNvPr>
@@ -11538,10 +11144,10 @@
       </p:sp>
       <p:sp>
         <p:nvSpPr>
-          <p:cNvPr id="13" name="p17-c">
-            <a:extLst xmlns:a="http://schemas.openxmlformats.org/drawingml/2006/main">
-              <a:ext uri="{FF2B5EF4-FFF2-40B4-BE49-F238E27FC236}">
-                <a16:creationId xmlns:a16="http://schemas.microsoft.com/office/drawing/2014/main" id="{639CBDBD-3AC3-4EEB-9B6D-10D5FE109B6C}"/>
+          <p:cNvPr id="13" name="p18-c">
+            <a:extLst xmlns:a="http://schemas.openxmlformats.org/drawingml/2006/main">
+              <a:ext uri="{FF2B5EF4-FFF2-40B4-BE49-F238E27FC236}">
+                <a16:creationId xmlns:a16="http://schemas.microsoft.com/office/drawing/2014/main" id="{49463324-DA66-4CD4-8C0F-28DED81D30C9}"/>
               </a:ext>
             </a:extLst>
           </p:cNvPr>
@@ -11623,10 +11229,10 @@
       </p:sp>
       <p:sp>
         <p:nvSpPr>
-          <p:cNvPr id="14" name="p17-three">
-            <a:extLst xmlns:a="http://schemas.openxmlformats.org/drawingml/2006/main">
-              <a:ext uri="{FF2B5EF4-FFF2-40B4-BE49-F238E27FC236}">
-                <a16:creationId xmlns:a16="http://schemas.microsoft.com/office/drawing/2014/main" id="{0C0069A6-45B6-4FFA-AD51-B5FEB0ED5982}"/>
+          <p:cNvPr id="14" name="p18-three">
+            <a:extLst xmlns:a="http://schemas.openxmlformats.org/drawingml/2006/main">
+              <a:ext uri="{FF2B5EF4-FFF2-40B4-BE49-F238E27FC236}">
+                <a16:creationId xmlns:a16="http://schemas.microsoft.com/office/drawing/2014/main" id="{1A314530-B197-4B00-982B-4E253C170151}"/>
               </a:ext>
             </a:extLst>
           </p:cNvPr>
@@ -11678,10 +11284,10 @@
       </p:sp>
       <p:sp>
         <p:nvSpPr>
-          <p:cNvPr id="15" name="p17-no-weekly">
-            <a:extLst xmlns:a="http://schemas.openxmlformats.org/drawingml/2006/main">
-              <a:ext uri="{FF2B5EF4-FFF2-40B4-BE49-F238E27FC236}">
-                <a16:creationId xmlns:a16="http://schemas.microsoft.com/office/drawing/2014/main" id="{6EF356B9-CECF-486A-982D-81B6FA189178}"/>
+          <p:cNvPr id="15" name="p18-no-weekly">
+            <a:extLst xmlns:a="http://schemas.openxmlformats.org/drawingml/2006/main">
+              <a:ext uri="{FF2B5EF4-FFF2-40B4-BE49-F238E27FC236}">
+                <a16:creationId xmlns:a16="http://schemas.microsoft.com/office/drawing/2014/main" id="{0F5A1551-C4E1-438F-9920-21080E680F93}"/>
               </a:ext>
             </a:extLst>
           </p:cNvPr>
@@ -11826,7 +11432,7 @@
           <p:cNvPr id="6" name="p02-left-title">
             <a:extLst xmlns:a="http://schemas.openxmlformats.org/drawingml/2006/main">
               <a:ext uri="{FF2B5EF4-FFF2-40B4-BE49-F238E27FC236}">
-                <a16:creationId xmlns:a16="http://schemas.microsoft.com/office/drawing/2014/main" id="{1F4D2722-484B-4129-8D7D-EC52B496DEBA}"/>
+                <a16:creationId xmlns:a16="http://schemas.microsoft.com/office/drawing/2014/main" id="{57B9165E-7429-4A67-9F11-A2E5A2F31399}"/>
               </a:ext>
             </a:extLst>
           </p:cNvPr>
@@ -11879,7 +11485,7 @@
           <p:cNvPr id="7" name="p02-left">
             <a:extLst xmlns:a="http://schemas.openxmlformats.org/drawingml/2006/main">
               <a:ext uri="{FF2B5EF4-FFF2-40B4-BE49-F238E27FC236}">
-                <a16:creationId xmlns:a16="http://schemas.microsoft.com/office/drawing/2014/main" id="{40FC861C-DB1B-4FFD-9A8B-6D2C7B96BEBE}"/>
+                <a16:creationId xmlns:a16="http://schemas.microsoft.com/office/drawing/2014/main" id="{8D5925B0-4CF2-4515-85AF-83A08BDB8745}"/>
               </a:ext>
             </a:extLst>
           </p:cNvPr>
@@ -11986,7 +11592,7 @@
           <p:cNvPr id="8" name="p02-right-title">
             <a:extLst xmlns:a="http://schemas.openxmlformats.org/drawingml/2006/main">
               <a:ext uri="{FF2B5EF4-FFF2-40B4-BE49-F238E27FC236}">
-                <a16:creationId xmlns:a16="http://schemas.microsoft.com/office/drawing/2014/main" id="{67C23FF1-F6CF-4252-A082-AB6987F94A37}"/>
+                <a16:creationId xmlns:a16="http://schemas.microsoft.com/office/drawing/2014/main" id="{B7BF6DD5-6E0D-44C2-85F8-654A731042FE}"/>
               </a:ext>
             </a:extLst>
           </p:cNvPr>
@@ -12039,7 +11645,7 @@
           <p:cNvPr id="9" name="p02-right">
             <a:extLst xmlns:a="http://schemas.openxmlformats.org/drawingml/2006/main">
               <a:ext uri="{FF2B5EF4-FFF2-40B4-BE49-F238E27FC236}">
-                <a16:creationId xmlns:a16="http://schemas.microsoft.com/office/drawing/2014/main" id="{AA640B62-10A0-49EB-8800-F21B33A0A3E4}"/>
+                <a16:creationId xmlns:a16="http://schemas.microsoft.com/office/drawing/2014/main" id="{27FDAE17-93BC-457D-ACE1-F6F2099492E6}"/>
               </a:ext>
             </a:extLst>
           </p:cNvPr>
@@ -12146,7 +11752,7 @@
           <p:cNvPr id="10" name="p02-neq">
             <a:extLst xmlns:a="http://schemas.openxmlformats.org/drawingml/2006/main">
               <a:ext uri="{FF2B5EF4-FFF2-40B4-BE49-F238E27FC236}">
-                <a16:creationId xmlns:a16="http://schemas.microsoft.com/office/drawing/2014/main" id="{267C3AE5-52FC-4415-954B-D5D61401D5E9}"/>
+                <a16:creationId xmlns:a16="http://schemas.microsoft.com/office/drawing/2014/main" id="{3F6B814C-6736-486A-A329-E43A9014B5EF}"/>
               </a:ext>
             </a:extLst>
           </p:cNvPr>
@@ -12199,7 +11805,7 @@
           <p:cNvPr id="11" name="p02-thesis">
             <a:extLst xmlns:a="http://schemas.openxmlformats.org/drawingml/2006/main">
               <a:ext uri="{FF2B5EF4-FFF2-40B4-BE49-F238E27FC236}">
-                <a16:creationId xmlns:a16="http://schemas.microsoft.com/office/drawing/2014/main" id="{14A8781F-C27A-4400-871D-884E016734EA}"/>
+                <a16:creationId xmlns:a16="http://schemas.microsoft.com/office/drawing/2014/main" id="{53498179-5F5B-457B-BC9A-1888B235E97E}"/>
               </a:ext>
             </a:extLst>
           </p:cNvPr>
@@ -12346,7 +11952,7 @@
           <p:cNvPr id="6" name="p03-n-0">
             <a:extLst xmlns:a="http://schemas.openxmlformats.org/drawingml/2006/main">
               <a:ext uri="{FF2B5EF4-FFF2-40B4-BE49-F238E27FC236}">
-                <a16:creationId xmlns:a16="http://schemas.microsoft.com/office/drawing/2014/main" id="{343FD71E-E974-41D7-8A6D-7B3FEA501D58}"/>
+                <a16:creationId xmlns:a16="http://schemas.microsoft.com/office/drawing/2014/main" id="{40274D9A-CDDC-46E7-8EC1-98E33D7F53A1}"/>
               </a:ext>
             </a:extLst>
           </p:cNvPr>
@@ -12403,7 +12009,7 @@
           <p:cNvPr id="7" name="p03-goal-0">
             <a:extLst xmlns:a="http://schemas.openxmlformats.org/drawingml/2006/main">
               <a:ext uri="{FF2B5EF4-FFF2-40B4-BE49-F238E27FC236}">
-                <a16:creationId xmlns:a16="http://schemas.microsoft.com/office/drawing/2014/main" id="{3A93FD77-9618-4FAF-8F6F-B4DABC21A2C7}"/>
+                <a16:creationId xmlns:a16="http://schemas.microsoft.com/office/drawing/2014/main" id="{BA37791D-8B38-413C-89E5-E7B306AFD592}"/>
               </a:ext>
             </a:extLst>
           </p:cNvPr>
@@ -12460,7 +12066,7 @@
           <p:cNvPr id="8" name="p03-n-1">
             <a:extLst xmlns:a="http://schemas.openxmlformats.org/drawingml/2006/main">
               <a:ext uri="{FF2B5EF4-FFF2-40B4-BE49-F238E27FC236}">
-                <a16:creationId xmlns:a16="http://schemas.microsoft.com/office/drawing/2014/main" id="{143679E6-6DB1-4D42-B79F-6F50FB19ED3D}"/>
+                <a16:creationId xmlns:a16="http://schemas.microsoft.com/office/drawing/2014/main" id="{3040FFD2-A7E4-4637-8B37-8606E4458FCB}"/>
               </a:ext>
             </a:extLst>
           </p:cNvPr>
@@ -12517,7 +12123,7 @@
           <p:cNvPr id="9" name="p03-goal-1">
             <a:extLst xmlns:a="http://schemas.openxmlformats.org/drawingml/2006/main">
               <a:ext uri="{FF2B5EF4-FFF2-40B4-BE49-F238E27FC236}">
-                <a16:creationId xmlns:a16="http://schemas.microsoft.com/office/drawing/2014/main" id="{F596F6CB-A991-4ACC-9D03-02BC98D32E72}"/>
+                <a16:creationId xmlns:a16="http://schemas.microsoft.com/office/drawing/2014/main" id="{082A66A4-8914-4BA3-925E-73DB3E8BCFE8}"/>
               </a:ext>
             </a:extLst>
           </p:cNvPr>
@@ -12574,7 +12180,7 @@
           <p:cNvPr id="10" name="p03-n-2">
             <a:extLst xmlns:a="http://schemas.openxmlformats.org/drawingml/2006/main">
               <a:ext uri="{FF2B5EF4-FFF2-40B4-BE49-F238E27FC236}">
-                <a16:creationId xmlns:a16="http://schemas.microsoft.com/office/drawing/2014/main" id="{5DDF578B-DC24-4637-AFC0-5267D03E67C5}"/>
+                <a16:creationId xmlns:a16="http://schemas.microsoft.com/office/drawing/2014/main" id="{87643DE3-13AA-4E57-AEE0-528F4154B607}"/>
               </a:ext>
             </a:extLst>
           </p:cNvPr>
@@ -12631,7 +12237,7 @@
           <p:cNvPr id="11" name="p03-goal-2">
             <a:extLst xmlns:a="http://schemas.openxmlformats.org/drawingml/2006/main">
               <a:ext uri="{FF2B5EF4-FFF2-40B4-BE49-F238E27FC236}">
-                <a16:creationId xmlns:a16="http://schemas.microsoft.com/office/drawing/2014/main" id="{420CFB33-EC51-4141-862F-5797C1B61720}"/>
+                <a16:creationId xmlns:a16="http://schemas.microsoft.com/office/drawing/2014/main" id="{E1CE566C-7D43-4D5A-BBDF-B15689F341C3}"/>
               </a:ext>
             </a:extLst>
           </p:cNvPr>
@@ -12688,7 +12294,7 @@
           <p:cNvPr id="12" name="p03-n-3">
             <a:extLst xmlns:a="http://schemas.openxmlformats.org/drawingml/2006/main">
               <a:ext uri="{FF2B5EF4-FFF2-40B4-BE49-F238E27FC236}">
-                <a16:creationId xmlns:a16="http://schemas.microsoft.com/office/drawing/2014/main" id="{A3C41243-3A6F-4B3B-80F0-1F4985391FA0}"/>
+                <a16:creationId xmlns:a16="http://schemas.microsoft.com/office/drawing/2014/main" id="{9A3FE85F-E28A-4F23-ACE6-B3BCB98BBB38}"/>
               </a:ext>
             </a:extLst>
           </p:cNvPr>
@@ -12745,7 +12351,7 @@
           <p:cNvPr id="13" name="p03-goal-3">
             <a:extLst xmlns:a="http://schemas.openxmlformats.org/drawingml/2006/main">
               <a:ext uri="{FF2B5EF4-FFF2-40B4-BE49-F238E27FC236}">
-                <a16:creationId xmlns:a16="http://schemas.microsoft.com/office/drawing/2014/main" id="{745F5A63-6301-46C6-B51C-EC56BB06A725}"/>
+                <a16:creationId xmlns:a16="http://schemas.microsoft.com/office/drawing/2014/main" id="{B2C3158B-F599-49E6-B8A0-AD18A84CCEDE}"/>
               </a:ext>
             </a:extLst>
           </p:cNvPr>
@@ -12802,7 +12408,7 @@
           <p:cNvPr id="14" name="p03-output-title">
             <a:extLst xmlns:a="http://schemas.openxmlformats.org/drawingml/2006/main">
               <a:ext uri="{FF2B5EF4-FFF2-40B4-BE49-F238E27FC236}">
-                <a16:creationId xmlns:a16="http://schemas.microsoft.com/office/drawing/2014/main" id="{1AA3235E-F145-4373-90CB-C5F74E91F55E}"/>
+                <a16:creationId xmlns:a16="http://schemas.microsoft.com/office/drawing/2014/main" id="{27F11694-419D-4BF5-8B58-DC3D4170685A}"/>
               </a:ext>
             </a:extLst>
           </p:cNvPr>
@@ -12857,7 +12463,7 @@
           <p:cNvPr id="15" name="p03-output">
             <a:extLst xmlns:a="http://schemas.openxmlformats.org/drawingml/2006/main">
               <a:ext uri="{FF2B5EF4-FFF2-40B4-BE49-F238E27FC236}">
-                <a16:creationId xmlns:a16="http://schemas.microsoft.com/office/drawing/2014/main" id="{51CE9AF6-4F6A-4600-B5DC-2894693B8A6C}"/>
+                <a16:creationId xmlns:a16="http://schemas.microsoft.com/office/drawing/2014/main" id="{8740BA6A-5081-4BBC-B54A-CC5F96C91DC6}"/>
               </a:ext>
             </a:extLst>
           </p:cNvPr>
@@ -12964,7 +12570,7 @@
           <p:cNvPr id="16" name="p03-gate">
             <a:extLst xmlns:a="http://schemas.openxmlformats.org/drawingml/2006/main">
               <a:ext uri="{FF2B5EF4-FFF2-40B4-BE49-F238E27FC236}">
-                <a16:creationId xmlns:a16="http://schemas.microsoft.com/office/drawing/2014/main" id="{4CCF5D3E-9380-4F80-B02C-EF8D7B3F74C4}"/>
+                <a16:creationId xmlns:a16="http://schemas.microsoft.com/office/drawing/2014/main" id="{7C6F623D-3A97-4249-AD57-B08EEAB1A6BF}"/>
               </a:ext>
             </a:extLst>
           </p:cNvPr>
@@ -13047,7 +12653,7 @@
           <p:cNvPr id="17" name="p03-no-submit">
             <a:extLst xmlns:a="http://schemas.openxmlformats.org/drawingml/2006/main">
               <a:ext uri="{FF2B5EF4-FFF2-40B4-BE49-F238E27FC236}">
-                <a16:creationId xmlns:a16="http://schemas.microsoft.com/office/drawing/2014/main" id="{3E0F7A61-DD76-4369-884D-66F7C7B33108}"/>
+                <a16:creationId xmlns:a16="http://schemas.microsoft.com/office/drawing/2014/main" id="{7BE29A60-B531-4A94-BA73-C761097DDED2}"/>
               </a:ext>
             </a:extLst>
           </p:cNvPr>
@@ -13192,7 +12798,7 @@
           <p:cNvPr id="6" name="p04-fail-label">
             <a:extLst xmlns:a="http://schemas.openxmlformats.org/drawingml/2006/main">
               <a:ext uri="{FF2B5EF4-FFF2-40B4-BE49-F238E27FC236}">
-                <a16:creationId xmlns:a16="http://schemas.microsoft.com/office/drawing/2014/main" id="{A4AA2A2A-CD0C-41F7-B357-EACFFD4A8127}"/>
+                <a16:creationId xmlns:a16="http://schemas.microsoft.com/office/drawing/2014/main" id="{4D23AEF0-97ED-4321-B385-7B17C7A673A8}"/>
               </a:ext>
             </a:extLst>
           </p:cNvPr>
@@ -13245,7 +12851,7 @@
           <p:cNvPr id="7" name="p04-fail">
             <a:extLst xmlns:a="http://schemas.openxmlformats.org/drawingml/2006/main">
               <a:ext uri="{FF2B5EF4-FFF2-40B4-BE49-F238E27FC236}">
-                <a16:creationId xmlns:a16="http://schemas.microsoft.com/office/drawing/2014/main" id="{E27220C6-8810-44B3-B052-AA8E759BC4E4}"/>
+                <a16:creationId xmlns:a16="http://schemas.microsoft.com/office/drawing/2014/main" id="{C7AC15E0-517E-4334-835C-6F9AF2B57758}"/>
               </a:ext>
             </a:extLst>
           </p:cNvPr>
@@ -13388,7 +12994,7 @@
           <p:cNvPr id="8" name="p04-neq">
             <a:extLst xmlns:a="http://schemas.openxmlformats.org/drawingml/2006/main">
               <a:ext uri="{FF2B5EF4-FFF2-40B4-BE49-F238E27FC236}">
-                <a16:creationId xmlns:a16="http://schemas.microsoft.com/office/drawing/2014/main" id="{C78B122C-765A-432D-9997-3E1187CABC31}"/>
+                <a16:creationId xmlns:a16="http://schemas.microsoft.com/office/drawing/2014/main" id="{E8FF7183-723F-4E71-922C-17502F39553C}"/>
               </a:ext>
             </a:extLst>
           </p:cNvPr>
@@ -13441,7 +13047,7 @@
           <p:cNvPr id="9" name="p04-pass-label">
             <a:extLst xmlns:a="http://schemas.openxmlformats.org/drawingml/2006/main">
               <a:ext uri="{FF2B5EF4-FFF2-40B4-BE49-F238E27FC236}">
-                <a16:creationId xmlns:a16="http://schemas.microsoft.com/office/drawing/2014/main" id="{055605AE-F959-4E49-9B20-C48F2F6DF07C}"/>
+                <a16:creationId xmlns:a16="http://schemas.microsoft.com/office/drawing/2014/main" id="{43A8F6B4-73DB-49D4-B8C9-3A978974A601}"/>
               </a:ext>
             </a:extLst>
           </p:cNvPr>
@@ -13494,7 +13100,7 @@
           <p:cNvPr id="10" name="p04-pass">
             <a:extLst xmlns:a="http://schemas.openxmlformats.org/drawingml/2006/main">
               <a:ext uri="{FF2B5EF4-FFF2-40B4-BE49-F238E27FC236}">
-                <a16:creationId xmlns:a16="http://schemas.microsoft.com/office/drawing/2014/main" id="{DC73DD12-261D-4753-A940-FBD7F691D3D9}"/>
+                <a16:creationId xmlns:a16="http://schemas.microsoft.com/office/drawing/2014/main" id="{5E32776F-004A-4519-8209-5747E557B8EC}"/>
               </a:ext>
             </a:extLst>
           </p:cNvPr>
@@ -13661,7 +13267,7 @@
           <p:cNvPr id="11" name="p04-thesis">
             <a:extLst xmlns:a="http://schemas.openxmlformats.org/drawingml/2006/main">
               <a:ext uri="{FF2B5EF4-FFF2-40B4-BE49-F238E27FC236}">
-                <a16:creationId xmlns:a16="http://schemas.microsoft.com/office/drawing/2014/main" id="{ABFAA45E-0D57-4115-B39B-1CB5EB614472}"/>
+                <a16:creationId xmlns:a16="http://schemas.microsoft.com/office/drawing/2014/main" id="{0FABA82B-F226-4C3D-BE94-7AB2B2A38B39}"/>
               </a:ext>
             </a:extLst>
           </p:cNvPr>
@@ -13806,7 +13412,7 @@
           <p:cNvPr id="6" name="p05-map-title">
             <a:extLst xmlns:a="http://schemas.openxmlformats.org/drawingml/2006/main">
               <a:ext uri="{FF2B5EF4-FFF2-40B4-BE49-F238E27FC236}">
-                <a16:creationId xmlns:a16="http://schemas.microsoft.com/office/drawing/2014/main" id="{B553B9BE-7327-4384-9ED0-EBF0784E87FA}"/>
+                <a16:creationId xmlns:a16="http://schemas.microsoft.com/office/drawing/2014/main" id="{DD46648F-0036-4F5C-851B-1C4DC0634215}"/>
               </a:ext>
             </a:extLst>
           </p:cNvPr>
@@ -13859,7 +13465,7 @@
           <p:cNvPr id="7" name="p05-item-0">
             <a:extLst xmlns:a="http://schemas.openxmlformats.org/drawingml/2006/main">
               <a:ext uri="{FF2B5EF4-FFF2-40B4-BE49-F238E27FC236}">
-                <a16:creationId xmlns:a16="http://schemas.microsoft.com/office/drawing/2014/main" id="{D4368D0D-973E-4D05-8CFB-755D3B83FABC}"/>
+                <a16:creationId xmlns:a16="http://schemas.microsoft.com/office/drawing/2014/main" id="{173C8FDE-ABB2-42BB-90F3-A77709A0D9B5}"/>
               </a:ext>
             </a:extLst>
           </p:cNvPr>
@@ -13920,7 +13526,7 @@
           <p:cNvPr id="8" name="p05-item-1">
             <a:extLst xmlns:a="http://schemas.openxmlformats.org/drawingml/2006/main">
               <a:ext uri="{FF2B5EF4-FFF2-40B4-BE49-F238E27FC236}">
-                <a16:creationId xmlns:a16="http://schemas.microsoft.com/office/drawing/2014/main" id="{6B254B42-98E6-4290-928B-3364CCB75568}"/>
+                <a16:creationId xmlns:a16="http://schemas.microsoft.com/office/drawing/2014/main" id="{636E2642-73E8-4DCC-8BA4-2F52CFE56193}"/>
               </a:ext>
             </a:extLst>
           </p:cNvPr>
@@ -13981,7 +13587,7 @@
           <p:cNvPr id="9" name="p05-item-2">
             <a:extLst xmlns:a="http://schemas.openxmlformats.org/drawingml/2006/main">
               <a:ext uri="{FF2B5EF4-FFF2-40B4-BE49-F238E27FC236}">
-                <a16:creationId xmlns:a16="http://schemas.microsoft.com/office/drawing/2014/main" id="{205B6FC3-AF76-42B4-A405-629320B46915}"/>
+                <a16:creationId xmlns:a16="http://schemas.microsoft.com/office/drawing/2014/main" id="{E82ADDF4-9571-4E52-9DD6-4B09CB0F3F30}"/>
               </a:ext>
             </a:extLst>
           </p:cNvPr>
@@ -14042,7 +13648,7 @@
           <p:cNvPr id="10" name="p05-item-3">
             <a:extLst xmlns:a="http://schemas.openxmlformats.org/drawingml/2006/main">
               <a:ext uri="{FF2B5EF4-FFF2-40B4-BE49-F238E27FC236}">
-                <a16:creationId xmlns:a16="http://schemas.microsoft.com/office/drawing/2014/main" id="{1A32D447-7866-40C9-B8EA-616238295212}"/>
+                <a16:creationId xmlns:a16="http://schemas.microsoft.com/office/drawing/2014/main" id="{62D3DB32-39B7-4F5C-A8A3-D86C85AC156C}"/>
               </a:ext>
             </a:extLst>
           </p:cNvPr>
@@ -14103,7 +13709,7 @@
           <p:cNvPr id="11" name="p05-item-4">
             <a:extLst xmlns:a="http://schemas.openxmlformats.org/drawingml/2006/main">
               <a:ext uri="{FF2B5EF4-FFF2-40B4-BE49-F238E27FC236}">
-                <a16:creationId xmlns:a16="http://schemas.microsoft.com/office/drawing/2014/main" id="{FAF560D9-5062-42DB-AA46-99DF3C436F57}"/>
+                <a16:creationId xmlns:a16="http://schemas.microsoft.com/office/drawing/2014/main" id="{6CD69999-DE29-4B99-8359-C456A81C49EA}"/>
               </a:ext>
             </a:extLst>
           </p:cNvPr>
@@ -14164,7 +13770,7 @@
           <p:cNvPr id="12" name="p05-arrow">
             <a:extLst xmlns:a="http://schemas.openxmlformats.org/drawingml/2006/main">
               <a:ext uri="{FF2B5EF4-FFF2-40B4-BE49-F238E27FC236}">
-                <a16:creationId xmlns:a16="http://schemas.microsoft.com/office/drawing/2014/main" id="{1F4F18CE-89FF-459A-8B3E-53322D5BC55E}"/>
+                <a16:creationId xmlns:a16="http://schemas.microsoft.com/office/drawing/2014/main" id="{41123369-9CBF-47DB-AABC-08E0DB50A013}"/>
               </a:ext>
             </a:extLst>
           </p:cNvPr>
@@ -14217,7 +13823,7 @@
           <p:cNvPr id="13" name="p05-output">
             <a:extLst xmlns:a="http://schemas.openxmlformats.org/drawingml/2006/main">
               <a:ext uri="{FF2B5EF4-FFF2-40B4-BE49-F238E27FC236}">
-                <a16:creationId xmlns:a16="http://schemas.microsoft.com/office/drawing/2014/main" id="{3496277D-5D72-4D5E-8DE7-7624F19C4BD2}"/>
+                <a16:creationId xmlns:a16="http://schemas.microsoft.com/office/drawing/2014/main" id="{4FA7AFFB-C21B-4280-A29E-3D9584E86C71}"/>
               </a:ext>
             </a:extLst>
           </p:cNvPr>
@@ -14270,7 +13876,7 @@
           <p:cNvPr id="14" name="p05-unverified">
             <a:extLst xmlns:a="http://schemas.openxmlformats.org/drawingml/2006/main">
               <a:ext uri="{FF2B5EF4-FFF2-40B4-BE49-F238E27FC236}">
-                <a16:creationId xmlns:a16="http://schemas.microsoft.com/office/drawing/2014/main" id="{D194DD11-7F8F-4DEB-AB3B-2DE949ED2668}"/>
+                <a16:creationId xmlns:a16="http://schemas.microsoft.com/office/drawing/2014/main" id="{C14894CF-7B53-48F3-AAC9-2A536A20CFF0}"/>
               </a:ext>
             </a:extLst>
           </p:cNvPr>
@@ -14329,7 +13935,7 @@
           <p:cNvPr id="15" name="p05-next">
             <a:extLst xmlns:a="http://schemas.openxmlformats.org/drawingml/2006/main">
               <a:ext uri="{FF2B5EF4-FFF2-40B4-BE49-F238E27FC236}">
-                <a16:creationId xmlns:a16="http://schemas.microsoft.com/office/drawing/2014/main" id="{0103B1FE-0E78-4778-80D5-E7B5B5C57D61}"/>
+                <a16:creationId xmlns:a16="http://schemas.microsoft.com/office/drawing/2014/main" id="{C3AE0199-7AF3-4C0C-B5D0-810B8F68E85E}"/>
               </a:ext>
             </a:extLst>
           </p:cNvPr>
@@ -14502,7 +14108,7 @@
           <p:cNvPr id="6" name="p06-locator">
             <a:extLst xmlns:a="http://schemas.openxmlformats.org/drawingml/2006/main">
               <a:ext uri="{FF2B5EF4-FFF2-40B4-BE49-F238E27FC236}">
-                <a16:creationId xmlns:a16="http://schemas.microsoft.com/office/drawing/2014/main" id="{0785D2B2-25C9-40EB-9BAD-A3693F0AC294}"/>
+                <a16:creationId xmlns:a16="http://schemas.microsoft.com/office/drawing/2014/main" id="{5B604996-2F82-4184-B528-088A345D3336}"/>
               </a:ext>
             </a:extLst>
           </p:cNvPr>
@@ -14557,7 +14163,7 @@
           <p:cNvPr id="7" name="p06-table-h-0">
             <a:extLst xmlns:a="http://schemas.openxmlformats.org/drawingml/2006/main">
               <a:ext uri="{FF2B5EF4-FFF2-40B4-BE49-F238E27FC236}">
-                <a16:creationId xmlns:a16="http://schemas.microsoft.com/office/drawing/2014/main" id="{13BFAEE7-F0F2-4817-8273-D0F83C4546C2}"/>
+                <a16:creationId xmlns:a16="http://schemas.microsoft.com/office/drawing/2014/main" id="{7BB22E2E-4892-47C6-AE68-A96DF0567842}"/>
               </a:ext>
             </a:extLst>
           </p:cNvPr>
@@ -14612,7 +14218,7 @@
           <p:cNvPr id="8" name="p06-table-h-1">
             <a:extLst xmlns:a="http://schemas.openxmlformats.org/drawingml/2006/main">
               <a:ext uri="{FF2B5EF4-FFF2-40B4-BE49-F238E27FC236}">
-                <a16:creationId xmlns:a16="http://schemas.microsoft.com/office/drawing/2014/main" id="{A26052FB-A5D4-405D-BDFE-809C6C3CED76}"/>
+                <a16:creationId xmlns:a16="http://schemas.microsoft.com/office/drawing/2014/main" id="{6893C116-E47C-4BA9-825C-639B97D4A790}"/>
               </a:ext>
             </a:extLst>
           </p:cNvPr>
@@ -14667,7 +14273,7 @@
           <p:cNvPr id="9" name="p06-table-r0-0">
             <a:extLst xmlns:a="http://schemas.openxmlformats.org/drawingml/2006/main">
               <a:ext uri="{FF2B5EF4-FFF2-40B4-BE49-F238E27FC236}">
-                <a16:creationId xmlns:a16="http://schemas.microsoft.com/office/drawing/2014/main" id="{8729CA4A-70F6-4B70-BD3F-676A3284AADA}"/>
+                <a16:creationId xmlns:a16="http://schemas.microsoft.com/office/drawing/2014/main" id="{BEDDE7D1-9919-4771-9834-3FBFDDC942F5}"/>
               </a:ext>
             </a:extLst>
           </p:cNvPr>
@@ -14728,7 +14334,7 @@
           <p:cNvPr id="10" name="p06-table-r0-1">
             <a:extLst xmlns:a="http://schemas.openxmlformats.org/drawingml/2006/main">
               <a:ext uri="{FF2B5EF4-FFF2-40B4-BE49-F238E27FC236}">
-                <a16:creationId xmlns:a16="http://schemas.microsoft.com/office/drawing/2014/main" id="{A66504CF-9825-4F99-9D43-2A27334606C2}"/>
+                <a16:creationId xmlns:a16="http://schemas.microsoft.com/office/drawing/2014/main" id="{B219A4D0-292B-4EAF-9CE4-57B4043B0F8D}"/>
               </a:ext>
             </a:extLst>
           </p:cNvPr>
@@ -14789,7 +14395,7 @@
           <p:cNvPr id="11" name="p06-table-r1-0">
             <a:extLst xmlns:a="http://schemas.openxmlformats.org/drawingml/2006/main">
               <a:ext uri="{FF2B5EF4-FFF2-40B4-BE49-F238E27FC236}">
-                <a16:creationId xmlns:a16="http://schemas.microsoft.com/office/drawing/2014/main" id="{DA2752BC-49FE-422C-AB41-766638B0ED4E}"/>
+                <a16:creationId xmlns:a16="http://schemas.microsoft.com/office/drawing/2014/main" id="{13F3F240-AC66-443C-B4B4-703C211FD562}"/>
               </a:ext>
             </a:extLst>
           </p:cNvPr>
@@ -14850,7 +14456,7 @@
           <p:cNvPr id="12" name="p06-table-r1-1">
             <a:extLst xmlns:a="http://schemas.openxmlformats.org/drawingml/2006/main">
               <a:ext uri="{FF2B5EF4-FFF2-40B4-BE49-F238E27FC236}">
-                <a16:creationId xmlns:a16="http://schemas.microsoft.com/office/drawing/2014/main" id="{724480B7-6DAE-42C5-A87E-5B1D75B1C6D7}"/>
+                <a16:creationId xmlns:a16="http://schemas.microsoft.com/office/drawing/2014/main" id="{74EC085B-56AC-4A92-83B5-21A8FD76907F}"/>
               </a:ext>
             </a:extLst>
           </p:cNvPr>
@@ -14911,7 +14517,7 @@
           <p:cNvPr id="13" name="p06-table-r2-0">
             <a:extLst xmlns:a="http://schemas.openxmlformats.org/drawingml/2006/main">
               <a:ext uri="{FF2B5EF4-FFF2-40B4-BE49-F238E27FC236}">
-                <a16:creationId xmlns:a16="http://schemas.microsoft.com/office/drawing/2014/main" id="{C08B4DD6-9F65-4A6B-9312-5BC531BFDB76}"/>
+                <a16:creationId xmlns:a16="http://schemas.microsoft.com/office/drawing/2014/main" id="{613A2DE8-5D1A-4A14-BBCE-5CFAB23E91DE}"/>
               </a:ext>
             </a:extLst>
           </p:cNvPr>
@@ -14972,7 +14578,7 @@
           <p:cNvPr id="14" name="p06-table-r2-1">
             <a:extLst xmlns:a="http://schemas.openxmlformats.org/drawingml/2006/main">
               <a:ext uri="{FF2B5EF4-FFF2-40B4-BE49-F238E27FC236}">
-                <a16:creationId xmlns:a16="http://schemas.microsoft.com/office/drawing/2014/main" id="{025F6A9B-D3E5-422F-86B9-3491F632475B}"/>
+                <a16:creationId xmlns:a16="http://schemas.microsoft.com/office/drawing/2014/main" id="{79747AAA-B2C2-4DE2-BC65-4E0086F18BF3}"/>
               </a:ext>
             </a:extLst>
           </p:cNvPr>
@@ -15033,7 +14639,7 @@
           <p:cNvPr id="15" name="p06-table-r3-0">
             <a:extLst xmlns:a="http://schemas.openxmlformats.org/drawingml/2006/main">
               <a:ext uri="{FF2B5EF4-FFF2-40B4-BE49-F238E27FC236}">
-                <a16:creationId xmlns:a16="http://schemas.microsoft.com/office/drawing/2014/main" id="{E7C07255-5E62-41BB-8192-6089FF7DAE5B}"/>
+                <a16:creationId xmlns:a16="http://schemas.microsoft.com/office/drawing/2014/main" id="{EC4221EF-F07B-4CC4-AF38-2ABAD1E16FAA}"/>
               </a:ext>
             </a:extLst>
           </p:cNvPr>
@@ -15094,7 +14700,7 @@
           <p:cNvPr id="16" name="p06-table-r3-1">
             <a:extLst xmlns:a="http://schemas.openxmlformats.org/drawingml/2006/main">
               <a:ext uri="{FF2B5EF4-FFF2-40B4-BE49-F238E27FC236}">
-                <a16:creationId xmlns:a16="http://schemas.microsoft.com/office/drawing/2014/main" id="{E2ECC8A2-C6F4-4981-95BD-631D4A5A9B70}"/>
+                <a16:creationId xmlns:a16="http://schemas.microsoft.com/office/drawing/2014/main" id="{AFF82208-6D4B-4EA4-871F-245997627490}"/>
               </a:ext>
             </a:extLst>
           </p:cNvPr>
@@ -15155,7 +14761,7 @@
           <p:cNvPr id="17" name="p06-table-r4-0">
             <a:extLst xmlns:a="http://schemas.openxmlformats.org/drawingml/2006/main">
               <a:ext uri="{FF2B5EF4-FFF2-40B4-BE49-F238E27FC236}">
-                <a16:creationId xmlns:a16="http://schemas.microsoft.com/office/drawing/2014/main" id="{3225C453-26DE-4472-AAD9-42AFF91C0E61}"/>
+                <a16:creationId xmlns:a16="http://schemas.microsoft.com/office/drawing/2014/main" id="{0444ADC3-4E79-462C-8796-0CF1BCA08E01}"/>
               </a:ext>
             </a:extLst>
           </p:cNvPr>
@@ -15216,7 +14822,7 @@
           <p:cNvPr id="18" name="p06-table-r4-1">
             <a:extLst xmlns:a="http://schemas.openxmlformats.org/drawingml/2006/main">
               <a:ext uri="{FF2B5EF4-FFF2-40B4-BE49-F238E27FC236}">
-                <a16:creationId xmlns:a16="http://schemas.microsoft.com/office/drawing/2014/main" id="{3B5AA632-05CD-49E4-9A65-271A3CC4D654}"/>
+                <a16:creationId xmlns:a16="http://schemas.microsoft.com/office/drawing/2014/main" id="{84E201DF-A8EC-4228-A567-246D0298D0A0}"/>
               </a:ext>
             </a:extLst>
           </p:cNvPr>
@@ -15277,7 +14883,7 @@
           <p:cNvPr id="19" name="p06-rule">
             <a:extLst xmlns:a="http://schemas.openxmlformats.org/drawingml/2006/main">
               <a:ext uri="{FF2B5EF4-FFF2-40B4-BE49-F238E27FC236}">
-                <a16:creationId xmlns:a16="http://schemas.microsoft.com/office/drawing/2014/main" id="{DB167608-C0AA-45D2-B2BD-1F9119363F5F}"/>
+                <a16:creationId xmlns:a16="http://schemas.microsoft.com/office/drawing/2014/main" id="{AFDB2D19-37A9-4A8A-9AB9-15BF982BC229}"/>
               </a:ext>
             </a:extLst>
           </p:cNvPr>
@@ -15424,7 +15030,7 @@
           <p:cNvPr id="6" name="p07-question">
             <a:extLst xmlns:a="http://schemas.openxmlformats.org/drawingml/2006/main">
               <a:ext uri="{FF2B5EF4-FFF2-40B4-BE49-F238E27FC236}">
-                <a16:creationId xmlns:a16="http://schemas.microsoft.com/office/drawing/2014/main" id="{EF6790B6-A85E-4B5E-A062-A79EE17E2890}"/>
+                <a16:creationId xmlns:a16="http://schemas.microsoft.com/office/drawing/2014/main" id="{0780E58B-8A08-4B3A-9604-1F1C14322557}"/>
               </a:ext>
             </a:extLst>
           </p:cNvPr>
@@ -15477,7 +15083,7 @@
           <p:cNvPr id="7" name="p07-q-0">
             <a:extLst xmlns:a="http://schemas.openxmlformats.org/drawingml/2006/main">
               <a:ext uri="{FF2B5EF4-FFF2-40B4-BE49-F238E27FC236}">
-                <a16:creationId xmlns:a16="http://schemas.microsoft.com/office/drawing/2014/main" id="{247325A3-95BE-4EC7-A479-3808C6666DEB}"/>
+                <a16:creationId xmlns:a16="http://schemas.microsoft.com/office/drawing/2014/main" id="{75040465-2E75-4D8F-BC5A-181F44B32DDB}"/>
               </a:ext>
             </a:extLst>
           </p:cNvPr>
@@ -15536,7 +15142,7 @@
           <p:cNvPr id="8" name="p07-q-1">
             <a:extLst xmlns:a="http://schemas.openxmlformats.org/drawingml/2006/main">
               <a:ext uri="{FF2B5EF4-FFF2-40B4-BE49-F238E27FC236}">
-                <a16:creationId xmlns:a16="http://schemas.microsoft.com/office/drawing/2014/main" id="{D7C869B2-A841-4478-9321-C44A23A70D4A}"/>
+                <a16:creationId xmlns:a16="http://schemas.microsoft.com/office/drawing/2014/main" id="{8A90BAA6-CEAE-4135-8138-6A6D82943CD2}"/>
               </a:ext>
             </a:extLst>
           </p:cNvPr>
@@ -15595,7 +15201,7 @@
           <p:cNvPr id="9" name="p07-q-2">
             <a:extLst xmlns:a="http://schemas.openxmlformats.org/drawingml/2006/main">
               <a:ext uri="{FF2B5EF4-FFF2-40B4-BE49-F238E27FC236}">
-                <a16:creationId xmlns:a16="http://schemas.microsoft.com/office/drawing/2014/main" id="{05B1BAAF-5039-475F-ABCA-6F4F300B7571}"/>
+                <a16:creationId xmlns:a16="http://schemas.microsoft.com/office/drawing/2014/main" id="{6472A917-C389-44EB-B7AB-DAC27891595E}"/>
               </a:ext>
             </a:extLst>
           </p:cNvPr>
@@ -15654,7 +15260,7 @@
           <p:cNvPr id="10" name="p07-q-3">
             <a:extLst xmlns:a="http://schemas.openxmlformats.org/drawingml/2006/main">
               <a:ext uri="{FF2B5EF4-FFF2-40B4-BE49-F238E27FC236}">
-                <a16:creationId xmlns:a16="http://schemas.microsoft.com/office/drawing/2014/main" id="{5FE0ADD7-B0A0-4FD7-8AF2-D58F0ED2477C}"/>
+                <a16:creationId xmlns:a16="http://schemas.microsoft.com/office/drawing/2014/main" id="{8421C244-7BA5-4212-BCA1-A6791A5D111A}"/>
               </a:ext>
             </a:extLst>
           </p:cNvPr>
@@ -15713,7 +15319,7 @@
           <p:cNvPr id="11" name="p07-q-4">
             <a:extLst xmlns:a="http://schemas.openxmlformats.org/drawingml/2006/main">
               <a:ext uri="{FF2B5EF4-FFF2-40B4-BE49-F238E27FC236}">
-                <a16:creationId xmlns:a16="http://schemas.microsoft.com/office/drawing/2014/main" id="{47326015-1559-4EDA-A8B2-BF531C3401BD}"/>
+                <a16:creationId xmlns:a16="http://schemas.microsoft.com/office/drawing/2014/main" id="{DFEEB681-F3F4-4C4F-B93E-0C4381272550}"/>
               </a:ext>
             </a:extLst>
           </p:cNvPr>
@@ -15772,7 +15378,7 @@
           <p:cNvPr id="12" name="p07-side">
             <a:extLst xmlns:a="http://schemas.openxmlformats.org/drawingml/2006/main">
               <a:ext uri="{FF2B5EF4-FFF2-40B4-BE49-F238E27FC236}">
-                <a16:creationId xmlns:a16="http://schemas.microsoft.com/office/drawing/2014/main" id="{99FE098A-84E6-4A31-8CC0-D7AA6A5E0C79}"/>
+                <a16:creationId xmlns:a16="http://schemas.microsoft.com/office/drawing/2014/main" id="{83810BB3-F501-4563-9072-67577540B67D}"/>
               </a:ext>
             </a:extLst>
           </p:cNvPr>
@@ -15879,7 +15485,7 @@
           <p:cNvPr id="13" name="p07-return">
             <a:extLst xmlns:a="http://schemas.openxmlformats.org/drawingml/2006/main">
               <a:ext uri="{FF2B5EF4-FFF2-40B4-BE49-F238E27FC236}">
-                <a16:creationId xmlns:a16="http://schemas.microsoft.com/office/drawing/2014/main" id="{4888935C-1899-4C9F-AFC8-2AEBF9917C08}"/>
+                <a16:creationId xmlns:a16="http://schemas.microsoft.com/office/drawing/2014/main" id="{DA6C654C-E359-4944-AC53-9E6C839A3EC0}"/>
               </a:ext>
             </a:extLst>
           </p:cNvPr>
@@ -16026,7 +15632,7 @@
           <p:cNvPr id="6" name="p08-b-0">
             <a:extLst xmlns:a="http://schemas.openxmlformats.org/drawingml/2006/main">
               <a:ext uri="{FF2B5EF4-FFF2-40B4-BE49-F238E27FC236}">
-                <a16:creationId xmlns:a16="http://schemas.microsoft.com/office/drawing/2014/main" id="{32322171-BE76-430F-BEE0-529FEB5D06BF}"/>
+                <a16:creationId xmlns:a16="http://schemas.microsoft.com/office/drawing/2014/main" id="{BE9BF67E-253D-420C-8A1A-5754681B15F9}"/>
               </a:ext>
             </a:extLst>
           </p:cNvPr>
@@ -16083,7 +15689,7 @@
           <p:cNvPr id="7" name="p08-e-0">
             <a:extLst xmlns:a="http://schemas.openxmlformats.org/drawingml/2006/main">
               <a:ext uri="{FF2B5EF4-FFF2-40B4-BE49-F238E27FC236}">
-                <a16:creationId xmlns:a16="http://schemas.microsoft.com/office/drawing/2014/main" id="{78DCA151-9586-4B2F-8F0A-456C9368606E}"/>
+                <a16:creationId xmlns:a16="http://schemas.microsoft.com/office/drawing/2014/main" id="{23279088-A9EA-4B82-940C-495E00013BEC}"/>
               </a:ext>
             </a:extLst>
           </p:cNvPr>
@@ -16138,7 +15744,7 @@
           <p:cNvPr id="8" name="p08-b-1">
             <a:extLst xmlns:a="http://schemas.openxmlformats.org/drawingml/2006/main">
               <a:ext uri="{FF2B5EF4-FFF2-40B4-BE49-F238E27FC236}">
-                <a16:creationId xmlns:a16="http://schemas.microsoft.com/office/drawing/2014/main" id="{24EFFA0B-A8C1-45F4-A5E4-9A5EC2BACBA2}"/>
+                <a16:creationId xmlns:a16="http://schemas.microsoft.com/office/drawing/2014/main" id="{44C17E96-BEA5-4028-A5E6-1CCB70C7878F}"/>
               </a:ext>
             </a:extLst>
           </p:cNvPr>
@@ -16195,7 +15801,7 @@
           <p:cNvPr id="9" name="p08-e-1">
             <a:extLst xmlns:a="http://schemas.openxmlformats.org/drawingml/2006/main">
               <a:ext uri="{FF2B5EF4-FFF2-40B4-BE49-F238E27FC236}">
-                <a16:creationId xmlns:a16="http://schemas.microsoft.com/office/drawing/2014/main" id="{03FD4EA8-7EBB-4000-91B1-D50A57F992C7}"/>
+                <a16:creationId xmlns:a16="http://schemas.microsoft.com/office/drawing/2014/main" id="{2015958B-2AA4-4518-9E6B-3DF6A9E91A40}"/>
               </a:ext>
             </a:extLst>
           </p:cNvPr>
@@ -16250,7 +15856,7 @@
           <p:cNvPr id="10" name="p08-b-2">
             <a:extLst xmlns:a="http://schemas.openxmlformats.org/drawingml/2006/main">
               <a:ext uri="{FF2B5EF4-FFF2-40B4-BE49-F238E27FC236}">
-                <a16:creationId xmlns:a16="http://schemas.microsoft.com/office/drawing/2014/main" id="{F759946F-1134-4739-B709-1C1C1A0BF8C9}"/>
+                <a16:creationId xmlns:a16="http://schemas.microsoft.com/office/drawing/2014/main" id="{430B2FA6-C3C6-4CAC-B082-A7FB4ECDB674}"/>
               </a:ext>
             </a:extLst>
           </p:cNvPr>
@@ -16307,7 +15913,7 @@
           <p:cNvPr id="11" name="p08-e-2">
             <a:extLst xmlns:a="http://schemas.openxmlformats.org/drawingml/2006/main">
               <a:ext uri="{FF2B5EF4-FFF2-40B4-BE49-F238E27FC236}">
-                <a16:creationId xmlns:a16="http://schemas.microsoft.com/office/drawing/2014/main" id="{337BBE75-ADE6-4A0C-B542-A301F63D3D4E}"/>
+                <a16:creationId xmlns:a16="http://schemas.microsoft.com/office/drawing/2014/main" id="{5E9F5F7B-3219-4836-8E63-5AF33A14811F}"/>
               </a:ext>
             </a:extLst>
           </p:cNvPr>
@@ -16362,7 +15968,7 @@
           <p:cNvPr id="12" name="p08-b-3">
             <a:extLst xmlns:a="http://schemas.openxmlformats.org/drawingml/2006/main">
               <a:ext uri="{FF2B5EF4-FFF2-40B4-BE49-F238E27FC236}">
-                <a16:creationId xmlns:a16="http://schemas.microsoft.com/office/drawing/2014/main" id="{0D0973AD-52CB-4083-A26F-4CE57828B8F4}"/>
+                <a16:creationId xmlns:a16="http://schemas.microsoft.com/office/drawing/2014/main" id="{27417E51-CA4A-4FAE-9B33-C9CE33C2180C}"/>
               </a:ext>
             </a:extLst>
           </p:cNvPr>
@@ -16419,7 +16025,7 @@
           <p:cNvPr id="13" name="p08-e-3">
             <a:extLst xmlns:a="http://schemas.openxmlformats.org/drawingml/2006/main">
               <a:ext uri="{FF2B5EF4-FFF2-40B4-BE49-F238E27FC236}">
-                <a16:creationId xmlns:a16="http://schemas.microsoft.com/office/drawing/2014/main" id="{BCEA08F2-E1D1-4EC9-BB08-8344AF9849D1}"/>
+                <a16:creationId xmlns:a16="http://schemas.microsoft.com/office/drawing/2014/main" id="{56F84685-31F0-4C3B-8513-181AD43BC929}"/>
               </a:ext>
             </a:extLst>
           </p:cNvPr>
@@ -16474,7 +16080,7 @@
           <p:cNvPr id="14" name="p08-b-4">
             <a:extLst xmlns:a="http://schemas.openxmlformats.org/drawingml/2006/main">
               <a:ext uri="{FF2B5EF4-FFF2-40B4-BE49-F238E27FC236}">
-                <a16:creationId xmlns:a16="http://schemas.microsoft.com/office/drawing/2014/main" id="{BF009EBD-24B6-433D-AA65-71AA122A71CE}"/>
+                <a16:creationId xmlns:a16="http://schemas.microsoft.com/office/drawing/2014/main" id="{29D1A940-C8CF-473D-926E-E3A4E78481FC}"/>
               </a:ext>
             </a:extLst>
           </p:cNvPr>
@@ -16531,7 +16137,7 @@
           <p:cNvPr id="15" name="p08-e-4">
             <a:extLst xmlns:a="http://schemas.openxmlformats.org/drawingml/2006/main">
               <a:ext uri="{FF2B5EF4-FFF2-40B4-BE49-F238E27FC236}">
-                <a16:creationId xmlns:a16="http://schemas.microsoft.com/office/drawing/2014/main" id="{15941529-5CB1-4DCC-976E-5909F50FECAC}"/>
+                <a16:creationId xmlns:a16="http://schemas.microsoft.com/office/drawing/2014/main" id="{5C24F910-1AF6-49C3-B14C-99974E26D4DB}"/>
               </a:ext>
             </a:extLst>
           </p:cNvPr>
@@ -16586,7 +16192,7 @@
           <p:cNvPr id="16" name="p08-record-title">
             <a:extLst xmlns:a="http://schemas.openxmlformats.org/drawingml/2006/main">
               <a:ext uri="{FF2B5EF4-FFF2-40B4-BE49-F238E27FC236}">
-                <a16:creationId xmlns:a16="http://schemas.microsoft.com/office/drawing/2014/main" id="{E8B2A6FE-C0E5-43FB-952A-A9DF7A251E23}"/>
+                <a16:creationId xmlns:a16="http://schemas.microsoft.com/office/drawing/2014/main" id="{34A6423E-72C2-46E5-9F55-FFC1D0BC8661}"/>
               </a:ext>
             </a:extLst>
           </p:cNvPr>
@@ -16639,7 +16245,7 @@
           <p:cNvPr id="17" name="p08-record">
             <a:extLst xmlns:a="http://schemas.openxmlformats.org/drawingml/2006/main">
               <a:ext uri="{FF2B5EF4-FFF2-40B4-BE49-F238E27FC236}">
-                <a16:creationId xmlns:a16="http://schemas.microsoft.com/office/drawing/2014/main" id="{929A1259-588F-4B6F-8D72-442C6F9D15D9}"/>
+                <a16:creationId xmlns:a16="http://schemas.microsoft.com/office/drawing/2014/main" id="{BBFFAE20-0CBB-4273-A5FC-6CEF40C65D5F}"/>
               </a:ext>
             </a:extLst>
           </p:cNvPr>
@@ -16846,7 +16452,7 @@
           <p:cNvPr id="18" name="p08-honesty">
             <a:extLst xmlns:a="http://schemas.openxmlformats.org/drawingml/2006/main">
               <a:ext uri="{FF2B5EF4-FFF2-40B4-BE49-F238E27FC236}">
-                <a16:creationId xmlns:a16="http://schemas.microsoft.com/office/drawing/2014/main" id="{8C9966A7-ED1F-4F7E-ACB5-E886FFC25D71}"/>
+                <a16:creationId xmlns:a16="http://schemas.microsoft.com/office/drawing/2014/main" id="{258B1AFB-E366-4FB9-BB0D-BB7C0FA12BBC}"/>
               </a:ext>
             </a:extLst>
           </p:cNvPr>
@@ -17021,7 +16627,7 @@
           <p:cNvPr id="6" name="p09-source-title">
             <a:extLst xmlns:a="http://schemas.openxmlformats.org/drawingml/2006/main">
               <a:ext uri="{FF2B5EF4-FFF2-40B4-BE49-F238E27FC236}">
-                <a16:creationId xmlns:a16="http://schemas.microsoft.com/office/drawing/2014/main" id="{3FA7F6C4-5204-44EA-A3A3-F927ADEB2FA0}"/>
+                <a16:creationId xmlns:a16="http://schemas.microsoft.com/office/drawing/2014/main" id="{ACFBAC64-EF49-42D5-9907-C797651D5382}"/>
               </a:ext>
             </a:extLst>
           </p:cNvPr>
@@ -17074,7 +16680,7 @@
           <p:cNvPr id="7" name="p09-source-0">
             <a:extLst xmlns:a="http://schemas.openxmlformats.org/drawingml/2006/main">
               <a:ext uri="{FF2B5EF4-FFF2-40B4-BE49-F238E27FC236}">
-                <a16:creationId xmlns:a16="http://schemas.microsoft.com/office/drawing/2014/main" id="{4D412193-BC8A-450F-A368-48A31319E52E}"/>
+                <a16:creationId xmlns:a16="http://schemas.microsoft.com/office/drawing/2014/main" id="{952C6DA5-4E52-424B-80E4-73572D4AEF13}"/>
               </a:ext>
             </a:extLst>
           </p:cNvPr>
@@ -17129,7 +16735,7 @@
           <p:cNvPr id="8" name="p09-source-1">
             <a:extLst xmlns:a="http://schemas.openxmlformats.org/drawingml/2006/main">
               <a:ext uri="{FF2B5EF4-FFF2-40B4-BE49-F238E27FC236}">
-                <a16:creationId xmlns:a16="http://schemas.microsoft.com/office/drawing/2014/main" id="{D4260052-E473-40ED-8794-24FAEF7DF7BC}"/>
+                <a16:creationId xmlns:a16="http://schemas.microsoft.com/office/drawing/2014/main" id="{B9D4FFF0-A761-41F8-8541-B2D054406CDC}"/>
               </a:ext>
             </a:extLst>
           </p:cNvPr>
@@ -17184,7 +16790,7 @@
           <p:cNvPr id="9" name="p09-source-2">
             <a:extLst xmlns:a="http://schemas.openxmlformats.org/drawingml/2006/main">
               <a:ext uri="{FF2B5EF4-FFF2-40B4-BE49-F238E27FC236}">
-                <a16:creationId xmlns:a16="http://schemas.microsoft.com/office/drawing/2014/main" id="{EF85E465-DB3A-49D8-BC4E-C50118098707}"/>
+                <a16:creationId xmlns:a16="http://schemas.microsoft.com/office/drawing/2014/main" id="{C1D32368-D33F-433F-9C2C-4346A512EBBB}"/>
               </a:ext>
             </a:extLst>
           </p:cNvPr>
@@ -17239,7 +16845,7 @@
           <p:cNvPr id="10" name="p09-source-3">
             <a:extLst xmlns:a="http://schemas.openxmlformats.org/drawingml/2006/main">
               <a:ext uri="{FF2B5EF4-FFF2-40B4-BE49-F238E27FC236}">
-                <a16:creationId xmlns:a16="http://schemas.microsoft.com/office/drawing/2014/main" id="{F7758D1C-21BA-413B-A69C-CEF2416B8553}"/>
+                <a16:creationId xmlns:a16="http://schemas.microsoft.com/office/drawing/2014/main" id="{9C3C23DC-375F-42EA-9695-27CF66EA8E40}"/>
               </a:ext>
             </a:extLst>
           </p:cNvPr>
@@ -17294,7 +16900,7 @@
           <p:cNvPr id="11" name="p09-source-4">
             <a:extLst xmlns:a="http://schemas.openxmlformats.org/drawingml/2006/main">
               <a:ext uri="{FF2B5EF4-FFF2-40B4-BE49-F238E27FC236}">
-                <a16:creationId xmlns:a16="http://schemas.microsoft.com/office/drawing/2014/main" id="{57344FCA-5C15-462F-9CA7-2B6613C0DBD7}"/>
+                <a16:creationId xmlns:a16="http://schemas.microsoft.com/office/drawing/2014/main" id="{CEBC4B5B-6B7F-421F-9D5F-06FC5D8E020B}"/>
               </a:ext>
             </a:extLst>
           </p:cNvPr>
@@ -17349,7 +16955,7 @@
           <p:cNvPr id="12" name="p09-arrow">
             <a:extLst xmlns:a="http://schemas.openxmlformats.org/drawingml/2006/main">
               <a:ext uri="{FF2B5EF4-FFF2-40B4-BE49-F238E27FC236}">
-                <a16:creationId xmlns:a16="http://schemas.microsoft.com/office/drawing/2014/main" id="{212FC8BC-36AC-489A-A028-9D6A18CE3A02}"/>
+                <a16:creationId xmlns:a16="http://schemas.microsoft.com/office/drawing/2014/main" id="{B2DA1DAA-32EB-42FE-93B7-5CE451A3A291}"/>
               </a:ext>
             </a:extLst>
           </p:cNvPr>
@@ -17402,7 +17008,7 @@
           <p:cNvPr id="13" name="p09-only">
             <a:extLst xmlns:a="http://schemas.openxmlformats.org/drawingml/2006/main">
               <a:ext uri="{FF2B5EF4-FFF2-40B4-BE49-F238E27FC236}">
-                <a16:creationId xmlns:a16="http://schemas.microsoft.com/office/drawing/2014/main" id="{D871670E-DA22-4DDF-A6AB-01775F37A9A4}"/>
+                <a16:creationId xmlns:a16="http://schemas.microsoft.com/office/drawing/2014/main" id="{3E9CC839-A4F6-49BE-80F4-D9D30A29AED1}"/>
               </a:ext>
             </a:extLst>
           </p:cNvPr>
@@ -17455,7 +17061,7 @@
           <p:cNvPr id="14" name="p09-d-0">
             <a:extLst xmlns:a="http://schemas.openxmlformats.org/drawingml/2006/main">
               <a:ext uri="{FF2B5EF4-FFF2-40B4-BE49-F238E27FC236}">
-                <a16:creationId xmlns:a16="http://schemas.microsoft.com/office/drawing/2014/main" id="{3A163191-14CA-4FF3-9AF7-3E5680BBBC80}"/>
+                <a16:creationId xmlns:a16="http://schemas.microsoft.com/office/drawing/2014/main" id="{9E429C67-8FC1-4FBA-A12C-BE410D2E80FC}"/>
               </a:ext>
             </a:extLst>
           </p:cNvPr>
@@ -17542,7 +17148,7 @@
           <p:cNvPr id="15" name="p09-d-1">
             <a:extLst xmlns:a="http://schemas.openxmlformats.org/drawingml/2006/main">
               <a:ext uri="{FF2B5EF4-FFF2-40B4-BE49-F238E27FC236}">
-                <a16:creationId xmlns:a16="http://schemas.microsoft.com/office/drawing/2014/main" id="{2B44F876-9140-44E9-B0D5-7393E576B1B8}"/>
+                <a16:creationId xmlns:a16="http://schemas.microsoft.com/office/drawing/2014/main" id="{11676CD6-37AC-48E9-AAB7-7B0D6BAD7D31}"/>
               </a:ext>
             </a:extLst>
           </p:cNvPr>
@@ -17629,7 +17235,7 @@
           <p:cNvPr id="16" name="p09-d-2">
             <a:extLst xmlns:a="http://schemas.openxmlformats.org/drawingml/2006/main">
               <a:ext uri="{FF2B5EF4-FFF2-40B4-BE49-F238E27FC236}">
-                <a16:creationId xmlns:a16="http://schemas.microsoft.com/office/drawing/2014/main" id="{72797DCF-6404-4422-B636-5AE505DC4081}"/>
+                <a16:creationId xmlns:a16="http://schemas.microsoft.com/office/drawing/2014/main" id="{2631D214-025A-4A92-A25B-7962FC7C276C}"/>
               </a:ext>
             </a:extLst>
           </p:cNvPr>
@@ -17716,7 +17322,7 @@
           <p:cNvPr id="17" name="p09-d-3">
             <a:extLst xmlns:a="http://schemas.openxmlformats.org/drawingml/2006/main">
               <a:ext uri="{FF2B5EF4-FFF2-40B4-BE49-F238E27FC236}">
-                <a16:creationId xmlns:a16="http://schemas.microsoft.com/office/drawing/2014/main" id="{DDCB7483-B912-4C68-A77B-C3840FD11E1B}"/>
+                <a16:creationId xmlns:a16="http://schemas.microsoft.com/office/drawing/2014/main" id="{8070CB12-8E93-41EE-B557-5933283ECC60}"/>
               </a:ext>
             </a:extLst>
           </p:cNvPr>
@@ -17803,7 +17409,7 @@
           <p:cNvPr id="18" name="p09-responsibility">
             <a:extLst xmlns:a="http://schemas.openxmlformats.org/drawingml/2006/main">
               <a:ext uri="{FF2B5EF4-FFF2-40B4-BE49-F238E27FC236}">
-                <a16:creationId xmlns:a16="http://schemas.microsoft.com/office/drawing/2014/main" id="{49F9CD7E-06FB-4CB8-BF7C-334CC42FC5DF}"/>
+                <a16:creationId xmlns:a16="http://schemas.microsoft.com/office/drawing/2014/main" id="{59CE3CF1-EFE0-4602-A959-5B6B598CE9C6}"/>
               </a:ext>
             </a:extLst>
           </p:cNvPr>
